--- a/docs/SageAI_Business_Case.pptx
+++ b/docs/SageAI_Business_Case.pptx
@@ -4303,7 +4303,7 @@
                             <a:srgbClr val="0D1B2A"/>
                           </a:solidFill>
                         </a:rPr>
-                        <a:t>Phases 0–4: Core</a:t>
+                        <a:t>Phases 0-4: Core</a:t>
                       </a:r>
                     </a:p>
                   </a:txBody>
@@ -4347,7 +4347,7 @@
                             <a:srgbClr val="0D1B2A"/>
                           </a:solidFill>
                         </a:rPr>
-                        <a:t>Agents · API · Web UI · Approval gate · Audit log</a:t>
+                        <a:t>Agents, API, Web UI, Approval gate, Audit log</a:t>
                       </a:r>
                     </a:p>
                   </a:txBody>
@@ -4369,7 +4369,7 @@
                             <a:srgbClr val="0D1B2A"/>
                           </a:solidFill>
                         </a:rPr>
-                        <a:t>✅ Complete</a:t>
+                        <a:t>Complete</a:t>
                       </a:r>
                     </a:p>
                   </a:txBody>
@@ -4459,7 +4459,7 @@
                             <a:srgbClr val="0D1B2A"/>
                           </a:solidFill>
                         </a:rPr>
-                        <a:t>✅ Complete</a:t>
+                        <a:t>Complete</a:t>
                       </a:r>
                     </a:p>
                   </a:txBody>
@@ -4527,7 +4527,7 @@
                             <a:srgbClr val="0D1B2A"/>
                           </a:solidFill>
                         </a:rPr>
-                        <a:t>Plain-language → YAML solution wizard</a:t>
+                        <a:t>Plain-language to YAML solution wizard</a:t>
                       </a:r>
                     </a:p>
                   </a:txBody>
@@ -4549,7 +4549,7 @@
                             <a:srgbClr val="0D1B2A"/>
                           </a:solidFill>
                         </a:rPr>
-                        <a:t>✅ Complete</a:t>
+                        <a:t>Complete</a:t>
                       </a:r>
                     </a:p>
                   </a:txBody>
@@ -4573,7 +4573,7 @@
                             <a:srgbClr val="0D1B2A"/>
                           </a:solidFill>
                         </a:rPr>
-                        <a:t>Phases 7–11</a:t>
+                        <a:t>Phases 7-11</a:t>
                       </a:r>
                     </a:p>
                   </a:txBody>
@@ -4617,7 +4617,7 @@
                             <a:srgbClr val="0D1B2A"/>
                           </a:solidFill>
                         </a:rPr>
-                        <a:t>Knowledge CRUD · Slack · Eval · Multi-tenant · Temporal</a:t>
+                        <a:t>Knowledge CRUD, Slack, Eval, Multi-tenant, Temporal</a:t>
                       </a:r>
                     </a:p>
                   </a:txBody>
@@ -4639,7 +4639,7 @@
                             <a:srgbClr val="0D1B2A"/>
                           </a:solidFill>
                         </a:rPr>
-                        <a:t>✅ Complete</a:t>
+                        <a:t>Complete</a:t>
                       </a:r>
                     </a:p>
                   </a:txBody>
@@ -4729,7 +4729,7 @@
                             <a:srgbClr val="0D1B2A"/>
                           </a:solidFill>
                         </a:rPr>
-                        <a:t>🔵 Next</a:t>
+                        <a:t>Next</a:t>
                       </a:r>
                     </a:p>
                   </a:txBody>
@@ -4797,7 +4797,7 @@
                             <a:srgbClr val="0D1B2A"/>
                           </a:solidFill>
                         </a:rPr>
-                        <a:t>KPI tracking · RAG feedback loop · first improvements</a:t>
+                        <a:t>KPI tracking, RAG feedback loop, first improvements</a:t>
                       </a:r>
                     </a:p>
                   </a:txBody>
@@ -4819,7 +4819,7 @@
                             <a:srgbClr val="0D1B2A"/>
                           </a:solidFill>
                         </a:rPr>
-                        <a:t>🔵 Planned</a:t>
+                        <a:t>Planned</a:t>
                       </a:r>
                     </a:p>
                   </a:txBody>
@@ -4887,7 +4887,7 @@
                             <a:srgbClr val="0D1B2A"/>
                           </a:solidFill>
                         </a:rPr>
-                        <a:t>Multi-team rollout · Spira integration · exec dashboards</a:t>
+                        <a:t>Multi-team rollout, Spira integration, exec dashboards</a:t>
                       </a:r>
                     </a:p>
                   </a:txBody>
@@ -4909,7 +4909,7 @@
                             <a:srgbClr val="0D1B2A"/>
                           </a:solidFill>
                         </a:rPr>
-                        <a:t>🔵 Planned</a:t>
+                        <a:t>Planned</a:t>
                       </a:r>
                     </a:p>
                   </a:txBody>
@@ -5201,7 +5201,7 @@
                   <a:srgbClr val="0D1B2A"/>
                 </a:solidFill>
               </a:rPr>
-              <a:t>✅  Production deployment approval (internal network)</a:t>
+              <a:t>Production deployment approval (internal network)</a:t>
             </a:r>
           </a:p>
         </p:txBody>
@@ -5235,7 +5235,7 @@
                   <a:srgbClr val="0D1B2A"/>
                 </a:solidFill>
               </a:rPr>
-              <a:t>✅  2-day engineering team training session</a:t>
+              <a:t>2-day engineering team training session</a:t>
             </a:r>
           </a:p>
         </p:txBody>
@@ -5269,7 +5269,7 @@
                   <a:srgbClr val="0D1B2A"/>
                 </a:solidFill>
               </a:rPr>
-              <a:t>✅  Access to GitLab, Metabase, Teams API credentials</a:t>
+              <a:t>Access to GitLab, Metabase, Teams API credentials</a:t>
             </a:r>
           </a:p>
         </p:txBody>
@@ -5303,7 +5303,7 @@
                   <a:srgbClr val="0D1B2A"/>
                 </a:solidFill>
               </a:rPr>
-              <a:t>✅  Dedicated server or VM  (8-core CPU · 32 GB RAM · optional GPU)</a:t>
+              <a:t>Dedicated server or VM  (8-core CPU · 32 GB RAM · optional GPU)</a:t>
             </a:r>
           </a:p>
         </p:txBody>
@@ -5371,7 +5371,7 @@
                   <a:srgbClr val="0D1B2A"/>
                 </a:solidFill>
               </a:rPr>
-              <a:t>📈  KPI dashboard by Week 2</a:t>
+              <a:t>KPI dashboard operational by Week 2</a:t>
             </a:r>
           </a:p>
         </p:txBody>
@@ -5405,7 +5405,7 @@
                   <a:srgbClr val="0D1B2A"/>
                 </a:solidFill>
               </a:rPr>
-              <a:t>⏱   60+ hours/week reclaimed from manual work</a:t>
+              <a:t>60+ hours/week reclaimed from manual work</a:t>
             </a:r>
           </a:p>
         </p:txBody>
@@ -5439,7 +5439,7 @@
                   <a:srgbClr val="0D1B2A"/>
                 </a:solidFill>
               </a:rPr>
-              <a:t>📋  ISO 13485 audit trail from day 1</a:t>
+              <a:t>ISO 13485 audit trail from day 1</a:t>
             </a:r>
           </a:p>
         </p:txBody>
@@ -5473,7 +5473,7 @@
                   <a:srgbClr val="0D1B2A"/>
                 </a:solidFill>
               </a:rPr>
-              <a:t>🤖  AI that learns from your engineers' expertise</a:t>
+              <a:t>AI that learns from your engineers' expertise</a:t>
             </a:r>
           </a:p>
         </p:txBody>
@@ -5507,7 +5507,7 @@
                   <a:srgbClr val="0D1B2A"/>
                 </a:solidFill>
               </a:rPr>
-              <a:t>💰  ROI positive within 2 months*</a:t>
+              <a:t>ROI positive within 2 months*</a:t>
             </a:r>
           </a:p>
         </p:txBody>
@@ -5704,7 +5704,7 @@
                   <a:srgbClr val="7B4F00"/>
                 </a:solidFill>
               </a:rPr>
-              <a:t>⚠️  COST DISCLAIMER — All financial figures, FTE savings, and ROI estimates on this slide are based on internal assumptions and industry benchmarks. They must be validated and replaced with actual measured data before any business decision is made.</a:t>
+              <a:t>IMPORTANT: All financial figures, FTE savings, and ROI estimates on this slide are based on internal assumptions and industry benchmarks. They must be validated and replaced with actual measured data before any business decision is made.</a:t>
             </a:r>
           </a:p>
         </p:txBody>
@@ -6083,7 +6083,7 @@
                   <a:srgbClr val="0D1B2A"/>
                 </a:solidFill>
               </a:rPr>
-              <a:t>⏱  45–60 min per error log analysis (manual triage)</a:t>
+              <a:t>45-60 min per error log analysis — manual triage every time</a:t>
             </a:r>
           </a:p>
         </p:txBody>
@@ -6117,7 +6117,7 @@
                   <a:srgbClr val="0D1B2A"/>
                 </a:solidFill>
               </a:rPr>
-              <a:t>🔁  3–5 day MR review backlog — engineers blocked waiting</a:t>
+              <a:t>3-5 day MR review backlog — engineers blocked waiting for feedback</a:t>
             </a:r>
           </a:p>
         </p:txBody>
@@ -6151,7 +6151,7 @@
                   <a:srgbClr val="0D1B2A"/>
                 </a:solidFill>
               </a:rPr>
-              <a:t>📋  8+ hours/week compliance reporting — pure administrative overhead</a:t>
+              <a:t>8+ hours/week compliance reporting — pure administrative overhead</a:t>
             </a:r>
           </a:p>
         </p:txBody>
@@ -6185,7 +6185,7 @@
                   <a:srgbClr val="0D1B2A"/>
                 </a:solidFill>
               </a:rPr>
-              <a:t>🧠  Expert knowledge lost permanently when engineers leave</a:t>
+              <a:t>Expert knowledge lost permanently when engineers leave the team</a:t>
             </a:r>
           </a:p>
         </p:txBody>
@@ -6219,7 +6219,7 @@
                   <a:srgbClr val="0D1B2A"/>
                 </a:solidFill>
               </a:rPr>
-              <a:t>⚠️   Error detection relies on human vigilance 24 / 7 — unsustainable</a:t>
+              <a:t>Error detection relies on human vigilance 24/7 — unsustainable at scale</a:t>
             </a:r>
           </a:p>
         </p:txBody>
@@ -6287,7 +6287,7 @@
                   <a:srgbClr val="0D1B2A"/>
                 </a:solidFill>
               </a:rPr>
-              <a:t>▶  Result: ~68 hrs/week of preventable manual work — every single week</a:t>
+              <a:t>Result: ~68 hrs/week of preventable manual work — every single week</a:t>
             </a:r>
           </a:p>
         </p:txBody>
@@ -6535,7 +6535,7 @@
                   <a:srgbClr val="0D1B2A"/>
                 </a:solidFill>
               </a:rPr>
-              <a:t>✅  Analyzes error logs in &lt; 60 seconds  (vs 45–60 min manual)</a:t>
+              <a:t>Analyzes error logs in under 60 seconds  (vs 45-60 min manual)</a:t>
             </a:r>
           </a:p>
         </p:txBody>
@@ -6569,7 +6569,7 @@
                   <a:srgbClr val="0D1B2A"/>
                 </a:solidFill>
               </a:rPr>
-              <a:t>✅  AI code reviews with multi-step ReAct reasoning loop</a:t>
+              <a:t>AI code reviews with multi-step ReAct reasoning loop</a:t>
             </a:r>
           </a:p>
         </p:txBody>
@@ -6603,7 +6603,7 @@
                   <a:srgbClr val="0D1B2A"/>
                 </a:solidFill>
               </a:rPr>
-              <a:t>✅  Monitors Teams, Metabase, GitLab — real-time event detection</a:t>
+              <a:t>Monitors Teams, Metabase, GitLab — real-time event detection</a:t>
             </a:r>
           </a:p>
         </p:txBody>
@@ -6637,7 +6637,7 @@
                   <a:srgbClr val="0D1B2A"/>
                 </a:solidFill>
               </a:rPr>
-              <a:t>✅  Every decision logged to immutable ISO 13485 audit trail</a:t>
+              <a:t>Every decision logged to immutable ISO 13485 audit trail</a:t>
             </a:r>
           </a:p>
         </p:txBody>
@@ -6671,7 +6671,7 @@
                   <a:srgbClr val="0D1B2A"/>
                 </a:solidFill>
               </a:rPr>
-              <a:t>✅  Human-in-the-loop: AI advises, humans decide — always</a:t>
+              <a:t>Human-in-the-loop: AI advises, humans decide — always</a:t>
             </a:r>
           </a:p>
         </p:txBody>
@@ -6705,7 +6705,7 @@
                   <a:srgbClr val="0D1B2A"/>
                 </a:solidFill>
               </a:rPr>
-              <a:t>✅  Learns from every correction via vector memory (RAG)</a:t>
+              <a:t>Learns from every correction via vector memory (RAG)</a:t>
             </a:r>
           </a:p>
         </p:txBody>
@@ -6739,7 +6739,7 @@
                   <a:srgbClr val="0D1B2A"/>
                 </a:solidFill>
               </a:rPr>
-              <a:t>✅  Web dashboard for all stakeholders — zero CLI required</a:t>
+              <a:t>Web dashboard for all stakeholders — zero CLI required</a:t>
             </a:r>
           </a:p>
         </p:txBody>
@@ -9158,7 +9158,7 @@
                   <a:srgbClr val="7B4F00"/>
                 </a:solidFill>
               </a:rPr>
-              <a:t>⚠️  COST DISCLAIMER — All financial figures, FTE savings, and ROI estimates on this slide are based on internal assumptions and industry benchmarks. They must be validated and replaced with actual measured data before any business decision is made.</a:t>
+              <a:t>IMPORTANT: All financial figures, FTE savings, and ROI estimates on this slide are based on internal assumptions and industry benchmarks. They must be validated and replaced with actual measured data before any business decision is made.</a:t>
             </a:r>
           </a:p>
         </p:txBody>
@@ -9967,7 +9967,7 @@
                   <a:srgbClr val="0078D4"/>
                 </a:solidFill>
               </a:rPr>
-              <a:t>▸  Event Sources</a:t>
+              <a:t>Event Sources</a:t>
             </a:r>
           </a:p>
         </p:txBody>
@@ -10035,7 +10035,7 @@
                   <a:srgbClr val="0078D4"/>
                 </a:solidFill>
               </a:rPr>
-              <a:t>▸  AI Agents</a:t>
+              <a:t>AI Agents</a:t>
             </a:r>
           </a:p>
         </p:txBody>
@@ -10103,7 +10103,7 @@
                   <a:srgbClr val="0078D4"/>
                 </a:solidFill>
               </a:rPr>
-              <a:t>▸  Compliance Layer</a:t>
+              <a:t>Compliance Layer</a:t>
             </a:r>
           </a:p>
         </p:txBody>
@@ -10392,7 +10392,7 @@
                             <a:srgbClr val="FFFFFF"/>
                           </a:solidFill>
                         </a:rPr>
-                        <a:t>#</a:t>
+                        <a:t>No.</a:t>
                       </a:r>
                     </a:p>
                   </a:txBody>
@@ -10460,7 +10460,7 @@
                             <a:srgbClr val="0D1B2A"/>
                           </a:solidFill>
                         </a:rPr>
-                        <a:t>🔍</a:t>
+                        <a:t>01</a:t>
                       </a:r>
                     </a:p>
                   </a:txBody>
@@ -10504,7 +10504,7 @@
                             <a:srgbClr val="0D1B2A"/>
                           </a:solidFill>
                         </a:rPr>
-                        <a:t>AI triage in &lt; 60 s — severity RED / AMBER / GREEN with root-cause reasoning</a:t>
+                        <a:t>AI triage in under 60 s — severity RED / AMBER / GREEN with root-cause reasoning</a:t>
                       </a:r>
                     </a:p>
                   </a:txBody>
@@ -10528,7 +10528,7 @@
                             <a:srgbClr val="0D1B2A"/>
                           </a:solidFill>
                         </a:rPr>
-                        <a:t>🤖</a:t>
+                        <a:t>02</a:t>
                       </a:r>
                     </a:p>
                   </a:txBody>
@@ -10596,7 +10596,7 @@
                             <a:srgbClr val="0D1B2A"/>
                           </a:solidFill>
                         </a:rPr>
-                        <a:t>📋</a:t>
+                        <a:t>03</a:t>
                       </a:r>
                     </a:p>
                   </a:txBody>
@@ -10664,7 +10664,7 @@
                             <a:srgbClr val="0D1B2A"/>
                           </a:solidFill>
                         </a:rPr>
-                        <a:t>👁</a:t>
+                        <a:t>04</a:t>
                       </a:r>
                     </a:p>
                   </a:txBody>
@@ -10686,7 +10686,7 @@
                             <a:srgbClr val="0D1B2A"/>
                           </a:solidFill>
                         </a:rPr>
-                        <a:t>24 / 7 Monitor</a:t>
+                        <a:t>24/7 Monitor</a:t>
                       </a:r>
                     </a:p>
                   </a:txBody>
@@ -10732,7 +10732,7 @@
                             <a:srgbClr val="0D1B2A"/>
                           </a:solidFill>
                         </a:rPr>
-                        <a:t>📡</a:t>
+                        <a:t>05</a:t>
                       </a:r>
                     </a:p>
                   </a:txBody>
@@ -10800,7 +10800,7 @@
                             <a:srgbClr val="0D1B2A"/>
                           </a:solidFill>
                         </a:rPr>
-                        <a:t>🚀</a:t>
+                        <a:t>06</a:t>
                       </a:r>
                     </a:p>
                   </a:txBody>
@@ -10844,7 +10844,7 @@
                             <a:srgbClr val="0D1B2A"/>
                           </a:solidFill>
                         </a:rPr>
-                        <a:t>Plain-language description → full YAML solution in &lt; 60 seconds</a:t>
+                        <a:t>Plain-language description to full YAML solution in under 60 seconds</a:t>
                       </a:r>
                     </a:p>
                   </a:txBody>
@@ -10868,7 +10868,7 @@
                             <a:srgbClr val="0D1B2A"/>
                           </a:solidFill>
                         </a:rPr>
-                        <a:t>📚</a:t>
+                        <a:t>07</a:t>
                       </a:r>
                     </a:p>
                   </a:txBody>
@@ -10936,7 +10936,7 @@
                             <a:srgbClr val="0D1B2A"/>
                           </a:solidFill>
                         </a:rPr>
-                        <a:t>💬</a:t>
+                        <a:t>08</a:t>
                       </a:r>
                     </a:p>
                   </a:txBody>
@@ -11004,7 +11004,7 @@
                             <a:srgbClr val="0D1B2A"/>
                           </a:solidFill>
                         </a:rPr>
-                        <a:t>🧪</a:t>
+                        <a:t>09</a:t>
                       </a:r>
                     </a:p>
                   </a:txBody>
@@ -11048,7 +11048,7 @@
                             <a:srgbClr val="0D1B2A"/>
                           </a:solidFill>
                         </a:rPr>
-                        <a:t>YAML test cases · 0–100 scoring · SQLite history · regression tracking</a:t>
+                        <a:t>YAML test cases, 0-100 scoring, SQLite history, regression tracking</a:t>
                       </a:r>
                     </a:p>
                   </a:txBody>
@@ -11072,7 +11072,7 @@
                             <a:srgbClr val="0D1B2A"/>
                           </a:solidFill>
                         </a:rPr>
-                        <a:t>🏢</a:t>
+                        <a:t>10</a:t>
                       </a:r>
                     </a:p>
                   </a:txBody>
@@ -11116,7 +11116,7 @@
                             <a:srgbClr val="0D1B2A"/>
                           </a:solidFill>
                         </a:rPr>
-                        <a:t>X-SAGE-Tenant header → per-team knowledge collection isolation</a:t>
+                        <a:t>X-SAGE-Tenant header — per-team knowledge collection isolation</a:t>
                       </a:r>
                     </a:p>
                   </a:txBody>
@@ -11140,7 +11140,7 @@
                             <a:srgbClr val="0D1B2A"/>
                           </a:solidFill>
                         </a:rPr>
-                        <a:t>⏱</a:t>
+                        <a:t>11</a:t>
                       </a:r>
                     </a:p>
                   </a:txBody>
@@ -11184,7 +11184,7 @@
                             <a:srgbClr val="0D1B2A"/>
                           </a:solidFill>
                         </a:rPr>
-                        <a:t>LangGraph (interrupt/resume) + Temporal — workflows survive server restart</a:t>
+                        <a:t>LangGraph interrupt/resume + Temporal — workflows survive server restart</a:t>
                       </a:r>
                     </a:p>
                   </a:txBody>
@@ -11208,7 +11208,7 @@
                             <a:srgbClr val="0D1B2A"/>
                           </a:solidFill>
                         </a:rPr>
-                        <a:t>📊</a:t>
+                        <a:t>12</a:t>
                       </a:r>
                     </a:p>
                   </a:txBody>
@@ -11276,7 +11276,7 @@
                             <a:srgbClr val="0D1B2A"/>
                           </a:solidFill>
                         </a:rPr>
-                        <a:t>🌐</a:t>
+                        <a:t>13</a:t>
                       </a:r>
                     </a:p>
                   </a:txBody>
@@ -11320,7 +11320,7 @@
                             <a:srgbClr val="0D1B2A"/>
                           </a:solidFill>
                         </a:rPr>
-                        <a:t>Dashboard · Analyst · Developer · Audit · Monitor — no CLI needed</a:t>
+                        <a:t>Dashboard, Analyst, Developer, Audit, Monitor — no CLI needed</a:t>
                       </a:r>
                     </a:p>
                   </a:txBody>
@@ -11578,7 +11578,7 @@
                   <a:srgbClr val="0D1B2A"/>
                 </a:solidFill>
               </a:rPr>
-              <a:t>✅  ISO 13485:2016  —  Quality Management System</a:t>
+              <a:t>ISO 13485:2016  —  Quality Management System</a:t>
             </a:r>
           </a:p>
         </p:txBody>
@@ -11612,7 +11612,7 @@
                   <a:srgbClr val="0D1B2A"/>
                 </a:solidFill>
               </a:rPr>
-              <a:t>✅  ISO 14971:2019  —  Risk Management — 7 risks identified &amp; controlled</a:t>
+              <a:t>ISO 14971:2019  —  Risk Management — 7 risks identified &amp; controlled</a:t>
             </a:r>
           </a:p>
         </p:txBody>
@@ -11646,7 +11646,7 @@
                   <a:srgbClr val="0D1B2A"/>
                 </a:solidFill>
               </a:rPr>
-              <a:t>✅  IEC 62304:2006  —  Medical Device Software Lifecycle</a:t>
+              <a:t>IEC 62304:2006  —  Medical Device Software Lifecycle</a:t>
             </a:r>
           </a:p>
         </p:txBody>
@@ -11680,7 +11680,7 @@
                   <a:srgbClr val="0D1B2A"/>
                 </a:solidFill>
               </a:rPr>
-              <a:t>✅  FDA 21 CFR Part 11  —  Electronic Records &amp; Signatures</a:t>
+              <a:t>FDA 21 CFR Part 11  —  Electronic Records &amp; Signatures</a:t>
             </a:r>
           </a:p>
         </p:txBody>
@@ -11714,7 +11714,7 @@
                   <a:srgbClr val="0D1B2A"/>
                 </a:solidFill>
               </a:rPr>
-              <a:t>✅  FDA Cybersecurity Guidance 2023  —  Threat modelling, SBOM, update policy</a:t>
+              <a:t>FDA Cybersecurity Guidance 2023  —  Threat modelling, SBOM, update policy</a:t>
             </a:r>
           </a:p>
         </p:txBody>
@@ -11782,7 +11782,7 @@
                   <a:srgbClr val="0D1B2A"/>
                 </a:solidFill>
               </a:rPr>
-              <a:t>  •  Immutable append-only audit log (no deletes, ever)</a:t>
+              <a:t>  Immutable append-only audit log (no deletes, ever)</a:t>
             </a:r>
           </a:p>
         </p:txBody>
@@ -11816,7 +11816,7 @@
                   <a:srgbClr val="0D1B2A"/>
                 </a:solidFill>
               </a:rPr>
-              <a:t>  •  UUID trace ID on every AI decision</a:t>
+              <a:t>  UUID trace ID on every AI decision</a:t>
             </a:r>
           </a:p>
         </p:txBody>
@@ -11850,7 +11850,7 @@
                   <a:srgbClr val="0D1B2A"/>
                 </a:solidFill>
               </a:rPr>
-              <a:t>  •  Human approval gate on every proposal — enforced in code</a:t>
+              <a:t>  Human approval gate on every proposal — enforced in code</a:t>
             </a:r>
           </a:p>
         </p:txBody>
@@ -11884,7 +11884,7 @@
                   <a:srgbClr val="0D1B2A"/>
                 </a:solidFill>
               </a:rPr>
-              <a:t>  •  Full DHF: SRS · RTM · V&amp;V Plan · SOUP Inventory</a:t>
+              <a:t>  Full DHF: SRS · RTM · V&amp;V Plan · SOUP Inventory</a:t>
             </a:r>
           </a:p>
         </p:txBody>
@@ -11918,7 +11918,7 @@
                   <a:srgbClr val="0D1B2A"/>
                 </a:solidFill>
               </a:rPr>
-              <a:t>  •  Air-gapped LLM option — no cloud dependency required</a:t>
+              <a:t>  Air-gapped LLM option — no cloud dependency required</a:t>
             </a:r>
           </a:p>
         </p:txBody>

--- a/docs/SageAI_Business_Case.pptx
+++ b/docs/SageAI_Business_Case.pptx
@@ -6739,7 +6739,7 @@
                   <a:srgbClr val="0D1B2A"/>
                 </a:solidFill>
               </a:rPr>
-              <a:t>Web dashboard for all stakeholders — zero CLI required</a:t>
+              <a:t>100+ tool integrations via Composio — GitHub, Jira, Salesforce, Slack and more</a:t>
             </a:r>
           </a:p>
         </p:txBody>
@@ -6817,6 +6817,40 @@
                 </a:solidFill>
               </a:rPr>
               <a:t>SAGE[ai] — Confidential | March 2026</a:t>
+            </a:r>
+          </a:p>
+        </p:txBody>
+      </p:sp>
+      <p:sp>
+        <p:nvSpPr>
+          <p:cNvPr id="11" name="TextBox 10"/>
+          <p:cNvSpPr txBox="1"/>
+          <p:nvPr/>
+        </p:nvSpPr>
+        <p:spPr>
+          <a:xfrm>
+            <a:off x="502920" y="4666488"/>
+            <a:ext cx="11155680" cy="384048"/>
+          </a:xfrm>
+          <a:prstGeom prst="rect">
+            <a:avLst/>
+          </a:prstGeom>
+          <a:noFill/>
+        </p:spPr>
+        <p:txBody>
+          <a:bodyPr wrap="square">
+            <a:spAutoFit/>
+          </a:bodyPr>
+          <a:lstStyle/>
+          <a:p>
+            <a:pPr algn="l"/>
+            <a:r>
+              <a:rPr sz="1500" b="0" i="0">
+                <a:solidFill>
+                  <a:srgbClr val="0D1B2A"/>
+                </a:solidFill>
+              </a:rPr>
+              <a:t>Web dashboard for all stakeholders — hire new agent roles, connect tools, approve proposals</a:t>
             </a:r>
           </a:p>
         </p:txBody>
@@ -10351,7 +10385,7 @@
                   <a:srgbClr val="00B4D8"/>
                 </a:solidFill>
               </a:rPr>
-              <a:t>Production-ready capabilities across 12 integration phases — available now</a:t>
+              <a:t>Production-ready capabilities — agents, tools, approvals, and 100+ integrations — available now</a:t>
             </a:r>
           </a:p>
         </p:txBody>

--- a/docs/SageAI_Business_Case.pptx
+++ b/docs/SageAI_Business_Case.pptx
@@ -6817,6 +6817,40 @@
                 </a:solidFill>
               </a:rPr>
               <a:t>SAGE[ai] — Confidential | March 2026</a:t>
+            </a:r>
+          </a:p>
+        </p:txBody>
+      </p:sp>
+      <p:sp>
+        <p:nvSpPr>
+          <p:cNvPr id="11" name="TextBox 10"/>
+          <p:cNvSpPr txBox="1"/>
+          <p:nvPr/>
+        </p:nvSpPr>
+        <p:spPr>
+          <a:xfrm>
+            <a:off x="502920" y="4666488"/>
+            <a:ext cx="11155680" cy="384048"/>
+          </a:xfrm>
+          <a:prstGeom prst="rect">
+            <a:avLst/>
+          </a:prstGeom>
+          <a:noFill/>
+        </p:spPr>
+        <p:txBody>
+          <a:bodyPr wrap="square">
+            <a:spAutoFit/>
+          </a:bodyPr>
+          <a:lstStyle/>
+          <a:p>
+            <a:pPr algn="l"/>
+            <a:r>
+              <a:rPr sz="1500" b="0" i="0">
+                <a:solidFill>
+                  <a:srgbClr val="0D1B2A"/>
+                </a:solidFill>
+              </a:rPr>
+              <a:t>Web dashboard for all stakeholders — hire new agent roles, connect tools, approve proposals</a:t>
             </a:r>
           </a:p>
         </p:txBody>

--- a/docs/SageAI_Business_Case.pptx
+++ b/docs/SageAI_Business_Case.pptx
@@ -17,6 +17,7 @@
     <p:sldId id="265" r:id="rId16"/>
     <p:sldId id="266" r:id="rId17"/>
     <p:sldId id="267" r:id="rId18"/>
+    <p:sldId id="269" r:id="rId20"/>
     <p:sldId id="268" r:id="rId19"/>
   </p:sldIdLst>
   <p:sldSz cx="12188952" cy="6858000" type="screen4x3"/>
@@ -5718,6 +5719,587 @@
 </file>
 
 <file path=ppt/slides/slide13.xml><?xml version="1.0" encoding="utf-8"?>
+<p:sld xmlns:a="http://schemas.openxmlformats.org/drawingml/2006/main" xmlns:p="http://schemas.openxmlformats.org/presentationml/2006/main" xmlns:r="http://schemas.openxmlformats.org/officeDocument/2006/relationships">
+  <p:cSld>
+    <p:bg>
+      <p:bgPr>
+        <a:solidFill>
+          <a:srgbClr val="FFFFFF"/>
+        </a:solidFill>
+        <a:effectLst/>
+      </p:bgPr>
+    </p:bg>
+    <p:spTree>
+      <p:nvGrpSpPr>
+        <p:cNvPr id="1" name=""/>
+        <p:cNvGrpSpPr/>
+        <p:nvPr/>
+      </p:nvGrpSpPr>
+      <p:grpSpPr/>
+      <p:sp>
+        <p:nvSpPr>
+          <p:cNvPr id="2" name="Rectangle 1"/>
+          <p:cNvSpPr/>
+          <p:nvPr/>
+        </p:nvSpPr>
+        <p:spPr>
+          <a:xfrm>
+            <a:off x="0" y="0"/>
+            <a:ext cx="12188952" cy="1325880"/>
+          </a:xfrm>
+          <a:prstGeom prst="rect">
+            <a:avLst/>
+          </a:prstGeom>
+          <a:solidFill>
+            <a:srgbClr val="ECFDF5"/>
+          </a:solidFill>
+          <a:ln>
+            <a:noFill/>
+          </a:ln>
+        </p:spPr>
+        <p:style>
+          <a:lnRef idx="1">
+            <a:schemeClr val="accent1"/>
+          </a:lnRef>
+          <a:fillRef idx="3">
+            <a:schemeClr val="accent1"/>
+          </a:fillRef>
+          <a:effectRef idx="2">
+            <a:schemeClr val="accent1"/>
+          </a:effectRef>
+          <a:fontRef idx="minor">
+            <a:schemeClr val="lt1"/>
+          </a:fontRef>
+        </p:style>
+        <p:txBody>
+          <a:bodyPr rtlCol="0" anchor="ctr"/>
+          <a:lstStyle/>
+          <a:p>
+            <a:pPr algn="ctr"/>
+          </a:p>
+        </p:txBody>
+      </p:sp>
+      <p:sp>
+        <p:nvSpPr>
+          <p:cNvPr id="3" name="TextBox 2"/>
+          <p:cNvSpPr txBox="1"/>
+          <p:nvPr/>
+        </p:nvSpPr>
+        <p:spPr>
+          <a:xfrm>
+            <a:off x="411480" y="109728"/>
+            <a:ext cx="11338560" cy="731520"/>
+          </a:xfrm>
+          <a:prstGeom prst="rect">
+            <a:avLst/>
+          </a:prstGeom>
+          <a:noFill/>
+        </p:spPr>
+        <p:txBody>
+          <a:bodyPr wrap="none">
+            <a:spAutoFit/>
+          </a:bodyPr>
+          <a:lstStyle/>
+          <a:p>
+            <a:r>
+              <a:rPr sz="3000" b="1">
+                <a:solidFill>
+                  <a:srgbClr val="065F46"/>
+                </a:solidFill>
+                <a:latin typeface="Calibri"/>
+              </a:rPr>
+              <a:t>Build Orchestrator — Product Factory</a:t>
+            </a:r>
+          </a:p>
+        </p:txBody>
+      </p:sp>
+      <p:sp>
+        <p:nvSpPr>
+          <p:cNvPr id="4" name="TextBox 3"/>
+          <p:cNvSpPr txBox="1"/>
+          <p:nvPr/>
+        </p:nvSpPr>
+        <p:spPr>
+          <a:xfrm>
+            <a:off x="411480" y="804672"/>
+            <a:ext cx="11338560" cy="438912"/>
+          </a:xfrm>
+          <a:prstGeom prst="rect">
+            <a:avLst/>
+          </a:prstGeom>
+          <a:noFill/>
+        </p:spPr>
+        <p:txBody>
+          <a:bodyPr wrap="none">
+            <a:spAutoFit/>
+          </a:bodyPr>
+          <a:lstStyle/>
+          <a:p>
+            <a:r>
+              <a:rPr sz="1600" b="0">
+                <a:solidFill>
+                  <a:srgbClr val="4B5563"/>
+                </a:solidFill>
+                <a:latin typeface="Calibri"/>
+              </a:rPr>
+              <a:t>Describe a product in plain English → get a working codebase</a:t>
+            </a:r>
+          </a:p>
+        </p:txBody>
+      </p:sp>
+      <p:sp>
+        <p:nvSpPr>
+          <p:cNvPr id="5" name="Rectangle 4"/>
+          <p:cNvSpPr/>
+          <p:nvPr/>
+        </p:nvSpPr>
+        <p:spPr>
+          <a:xfrm>
+            <a:off x="457200" y="1508760"/>
+            <a:ext cx="3627120" cy="3200400"/>
+          </a:xfrm>
+          <a:prstGeom prst="rect">
+            <a:avLst/>
+          </a:prstGeom>
+          <a:solidFill>
+            <a:srgbClr val="ECFDF5"/>
+          </a:solidFill>
+          <a:ln>
+            <a:noFill/>
+          </a:ln>
+        </p:spPr>
+        <p:style>
+          <a:lnRef idx="1">
+            <a:schemeClr val="accent1"/>
+          </a:lnRef>
+          <a:fillRef idx="3">
+            <a:schemeClr val="accent1"/>
+          </a:fillRef>
+          <a:effectRef idx="2">
+            <a:schemeClr val="accent1"/>
+          </a:effectRef>
+          <a:fontRef idx="minor">
+            <a:schemeClr val="lt1"/>
+          </a:fontRef>
+        </p:style>
+        <p:txBody>
+          <a:bodyPr rtlCol="0" anchor="ctr"/>
+          <a:lstStyle/>
+          <a:p>
+            <a:pPr algn="ctr"/>
+          </a:p>
+        </p:txBody>
+      </p:sp>
+      <p:sp>
+        <p:nvSpPr>
+          <p:cNvPr id="6" name="TextBox 5"/>
+          <p:cNvSpPr txBox="1"/>
+          <p:nvPr/>
+        </p:nvSpPr>
+        <p:spPr>
+          <a:xfrm>
+            <a:off x="548640" y="1600200"/>
+            <a:ext cx="3444240" cy="274320"/>
+          </a:xfrm>
+          <a:prstGeom prst="rect">
+            <a:avLst/>
+          </a:prstGeom>
+          <a:noFill/>
+        </p:spPr>
+        <p:txBody>
+          <a:bodyPr wrap="none">
+            <a:spAutoFit/>
+          </a:bodyPr>
+          <a:lstStyle/>
+          <a:p>
+            <a:r>
+              <a:rPr sz="1500" b="1">
+                <a:solidFill>
+                  <a:srgbClr val="059669"/>
+                </a:solidFill>
+                <a:latin typeface="Calibri"/>
+              </a:rPr>
+              <a:t>10x Faster</a:t>
+            </a:r>
+          </a:p>
+        </p:txBody>
+      </p:sp>
+      <p:sp>
+        <p:nvSpPr>
+          <p:cNvPr id="7" name="TextBox 6"/>
+          <p:cNvSpPr txBox="1"/>
+          <p:nvPr/>
+        </p:nvSpPr>
+        <p:spPr>
+          <a:xfrm>
+            <a:off x="548640" y="1828800"/>
+            <a:ext cx="3444240" cy="2834640"/>
+          </a:xfrm>
+          <a:prstGeom prst="rect">
+            <a:avLst/>
+          </a:prstGeom>
+          <a:noFill/>
+        </p:spPr>
+        <p:txBody>
+          <a:bodyPr wrap="square">
+            <a:spAutoFit/>
+          </a:bodyPr>
+          <a:lstStyle/>
+          <a:p>
+            <a:r>
+              <a:rPr sz="1300" b="0">
+                <a:solidFill>
+                  <a:srgbClr val="374151"/>
+                </a:solidFill>
+                <a:latin typeface="Calibri"/>
+              </a:rPr>
+              <a:t>Parallel agent execution with dependency-aware wave scheduling</a:t>
+            </a:r>
+          </a:p>
+        </p:txBody>
+      </p:sp>
+      <p:sp>
+        <p:nvSpPr>
+          <p:cNvPr id="8" name="Rectangle 7"/>
+          <p:cNvSpPr/>
+          <p:nvPr/>
+        </p:nvSpPr>
+        <p:spPr>
+          <a:xfrm>
+            <a:off x="4267200" y="1508760"/>
+            <a:ext cx="3627120" cy="3200400"/>
+          </a:xfrm>
+          <a:prstGeom prst="rect">
+            <a:avLst/>
+          </a:prstGeom>
+          <a:solidFill>
+            <a:srgbClr val="ECFDF5"/>
+          </a:solidFill>
+          <a:ln>
+            <a:noFill/>
+          </a:ln>
+        </p:spPr>
+        <p:style>
+          <a:lnRef idx="1">
+            <a:schemeClr val="accent1"/>
+          </a:lnRef>
+          <a:fillRef idx="3">
+            <a:schemeClr val="accent1"/>
+          </a:fillRef>
+          <a:effectRef idx="2">
+            <a:schemeClr val="accent1"/>
+          </a:effectRef>
+          <a:fontRef idx="minor">
+            <a:schemeClr val="lt1"/>
+          </a:fontRef>
+        </p:style>
+        <p:txBody>
+          <a:bodyPr rtlCol="0" anchor="ctr"/>
+          <a:lstStyle/>
+          <a:p>
+            <a:pPr algn="ctr"/>
+          </a:p>
+        </p:txBody>
+      </p:sp>
+      <p:sp>
+        <p:nvSpPr>
+          <p:cNvPr id="9" name="TextBox 8"/>
+          <p:cNvSpPr txBox="1"/>
+          <p:nvPr/>
+        </p:nvSpPr>
+        <p:spPr>
+          <a:xfrm>
+            <a:off x="4358640" y="1600200"/>
+            <a:ext cx="3444240" cy="274320"/>
+          </a:xfrm>
+          <a:prstGeom prst="rect">
+            <a:avLst/>
+          </a:prstGeom>
+          <a:noFill/>
+        </p:spPr>
+        <p:txBody>
+          <a:bodyPr wrap="none">
+            <a:spAutoFit/>
+          </a:bodyPr>
+          <a:lstStyle/>
+          <a:p>
+            <a:r>
+              <a:rPr sz="1500" b="1">
+                <a:solidFill>
+                  <a:srgbClr val="059669"/>
+                </a:solidFill>
+                <a:latin typeface="Calibri"/>
+              </a:rPr>
+              <a:t>Quality Built In</a:t>
+            </a:r>
+          </a:p>
+        </p:txBody>
+      </p:sp>
+      <p:sp>
+        <p:nvSpPr>
+          <p:cNvPr id="10" name="TextBox 9"/>
+          <p:cNvSpPr txBox="1"/>
+          <p:nvPr/>
+        </p:nvSpPr>
+        <p:spPr>
+          <a:xfrm>
+            <a:off x="4358640" y="1828800"/>
+            <a:ext cx="3444240" cy="2834640"/>
+          </a:xfrm>
+          <a:prstGeom prst="rect">
+            <a:avLst/>
+          </a:prstGeom>
+          <a:noFill/>
+        </p:spPr>
+        <p:txBody>
+          <a:bodyPr wrap="square">
+            <a:spAutoFit/>
+          </a:bodyPr>
+          <a:lstStyle/>
+          <a:p>
+            <a:r>
+              <a:rPr sz="1300" b="0">
+                <a:solidFill>
+                  <a:srgbClr val="374151"/>
+                </a:solidFill>
+                <a:latin typeface="Calibri"/>
+              </a:rPr>
+              <a:t>Critic agent reviews every artifact before human sees it (actor-critic pattern)</a:t>
+            </a:r>
+          </a:p>
+        </p:txBody>
+      </p:sp>
+      <p:sp>
+        <p:nvSpPr>
+          <p:cNvPr id="11" name="Rectangle 10"/>
+          <p:cNvSpPr/>
+          <p:nvPr/>
+        </p:nvSpPr>
+        <p:spPr>
+          <a:xfrm>
+            <a:off x="8077200" y="1508760"/>
+            <a:ext cx="3627120" cy="3200400"/>
+          </a:xfrm>
+          <a:prstGeom prst="rect">
+            <a:avLst/>
+          </a:prstGeom>
+          <a:solidFill>
+            <a:srgbClr val="ECFDF5"/>
+          </a:solidFill>
+          <a:ln>
+            <a:noFill/>
+          </a:ln>
+        </p:spPr>
+        <p:style>
+          <a:lnRef idx="1">
+            <a:schemeClr val="accent1"/>
+          </a:lnRef>
+          <a:fillRef idx="3">
+            <a:schemeClr val="accent1"/>
+          </a:fillRef>
+          <a:effectRef idx="2">
+            <a:schemeClr val="accent1"/>
+          </a:effectRef>
+          <a:fontRef idx="minor">
+            <a:schemeClr val="lt1"/>
+          </a:fontRef>
+        </p:style>
+        <p:txBody>
+          <a:bodyPr rtlCol="0" anchor="ctr"/>
+          <a:lstStyle/>
+          <a:p>
+            <a:pPr algn="ctr"/>
+          </a:p>
+        </p:txBody>
+      </p:sp>
+      <p:sp>
+        <p:nvSpPr>
+          <p:cNvPr id="12" name="TextBox 11"/>
+          <p:cNvSpPr txBox="1"/>
+          <p:nvPr/>
+        </p:nvSpPr>
+        <p:spPr>
+          <a:xfrm>
+            <a:off x="8168640" y="1600200"/>
+            <a:ext cx="3444240" cy="274320"/>
+          </a:xfrm>
+          <a:prstGeom prst="rect">
+            <a:avLst/>
+          </a:prstGeom>
+          <a:noFill/>
+        </p:spPr>
+        <p:txBody>
+          <a:bodyPr wrap="none">
+            <a:spAutoFit/>
+          </a:bodyPr>
+          <a:lstStyle/>
+          <a:p>
+            <a:r>
+              <a:rPr sz="1500" b="1">
+                <a:solidFill>
+                  <a:srgbClr val="059669"/>
+                </a:solidFill>
+                <a:latin typeface="Calibri"/>
+              </a:rPr>
+              <a:t>Human Always in Control</a:t>
+            </a:r>
+          </a:p>
+        </p:txBody>
+      </p:sp>
+      <p:sp>
+        <p:nvSpPr>
+          <p:cNvPr id="13" name="TextBox 12"/>
+          <p:cNvSpPr txBox="1"/>
+          <p:nvPr/>
+        </p:nvSpPr>
+        <p:spPr>
+          <a:xfrm>
+            <a:off x="8168640" y="1828800"/>
+            <a:ext cx="3444240" cy="2834640"/>
+          </a:xfrm>
+          <a:prstGeom prst="rect">
+            <a:avLst/>
+          </a:prstGeom>
+          <a:noFill/>
+        </p:spPr>
+        <p:txBody>
+          <a:bodyPr wrap="square">
+            <a:spAutoFit/>
+          </a:bodyPr>
+          <a:lstStyle/>
+          <a:p>
+            <a:r>
+              <a:rPr sz="1300" b="0">
+                <a:solidFill>
+                  <a:srgbClr val="374151"/>
+                </a:solidFill>
+                <a:latin typeface="Calibri"/>
+              </a:rPr>
+              <a:t>3 configurable HITL levels: minimal, standard, strict — compliance guaranteed</a:t>
+            </a:r>
+          </a:p>
+        </p:txBody>
+      </p:sp>
+      <p:sp>
+        <p:nvSpPr>
+          <p:cNvPr id="14" name="TextBox 13"/>
+          <p:cNvSpPr txBox="1"/>
+          <p:nvPr/>
+        </p:nvSpPr>
+        <p:spPr>
+          <a:xfrm>
+            <a:off x="457200" y="4937760"/>
+            <a:ext cx="11247120" cy="274320"/>
+          </a:xfrm>
+          <a:prstGeom prst="rect">
+            <a:avLst/>
+          </a:prstGeom>
+          <a:noFill/>
+        </p:spPr>
+        <p:txBody>
+          <a:bodyPr wrap="square">
+            <a:spAutoFit/>
+          </a:bodyPr>
+          <a:lstStyle/>
+          <a:p>
+            <a:r>
+              <a:rPr sz="1100" b="0">
+                <a:solidFill>
+                  <a:srgbClr val="6B7280"/>
+                </a:solidFill>
+                <a:latin typeface="Calibri"/>
+              </a:rPr>
+              <a:t>Supports 10 agentic AI patterns (Google Cloud reference) · 9 task types · 3-tier degradation</a:t>
+            </a:r>
+          </a:p>
+        </p:txBody>
+      </p:sp>
+      <p:sp>
+        <p:nvSpPr>
+          <p:cNvPr id="15" name="Rectangle 14"/>
+          <p:cNvSpPr/>
+          <p:nvPr/>
+        </p:nvSpPr>
+        <p:spPr>
+          <a:xfrm>
+            <a:off x="0" y="6492240"/>
+            <a:ext cx="12188952" cy="365760"/>
+          </a:xfrm>
+          <a:prstGeom prst="rect">
+            <a:avLst/>
+          </a:prstGeom>
+          <a:solidFill>
+            <a:srgbClr val="ECFDF5"/>
+          </a:solidFill>
+          <a:ln>
+            <a:noFill/>
+          </a:ln>
+        </p:spPr>
+        <p:style>
+          <a:lnRef idx="1">
+            <a:schemeClr val="accent1"/>
+          </a:lnRef>
+          <a:fillRef idx="3">
+            <a:schemeClr val="accent1"/>
+          </a:fillRef>
+          <a:effectRef idx="2">
+            <a:schemeClr val="accent1"/>
+          </a:effectRef>
+          <a:fontRef idx="minor">
+            <a:schemeClr val="lt1"/>
+          </a:fontRef>
+        </p:style>
+        <p:txBody>
+          <a:bodyPr rtlCol="0" anchor="ctr"/>
+          <a:lstStyle/>
+          <a:p>
+            <a:pPr algn="ctr"/>
+          </a:p>
+        </p:txBody>
+      </p:sp>
+      <p:sp>
+        <p:nvSpPr>
+          <p:cNvPr id="16" name="TextBox 15"/>
+          <p:cNvSpPr txBox="1"/>
+          <p:nvPr/>
+        </p:nvSpPr>
+        <p:spPr>
+          <a:xfrm>
+            <a:off x="274320" y="6510528"/>
+            <a:ext cx="8229600" cy="274320"/>
+          </a:xfrm>
+          <a:prstGeom prst="rect">
+            <a:avLst/>
+          </a:prstGeom>
+          <a:noFill/>
+        </p:spPr>
+        <p:txBody>
+          <a:bodyPr wrap="none">
+            <a:spAutoFit/>
+          </a:bodyPr>
+          <a:lstStyle/>
+          <a:p>
+            <a:r>
+              <a:rPr sz="900" b="0">
+                <a:solidFill>
+                  <a:srgbClr val="6B7280"/>
+                </a:solidFill>
+                <a:latin typeface="Calibri"/>
+              </a:rPr>
+              <a:t>SAGE[ai] — Confidential | March 2026</a:t>
+            </a:r>
+          </a:p>
+        </p:txBody>
+      </p:sp>
+    </p:spTree>
+  </p:cSld>
+  <p:clrMapOvr>
+    <a:masterClrMapping/>
+  </p:clrMapOvr>
+</p:sld>
+</file>
+
+<file path=ppt/slides/slide14.xml><?xml version="1.0" encoding="utf-8"?>
 <p:sld xmlns:a="http://schemas.openxmlformats.org/drawingml/2006/main" xmlns:p="http://schemas.openxmlformats.org/presentationml/2006/main" xmlns:r="http://schemas.openxmlformats.org/officeDocument/2006/relationships">
   <p:cSld>
     <p:spTree>

--- a/docs/SageAI_Business_Case.pptx
+++ b/docs/SageAI_Business_Case.pptx
@@ -3318,7 +3318,7 @@
                   <a:srgbClr val="647487"/>
                 </a:solidFill>
               </a:rPr>
-              <a:t>Business Case Presentation — March 2026</a:t>
+              <a:t>Open Source (Apache 2.0) — Business Case Presentation — March 2026</a:t>
             </a:r>
           </a:p>
         </p:txBody>
@@ -3352,7 +3352,7 @@
                   <a:srgbClr val="FFB700"/>
                 </a:solidFill>
               </a:rPr>
-              <a:t>CONFIDENTIAL — Internal Business Case</a:t>
+              <a:t>github.com/Sumanharapanahalli/sage</a:t>
             </a:r>
           </a:p>
         </p:txBody>
@@ -4035,7 +4035,7 @@
                   <a:srgbClr val="647487"/>
                 </a:solidFill>
               </a:rPr>
-              <a:t>SAGE[ai] — Confidential | March 2026</a:t>
+              <a:t>SAGE[ai] — Open Source (Apache 2.0) | github.com/Sumanharapanahalli/sage | March 2026</a:t>
             </a:r>
           </a:p>
         </p:txBody>
@@ -4997,7 +4997,7 @@
                   <a:srgbClr val="647487"/>
                 </a:solidFill>
               </a:rPr>
-              <a:t>SAGE[ai] — Confidential | March 2026</a:t>
+              <a:t>SAGE[ai] — Open Source (Apache 2.0) | github.com/Sumanharapanahalli/sage | March 2026</a:t>
             </a:r>
           </a:p>
         </p:txBody>
@@ -5628,7 +5628,7 @@
                   <a:srgbClr val="647487"/>
                 </a:solidFill>
               </a:rPr>
-              <a:t>SAGE[ai] — Confidential | March 2026</a:t>
+              <a:t>SAGE[ai] — Open Source (Apache 2.0) | github.com/Sumanharapanahalli/sage | March 2026</a:t>
             </a:r>
           </a:p>
         </p:txBody>
@@ -6286,7 +6286,7 @@
                 </a:solidFill>
                 <a:latin typeface="Calibri"/>
               </a:rPr>
-              <a:t>SAGE[ai] — Confidential | March 2026</a:t>
+              <a:t>SAGE[ai] — Open Source (Apache 2.0) | github.com/Sumanharapanahalli/sage | March 2026</a:t>
             </a:r>
           </a:p>
         </p:txBody>
@@ -6460,7 +6460,7 @@
                   <a:srgbClr val="00B4D8"/>
                 </a:solidFill>
               </a:rPr>
-              <a:t>Let's talk about your pilot.</a:t>
+              <a:t>Open source. Self-hosted. Start today at github.com/Sumanharapanahalli/sage</a:t>
             </a:r>
           </a:p>
         </p:txBody>
@@ -6946,7 +6946,7 @@
                   <a:srgbClr val="647487"/>
                 </a:solidFill>
               </a:rPr>
-              <a:t>SAGE[ai] — Confidential | March 2026</a:t>
+              <a:t>SAGE[ai] — Open Source (Apache 2.0) | github.com/Sumanharapanahalli/sage | March 2026</a:t>
             </a:r>
           </a:p>
         </p:txBody>
@@ -7321,7 +7321,7 @@
                   <a:srgbClr val="0D1B2A"/>
                 </a:solidFill>
               </a:rPr>
-              <a:t>100+ tool integrations via Composio — GitHub, Jira, Salesforce, Slack and more</a:t>
+              <a:t>Web dashboard for all stakeholders — zero CLI required</a:t>
             </a:r>
           </a:p>
         </p:txBody>
@@ -7398,75 +7398,7 @@
                   <a:srgbClr val="647487"/>
                 </a:solidFill>
               </a:rPr>
-              <a:t>SAGE[ai] — Confidential | March 2026</a:t>
-            </a:r>
-          </a:p>
-        </p:txBody>
-      </p:sp>
-      <p:sp>
-        <p:nvSpPr>
-          <p:cNvPr id="11" name="TextBox 10"/>
-          <p:cNvSpPr txBox="1"/>
-          <p:nvPr/>
-        </p:nvSpPr>
-        <p:spPr>
-          <a:xfrm>
-            <a:off x="502920" y="4666488"/>
-            <a:ext cx="11155680" cy="384048"/>
-          </a:xfrm>
-          <a:prstGeom prst="rect">
-            <a:avLst/>
-          </a:prstGeom>
-          <a:noFill/>
-        </p:spPr>
-        <p:txBody>
-          <a:bodyPr wrap="square">
-            <a:spAutoFit/>
-          </a:bodyPr>
-          <a:lstStyle/>
-          <a:p>
-            <a:pPr algn="l"/>
-            <a:r>
-              <a:rPr sz="1500" b="0" i="0">
-                <a:solidFill>
-                  <a:srgbClr val="0D1B2A"/>
-                </a:solidFill>
-              </a:rPr>
-              <a:t>Web dashboard for all stakeholders — hire new agent roles, connect tools, approve proposals</a:t>
-            </a:r>
-          </a:p>
-        </p:txBody>
-      </p:sp>
-      <p:sp>
-        <p:nvSpPr>
-          <p:cNvPr id="11" name="TextBox 10"/>
-          <p:cNvSpPr txBox="1"/>
-          <p:nvPr/>
-        </p:nvSpPr>
-        <p:spPr>
-          <a:xfrm>
-            <a:off x="502920" y="4666488"/>
-            <a:ext cx="11155680" cy="384048"/>
-          </a:xfrm>
-          <a:prstGeom prst="rect">
-            <a:avLst/>
-          </a:prstGeom>
-          <a:noFill/>
-        </p:spPr>
-        <p:txBody>
-          <a:bodyPr wrap="square">
-            <a:spAutoFit/>
-          </a:bodyPr>
-          <a:lstStyle/>
-          <a:p>
-            <a:pPr algn="l"/>
-            <a:r>
-              <a:rPr sz="1500" b="0" i="0">
-                <a:solidFill>
-                  <a:srgbClr val="0D1B2A"/>
-                </a:solidFill>
-              </a:rPr>
-              <a:t>Web dashboard for all stakeholders — hire new agent roles, connect tools, approve proposals</a:t>
+              <a:t>SAGE[ai] — Open Source (Apache 2.0) | github.com/Sumanharapanahalli/sage | March 2026</a:t>
             </a:r>
           </a:p>
         </p:txBody>
@@ -8353,7 +8285,7 @@
                   <a:srgbClr val="647487"/>
                 </a:solidFill>
               </a:rPr>
-              <a:t>SAGE[ai] — Confidential | March 2026</a:t>
+              <a:t>SAGE[ai] — Open Source (Apache 2.0) | github.com/Sumanharapanahalli/sage | March 2026</a:t>
             </a:r>
           </a:p>
         </p:txBody>
@@ -8915,7 +8847,7 @@
                   <a:srgbClr val="647487"/>
                 </a:solidFill>
               </a:rPr>
-              <a:t>SAGE[ai] — Confidential | March 2026</a:t>
+              <a:t>SAGE[ai] — Open Source (Apache 2.0) | github.com/Sumanharapanahalli/sage | March 2026</a:t>
             </a:r>
           </a:p>
         </p:txBody>
@@ -9731,7 +9663,7 @@
                   <a:srgbClr val="647487"/>
                 </a:solidFill>
               </a:rPr>
-              <a:t>SAGE[ai] — Confidential | March 2026</a:t>
+              <a:t>SAGE[ai] — Open Source (Apache 2.0) | github.com/Sumanharapanahalli/sage | March 2026</a:t>
             </a:r>
           </a:p>
         </p:txBody>
@@ -10864,7 +10796,7 @@
                   <a:srgbClr val="647487"/>
                 </a:solidFill>
               </a:rPr>
-              <a:t>SAGE[ai] — Confidential | March 2026</a:t>
+              <a:t>SAGE[ai] — Open Source (Apache 2.0) | github.com/Sumanharapanahalli/sage | March 2026</a:t>
             </a:r>
           </a:p>
         </p:txBody>
@@ -11001,7 +10933,7 @@
                   <a:srgbClr val="00B4D8"/>
                 </a:solidFill>
               </a:rPr>
-              <a:t>Production-ready capabilities — agents, tools, approvals, and 100+ integrations — available now</a:t>
+              <a:t>136 API endpoints across 12 integration phases — all open source (Apache 2.0)</a:t>
             </a:r>
           </a:p>
         </p:txBody>
@@ -12057,7 +11989,7 @@
                   <a:srgbClr val="647487"/>
                 </a:solidFill>
               </a:rPr>
-              <a:t>SAGE[ai] — Confidential | March 2026</a:t>
+              <a:t>SAGE[ai] — Open Source (Apache 2.0) | github.com/Sumanharapanahalli/sage | March 2026</a:t>
             </a:r>
           </a:p>
         </p:txBody>
@@ -12645,7 +12577,7 @@
                   <a:srgbClr val="647487"/>
                 </a:solidFill>
               </a:rPr>
-              <a:t>SAGE[ai] — Confidential | March 2026</a:t>
+              <a:t>SAGE[ai] — Open Source (Apache 2.0) | github.com/Sumanharapanahalli/sage | March 2026</a:t>
             </a:r>
           </a:p>
         </p:txBody>

--- a/docs/SageAI_Business_Case.pptx
+++ b/docs/SageAI_Business_Case.pptx
@@ -17,7 +17,6 @@
     <p:sldId id="265" r:id="rId16"/>
     <p:sldId id="266" r:id="rId17"/>
     <p:sldId id="267" r:id="rId18"/>
-    <p:sldId id="269" r:id="rId20"/>
     <p:sldId id="268" r:id="rId19"/>
   </p:sldIdLst>
   <p:sldSz cx="12188952" cy="6858000" type="screen4x3"/>
@@ -3116,7 +3115,7 @@
             <a:avLst/>
           </a:prstGeom>
           <a:solidFill>
-            <a:srgbClr val="0D1B2A"/>
+            <a:srgbClr val="1F2A37"/>
           </a:solidFill>
           <a:ln>
             <a:noFill/>
@@ -3159,7 +3158,7 @@
             <a:avLst/>
           </a:prstGeom>
           <a:solidFill>
-            <a:srgbClr val="00B4D8"/>
+            <a:srgbClr val="047857"/>
           </a:solidFill>
           <a:ln>
             <a:noFill/>
@@ -3247,7 +3246,7 @@
             <a:r>
               <a:rPr sz="2600" b="0" i="0">
                 <a:solidFill>
-                  <a:srgbClr val="00B4D8"/>
+                  <a:srgbClr val="047857"/>
                 </a:solidFill>
               </a:rPr>
               <a:t>Autonomous Manufacturing Intelligence</a:t>
@@ -3281,7 +3280,7 @@
             <a:r>
               <a:rPr sz="1800" b="0" i="0">
                 <a:solidFill>
-                  <a:srgbClr val="647487"/>
+                  <a:srgbClr val="4B5563"/>
                 </a:solidFill>
               </a:rPr>
               <a:t>Transforming Medical Device Production with Agentic AI</a:t>
@@ -3315,10 +3314,10 @@
             <a:r>
               <a:rPr sz="1400" b="0" i="0">
                 <a:solidFill>
-                  <a:srgbClr val="647487"/>
+                  <a:srgbClr val="4B5563"/>
                 </a:solidFill>
               </a:rPr>
-              <a:t>Open Source (Apache 2.0) — Business Case Presentation — March 2026</a:t>
+              <a:t>Open Source (MIT) — Business Case Presentation — March 2026</a:t>
             </a:r>
           </a:p>
         </p:txBody>
@@ -3349,7 +3348,7 @@
             <a:r>
               <a:rPr sz="1200" b="0" i="1">
                 <a:solidFill>
-                  <a:srgbClr val="FFB700"/>
+                  <a:srgbClr val="F59E0B"/>
                 </a:solidFill>
               </a:rPr>
               <a:t>github.com/Sumanharapanahalli/sage</a:t>
@@ -3371,7 +3370,7 @@
     <p:bg>
       <p:bgPr>
         <a:solidFill>
-          <a:srgbClr val="F0F4F8"/>
+          <a:srgbClr val="FAFAFA"/>
         </a:solidFill>
         <a:effectLst/>
       </p:bgPr>
@@ -3398,7 +3397,7 @@
             <a:avLst/>
           </a:prstGeom>
           <a:solidFill>
-            <a:srgbClr val="0D1B2A"/>
+            <a:srgbClr val="1F2A37"/>
           </a:solidFill>
           <a:ln>
             <a:noFill/>
@@ -3486,7 +3485,7 @@
             <a:r>
               <a:rPr sz="1600" b="0" i="0">
                 <a:solidFill>
-                  <a:srgbClr val="00B4D8"/>
+                  <a:srgbClr val="047857"/>
                 </a:solidFill>
               </a:rPr>
               <a:t>Compounding intelligence through the RAG feedback loop</a:t>
@@ -3509,7 +3508,7 @@
             <a:avLst/>
           </a:prstGeom>
           <a:solidFill>
-            <a:srgbClr val="0078D4"/>
+            <a:srgbClr val="10B981"/>
           </a:solidFill>
           <a:ln>
             <a:noFill/>
@@ -3654,7 +3653,7 @@
             <a:avLst/>
           </a:prstGeom>
           <a:solidFill>
-            <a:srgbClr val="00B4D8"/>
+            <a:srgbClr val="047857"/>
           </a:solidFill>
           <a:ln>
             <a:noFill/>
@@ -3799,7 +3798,7 @@
             <a:avLst/>
           </a:prstGeom>
           <a:solidFill>
-            <a:srgbClr val="21C55D"/>
+            <a:srgbClr val="10B981"/>
           </a:solidFill>
           <a:ln>
             <a:noFill/>
@@ -3955,7 +3954,7 @@
             <a:r>
               <a:rPr sz="1500" b="1" i="1">
                 <a:solidFill>
-                  <a:srgbClr val="0D1B2A"/>
+                  <a:srgbClr val="1F2A37"/>
                 </a:solidFill>
               </a:rPr>
               <a:t>The system improves itself through the same AI pipeline it provides to engineers.</a:t>
@@ -3978,7 +3977,7 @@
             <a:avLst/>
           </a:prstGeom>
           <a:solidFill>
-            <a:srgbClr val="0D1B2A"/>
+            <a:srgbClr val="1F2A37"/>
           </a:solidFill>
           <a:ln>
             <a:noFill/>
@@ -4032,10 +4031,10 @@
             <a:r>
               <a:rPr sz="900" b="0" i="0">
                 <a:solidFill>
-                  <a:srgbClr val="647487"/>
+                  <a:srgbClr val="4B5563"/>
                 </a:solidFill>
               </a:rPr>
-              <a:t>SAGE[ai] — Open Source (Apache 2.0) | github.com/Sumanharapanahalli/sage | March 2026</a:t>
+              <a:t>SAGE[ai] — Open Source (MIT) | github.com/Sumanharapanahalli/sage | March 2026</a:t>
             </a:r>
           </a:p>
         </p:txBody>
@@ -4054,7 +4053,7 @@
     <p:bg>
       <p:bgPr>
         <a:solidFill>
-          <a:srgbClr val="F0F4F8"/>
+          <a:srgbClr val="FAFAFA"/>
         </a:solidFill>
         <a:effectLst/>
       </p:bgPr>
@@ -4081,7 +4080,7 @@
             <a:avLst/>
           </a:prstGeom>
           <a:solidFill>
-            <a:srgbClr val="0D1B2A"/>
+            <a:srgbClr val="1F2A37"/>
           </a:solidFill>
           <a:ln>
             <a:noFill/>
@@ -4169,7 +4168,7 @@
             <a:r>
               <a:rPr sz="1600" b="0" i="0">
                 <a:solidFill>
-                  <a:srgbClr val="00B4D8"/>
+                  <a:srgbClr val="047857"/>
                 </a:solidFill>
               </a:rPr>
               <a:t>12 integration phases complete — pilot deployment is next</a:t>
@@ -4220,7 +4219,7 @@
                   </a:txBody>
                   <a:tcPr>
                     <a:solidFill>
-                      <a:srgbClr val="0078D4"/>
+                      <a:srgbClr val="10B981"/>
                     </a:solidFill>
                   </a:tcPr>
                 </a:tc>
@@ -4242,7 +4241,7 @@
                   </a:txBody>
                   <a:tcPr>
                     <a:solidFill>
-                      <a:srgbClr val="0078D4"/>
+                      <a:srgbClr val="10B981"/>
                     </a:solidFill>
                   </a:tcPr>
                 </a:tc>
@@ -4264,7 +4263,7 @@
                   </a:txBody>
                   <a:tcPr>
                     <a:solidFill>
-                      <a:srgbClr val="0078D4"/>
+                      <a:srgbClr val="10B981"/>
                     </a:solidFill>
                   </a:tcPr>
                 </a:tc>
@@ -4286,7 +4285,7 @@
                   </a:txBody>
                   <a:tcPr>
                     <a:solidFill>
-                      <a:srgbClr val="0078D4"/>
+                      <a:srgbClr val="10B981"/>
                     </a:solidFill>
                   </a:tcPr>
                 </a:tc>
@@ -4301,7 +4300,7 @@
                       <a:r>
                         <a:rPr sz="1200">
                           <a:solidFill>
-                            <a:srgbClr val="0D1B2A"/>
+                            <a:srgbClr val="1F2A37"/>
                           </a:solidFill>
                         </a:rPr>
                         <a:t>Phases 0-4: Core</a:t>
@@ -4310,7 +4309,7 @@
                   </a:txBody>
                   <a:tcPr>
                     <a:solidFill>
-                      <a:srgbClr val="F0F4F8"/>
+                      <a:srgbClr val="FAFAFA"/>
                     </a:solidFill>
                   </a:tcPr>
                 </a:tc>
@@ -4323,7 +4322,7 @@
                       <a:r>
                         <a:rPr sz="1200">
                           <a:solidFill>
-                            <a:srgbClr val="0D1B2A"/>
+                            <a:srgbClr val="1F2A37"/>
                           </a:solidFill>
                         </a:rPr>
                         <a:t>Done</a:t>
@@ -4332,7 +4331,7 @@
                   </a:txBody>
                   <a:tcPr>
                     <a:solidFill>
-                      <a:srgbClr val="F0F4F8"/>
+                      <a:srgbClr val="FAFAFA"/>
                     </a:solidFill>
                   </a:tcPr>
                 </a:tc>
@@ -4345,7 +4344,7 @@
                       <a:r>
                         <a:rPr sz="1200">
                           <a:solidFill>
-                            <a:srgbClr val="0D1B2A"/>
+                            <a:srgbClr val="1F2A37"/>
                           </a:solidFill>
                         </a:rPr>
                         <a:t>Agents, API, Web UI, Approval gate, Audit log</a:t>
@@ -4354,7 +4353,7 @@
                   </a:txBody>
                   <a:tcPr>
                     <a:solidFill>
-                      <a:srgbClr val="F0F4F8"/>
+                      <a:srgbClr val="FAFAFA"/>
                     </a:solidFill>
                   </a:tcPr>
                 </a:tc>
@@ -4367,7 +4366,7 @@
                       <a:r>
                         <a:rPr sz="1200">
                           <a:solidFill>
-                            <a:srgbClr val="0D1B2A"/>
+                            <a:srgbClr val="1F2A37"/>
                           </a:solidFill>
                         </a:rPr>
                         <a:t>Complete</a:t>
@@ -4376,7 +4375,7 @@
                   </a:txBody>
                   <a:tcPr>
                     <a:solidFill>
-                      <a:srgbClr val="F0F4F8"/>
+                      <a:srgbClr val="FAFAFA"/>
                     </a:solidFill>
                   </a:tcPr>
                 </a:tc>
@@ -4391,7 +4390,7 @@
                       <a:r>
                         <a:rPr sz="1200">
                           <a:solidFill>
-                            <a:srgbClr val="0D1B2A"/>
+                            <a:srgbClr val="1F2A37"/>
                           </a:solidFill>
                         </a:rPr>
                         <a:t>Phase 5: Streaming</a:t>
@@ -4413,7 +4412,7 @@
                       <a:r>
                         <a:rPr sz="1200">
                           <a:solidFill>
-                            <a:srgbClr val="0D1B2A"/>
+                            <a:srgbClr val="1F2A37"/>
                           </a:solidFill>
                         </a:rPr>
                         <a:t>Done</a:t>
@@ -4435,7 +4434,7 @@
                       <a:r>
                         <a:rPr sz="1200">
                           <a:solidFill>
-                            <a:srgbClr val="0D1B2A"/>
+                            <a:srgbClr val="1F2A37"/>
                           </a:solidFill>
                         </a:rPr>
                         <a:t>SSE token streaming for all providers</a:t>
@@ -4457,7 +4456,7 @@
                       <a:r>
                         <a:rPr sz="1200">
                           <a:solidFill>
-                            <a:srgbClr val="0D1B2A"/>
+                            <a:srgbClr val="1F2A37"/>
                           </a:solidFill>
                         </a:rPr>
                         <a:t>Complete</a:t>
@@ -4481,7 +4480,7 @@
                       <a:r>
                         <a:rPr sz="1200">
                           <a:solidFill>
-                            <a:srgbClr val="0D1B2A"/>
+                            <a:srgbClr val="1F2A37"/>
                           </a:solidFill>
                         </a:rPr>
                         <a:t>Phase 6: Onboard</a:t>
@@ -4490,7 +4489,7 @@
                   </a:txBody>
                   <a:tcPr>
                     <a:solidFill>
-                      <a:srgbClr val="F0F4F8"/>
+                      <a:srgbClr val="FAFAFA"/>
                     </a:solidFill>
                   </a:tcPr>
                 </a:tc>
@@ -4503,7 +4502,7 @@
                       <a:r>
                         <a:rPr sz="1200">
                           <a:solidFill>
-                            <a:srgbClr val="0D1B2A"/>
+                            <a:srgbClr val="1F2A37"/>
                           </a:solidFill>
                         </a:rPr>
                         <a:t>Done</a:t>
@@ -4512,7 +4511,7 @@
                   </a:txBody>
                   <a:tcPr>
                     <a:solidFill>
-                      <a:srgbClr val="F0F4F8"/>
+                      <a:srgbClr val="FAFAFA"/>
                     </a:solidFill>
                   </a:tcPr>
                 </a:tc>
@@ -4525,7 +4524,7 @@
                       <a:r>
                         <a:rPr sz="1200">
                           <a:solidFill>
-                            <a:srgbClr val="0D1B2A"/>
+                            <a:srgbClr val="1F2A37"/>
                           </a:solidFill>
                         </a:rPr>
                         <a:t>Plain-language to YAML solution wizard</a:t>
@@ -4534,7 +4533,7 @@
                   </a:txBody>
                   <a:tcPr>
                     <a:solidFill>
-                      <a:srgbClr val="F0F4F8"/>
+                      <a:srgbClr val="FAFAFA"/>
                     </a:solidFill>
                   </a:tcPr>
                 </a:tc>
@@ -4547,7 +4546,7 @@
                       <a:r>
                         <a:rPr sz="1200">
                           <a:solidFill>
-                            <a:srgbClr val="0D1B2A"/>
+                            <a:srgbClr val="1F2A37"/>
                           </a:solidFill>
                         </a:rPr>
                         <a:t>Complete</a:t>
@@ -4556,7 +4555,7 @@
                   </a:txBody>
                   <a:tcPr>
                     <a:solidFill>
-                      <a:srgbClr val="F0F4F8"/>
+                      <a:srgbClr val="FAFAFA"/>
                     </a:solidFill>
                   </a:tcPr>
                 </a:tc>
@@ -4571,7 +4570,7 @@
                       <a:r>
                         <a:rPr sz="1200">
                           <a:solidFill>
-                            <a:srgbClr val="0D1B2A"/>
+                            <a:srgbClr val="1F2A37"/>
                           </a:solidFill>
                         </a:rPr>
                         <a:t>Phases 7-11</a:t>
@@ -4593,7 +4592,7 @@
                       <a:r>
                         <a:rPr sz="1200">
                           <a:solidFill>
-                            <a:srgbClr val="0D1B2A"/>
+                            <a:srgbClr val="1F2A37"/>
                           </a:solidFill>
                         </a:rPr>
                         <a:t>Done</a:t>
@@ -4615,7 +4614,7 @@
                       <a:r>
                         <a:rPr sz="1200">
                           <a:solidFill>
-                            <a:srgbClr val="0D1B2A"/>
+                            <a:srgbClr val="1F2A37"/>
                           </a:solidFill>
                         </a:rPr>
                         <a:t>Knowledge CRUD, Slack, Eval, Multi-tenant, Temporal</a:t>
@@ -4637,7 +4636,7 @@
                       <a:r>
                         <a:rPr sz="1200">
                           <a:solidFill>
-                            <a:srgbClr val="0D1B2A"/>
+                            <a:srgbClr val="1F2A37"/>
                           </a:solidFill>
                         </a:rPr>
                         <a:t>Complete</a:t>
@@ -4661,7 +4660,7 @@
                       <a:r>
                         <a:rPr sz="1200">
                           <a:solidFill>
-                            <a:srgbClr val="0D1B2A"/>
+                            <a:srgbClr val="1F2A37"/>
                           </a:solidFill>
                         </a:rPr>
                         <a:t>Pilot Deploy</a:t>
@@ -4670,7 +4669,7 @@
                   </a:txBody>
                   <a:tcPr>
                     <a:solidFill>
-                      <a:srgbClr val="F0F4F8"/>
+                      <a:srgbClr val="FAFAFA"/>
                     </a:solidFill>
                   </a:tcPr>
                 </a:tc>
@@ -4683,7 +4682,7 @@
                       <a:r>
                         <a:rPr sz="1200">
                           <a:solidFill>
-                            <a:srgbClr val="0D1B2A"/>
+                            <a:srgbClr val="1F2A37"/>
                           </a:solidFill>
                         </a:rPr>
                         <a:t>Month 1</a:t>
@@ -4692,7 +4691,7 @@
                   </a:txBody>
                   <a:tcPr>
                     <a:solidFill>
-                      <a:srgbClr val="F0F4F8"/>
+                      <a:srgbClr val="FAFAFA"/>
                     </a:solidFill>
                   </a:tcPr>
                 </a:tc>
@@ -4705,7 +4704,7 @@
                       <a:r>
                         <a:rPr sz="1200">
                           <a:solidFill>
-                            <a:srgbClr val="0D1B2A"/>
+                            <a:srgbClr val="1F2A37"/>
                           </a:solidFill>
                         </a:rPr>
                         <a:t>Production deploy, engineer training, KPI baseline</a:t>
@@ -4714,7 +4713,7 @@
                   </a:txBody>
                   <a:tcPr>
                     <a:solidFill>
-                      <a:srgbClr val="F0F4F8"/>
+                      <a:srgbClr val="FAFAFA"/>
                     </a:solidFill>
                   </a:tcPr>
                 </a:tc>
@@ -4727,7 +4726,7 @@
                       <a:r>
                         <a:rPr sz="1200">
                           <a:solidFill>
-                            <a:srgbClr val="0D1B2A"/>
+                            <a:srgbClr val="1F2A37"/>
                           </a:solidFill>
                         </a:rPr>
                         <a:t>Next</a:t>
@@ -4736,7 +4735,7 @@
                   </a:txBody>
                   <a:tcPr>
                     <a:solidFill>
-                      <a:srgbClr val="F0F4F8"/>
+                      <a:srgbClr val="FAFAFA"/>
                     </a:solidFill>
                   </a:tcPr>
                 </a:tc>
@@ -4751,7 +4750,7 @@
                       <a:r>
                         <a:rPr sz="1200">
                           <a:solidFill>
-                            <a:srgbClr val="0D1B2A"/>
+                            <a:srgbClr val="1F2A37"/>
                           </a:solidFill>
                         </a:rPr>
                         <a:t>Iterate</a:t>
@@ -4773,7 +4772,7 @@
                       <a:r>
                         <a:rPr sz="1200">
                           <a:solidFill>
-                            <a:srgbClr val="0D1B2A"/>
+                            <a:srgbClr val="1F2A37"/>
                           </a:solidFill>
                         </a:rPr>
                         <a:t>Month 2</a:t>
@@ -4795,7 +4794,7 @@
                       <a:r>
                         <a:rPr sz="1200">
                           <a:solidFill>
-                            <a:srgbClr val="0D1B2A"/>
+                            <a:srgbClr val="1F2A37"/>
                           </a:solidFill>
                         </a:rPr>
                         <a:t>KPI tracking, RAG feedback loop, first improvements</a:t>
@@ -4817,7 +4816,7 @@
                       <a:r>
                         <a:rPr sz="1200">
                           <a:solidFill>
-                            <a:srgbClr val="0D1B2A"/>
+                            <a:srgbClr val="1F2A37"/>
                           </a:solidFill>
                         </a:rPr>
                         <a:t>Planned</a:t>
@@ -4841,7 +4840,7 @@
                       <a:r>
                         <a:rPr sz="1200">
                           <a:solidFill>
-                            <a:srgbClr val="0D1B2A"/>
+                            <a:srgbClr val="1F2A37"/>
                           </a:solidFill>
                         </a:rPr>
                         <a:t>Scale</a:t>
@@ -4850,7 +4849,7 @@
                   </a:txBody>
                   <a:tcPr>
                     <a:solidFill>
-                      <a:srgbClr val="F0F4F8"/>
+                      <a:srgbClr val="FAFAFA"/>
                     </a:solidFill>
                   </a:tcPr>
                 </a:tc>
@@ -4863,7 +4862,7 @@
                       <a:r>
                         <a:rPr sz="1200">
                           <a:solidFill>
-                            <a:srgbClr val="0D1B2A"/>
+                            <a:srgbClr val="1F2A37"/>
                           </a:solidFill>
                         </a:rPr>
                         <a:t>Month 3</a:t>
@@ -4872,7 +4871,7 @@
                   </a:txBody>
                   <a:tcPr>
                     <a:solidFill>
-                      <a:srgbClr val="F0F4F8"/>
+                      <a:srgbClr val="FAFAFA"/>
                     </a:solidFill>
                   </a:tcPr>
                 </a:tc>
@@ -4885,7 +4884,7 @@
                       <a:r>
                         <a:rPr sz="1200">
                           <a:solidFill>
-                            <a:srgbClr val="0D1B2A"/>
+                            <a:srgbClr val="1F2A37"/>
                           </a:solidFill>
                         </a:rPr>
                         <a:t>Multi-team rollout, Spira integration, exec dashboards</a:t>
@@ -4894,7 +4893,7 @@
                   </a:txBody>
                   <a:tcPr>
                     <a:solidFill>
-                      <a:srgbClr val="F0F4F8"/>
+                      <a:srgbClr val="FAFAFA"/>
                     </a:solidFill>
                   </a:tcPr>
                 </a:tc>
@@ -4907,7 +4906,7 @@
                       <a:r>
                         <a:rPr sz="1200">
                           <a:solidFill>
-                            <a:srgbClr val="0D1B2A"/>
+                            <a:srgbClr val="1F2A37"/>
                           </a:solidFill>
                         </a:rPr>
                         <a:t>Planned</a:t>
@@ -4916,7 +4915,7 @@
                   </a:txBody>
                   <a:tcPr>
                     <a:solidFill>
-                      <a:srgbClr val="F0F4F8"/>
+                      <a:srgbClr val="FAFAFA"/>
                     </a:solidFill>
                   </a:tcPr>
                 </a:tc>
@@ -4940,7 +4939,7 @@
             <a:avLst/>
           </a:prstGeom>
           <a:solidFill>
-            <a:srgbClr val="0D1B2A"/>
+            <a:srgbClr val="1F2A37"/>
           </a:solidFill>
           <a:ln>
             <a:noFill/>
@@ -4994,10 +4993,10 @@
             <a:r>
               <a:rPr sz="900" b="0" i="0">
                 <a:solidFill>
-                  <a:srgbClr val="647487"/>
+                  <a:srgbClr val="4B5563"/>
                 </a:solidFill>
               </a:rPr>
-              <a:t>SAGE[ai] — Open Source (Apache 2.0) | github.com/Sumanharapanahalli/sage | March 2026</a:t>
+              <a:t>SAGE[ai] — Open Source (MIT) | github.com/Sumanharapanahalli/sage | March 2026</a:t>
             </a:r>
           </a:p>
         </p:txBody>
@@ -5016,7 +5015,7 @@
     <p:bg>
       <p:bgPr>
         <a:solidFill>
-          <a:srgbClr val="F0F4F8"/>
+          <a:srgbClr val="FAFAFA"/>
         </a:solidFill>
         <a:effectLst/>
       </p:bgPr>
@@ -5043,7 +5042,7 @@
             <a:avLst/>
           </a:prstGeom>
           <a:solidFill>
-            <a:srgbClr val="0D1B2A"/>
+            <a:srgbClr val="1F2A37"/>
           </a:solidFill>
           <a:ln>
             <a:noFill/>
@@ -5131,7 +5130,7 @@
             <a:r>
               <a:rPr sz="1600" b="0" i="0">
                 <a:solidFill>
-                  <a:srgbClr val="00B4D8"/>
+                  <a:srgbClr val="047857"/>
                 </a:solidFill>
               </a:rPr>
               <a:t>What we need vs what you get</a:t>
@@ -5165,7 +5164,7 @@
             <a:r>
               <a:rPr sz="1600" b="1" i="0">
                 <a:solidFill>
-                  <a:srgbClr val="0078D4"/>
+                  <a:srgbClr val="10B981"/>
                 </a:solidFill>
               </a:rPr>
               <a:t>What We Need</a:t>
@@ -5199,7 +5198,7 @@
             <a:r>
               <a:rPr sz="1300" b="0" i="0">
                 <a:solidFill>
-                  <a:srgbClr val="0D1B2A"/>
+                  <a:srgbClr val="1F2A37"/>
                 </a:solidFill>
               </a:rPr>
               <a:t>Production deployment approval (internal network)</a:t>
@@ -5233,7 +5232,7 @@
             <a:r>
               <a:rPr sz="1300" b="0" i="0">
                 <a:solidFill>
-                  <a:srgbClr val="0D1B2A"/>
+                  <a:srgbClr val="1F2A37"/>
                 </a:solidFill>
               </a:rPr>
               <a:t>2-day engineering team training session</a:t>
@@ -5267,7 +5266,7 @@
             <a:r>
               <a:rPr sz="1300" b="0" i="0">
                 <a:solidFill>
-                  <a:srgbClr val="0D1B2A"/>
+                  <a:srgbClr val="1F2A37"/>
                 </a:solidFill>
               </a:rPr>
               <a:t>Access to GitLab, Metabase, Teams API credentials</a:t>
@@ -5301,7 +5300,7 @@
             <a:r>
               <a:rPr sz="1300" b="0" i="0">
                 <a:solidFill>
-                  <a:srgbClr val="0D1B2A"/>
+                  <a:srgbClr val="1F2A37"/>
                 </a:solidFill>
               </a:rPr>
               <a:t>Dedicated server or VM  (8-core CPU · 32 GB RAM · optional GPU)</a:t>
@@ -5335,7 +5334,7 @@
             <a:r>
               <a:rPr sz="1600" b="1" i="0">
                 <a:solidFill>
-                  <a:srgbClr val="21C55D"/>
+                  <a:srgbClr val="10B981"/>
                 </a:solidFill>
               </a:rPr>
               <a:t>What You Get</a:t>
@@ -5369,7 +5368,7 @@
             <a:r>
               <a:rPr sz="1300" b="0" i="0">
                 <a:solidFill>
-                  <a:srgbClr val="0D1B2A"/>
+                  <a:srgbClr val="1F2A37"/>
                 </a:solidFill>
               </a:rPr>
               <a:t>KPI dashboard operational by Week 2</a:t>
@@ -5403,7 +5402,7 @@
             <a:r>
               <a:rPr sz="1300" b="0" i="0">
                 <a:solidFill>
-                  <a:srgbClr val="0D1B2A"/>
+                  <a:srgbClr val="1F2A37"/>
                 </a:solidFill>
               </a:rPr>
               <a:t>60+ hours/week reclaimed from manual work</a:t>
@@ -5437,7 +5436,7 @@
             <a:r>
               <a:rPr sz="1300" b="0" i="0">
                 <a:solidFill>
-                  <a:srgbClr val="0D1B2A"/>
+                  <a:srgbClr val="1F2A37"/>
                 </a:solidFill>
               </a:rPr>
               <a:t>ISO 13485 audit trail from day 1</a:t>
@@ -5471,7 +5470,7 @@
             <a:r>
               <a:rPr sz="1300" b="0" i="0">
                 <a:solidFill>
-                  <a:srgbClr val="0D1B2A"/>
+                  <a:srgbClr val="1F2A37"/>
                 </a:solidFill>
               </a:rPr>
               <a:t>AI that learns from your engineers' expertise</a:t>
@@ -5505,7 +5504,7 @@
             <a:r>
               <a:rPr sz="1300" b="0" i="0">
                 <a:solidFill>
-                  <a:srgbClr val="0D1B2A"/>
+                  <a:srgbClr val="1F2A37"/>
                 </a:solidFill>
               </a:rPr>
               <a:t>ROI positive within 2 months*</a:t>
@@ -5528,7 +5527,7 @@
             <a:avLst/>
           </a:prstGeom>
           <a:solidFill>
-            <a:srgbClr val="00B4D8"/>
+            <a:srgbClr val="047857"/>
           </a:solidFill>
           <a:ln>
             <a:noFill/>
@@ -5571,7 +5570,7 @@
             <a:avLst/>
           </a:prstGeom>
           <a:solidFill>
-            <a:srgbClr val="0D1B2A"/>
+            <a:srgbClr val="1F2A37"/>
           </a:solidFill>
           <a:ln>
             <a:noFill/>
@@ -5625,10 +5624,10 @@
             <a:r>
               <a:rPr sz="900" b="0" i="0">
                 <a:solidFill>
-                  <a:srgbClr val="647487"/>
+                  <a:srgbClr val="4B5563"/>
                 </a:solidFill>
               </a:rPr>
-              <a:t>SAGE[ai] — Open Source (Apache 2.0) | github.com/Sumanharapanahalli/sage | March 2026</a:t>
+              <a:t>SAGE[ai] — Open Source (MIT) | github.com/Sumanharapanahalli/sage | March 2026</a:t>
             </a:r>
           </a:p>
         </p:txBody>
@@ -5721,14 +5720,6 @@
 <file path=ppt/slides/slide13.xml><?xml version="1.0" encoding="utf-8"?>
 <p:sld xmlns:a="http://schemas.openxmlformats.org/drawingml/2006/main" xmlns:p="http://schemas.openxmlformats.org/presentationml/2006/main" xmlns:r="http://schemas.openxmlformats.org/officeDocument/2006/relationships">
   <p:cSld>
-    <p:bg>
-      <p:bgPr>
-        <a:solidFill>
-          <a:srgbClr val="FFFFFF"/>
-        </a:solidFill>
-        <a:effectLst/>
-      </p:bgPr>
-    </p:bg>
     <p:spTree>
       <p:nvGrpSpPr>
         <p:cNvPr id="1" name=""/>
@@ -5745,13 +5736,13 @@
         <p:spPr>
           <a:xfrm>
             <a:off x="0" y="0"/>
-            <a:ext cx="12188952" cy="1325880"/>
+            <a:ext cx="12188952" cy="6858000"/>
           </a:xfrm>
           <a:prstGeom prst="rect">
             <a:avLst/>
           </a:prstGeom>
           <a:solidFill>
-            <a:srgbClr val="ECFDF5"/>
+            <a:srgbClr val="1F2A37"/>
           </a:solidFill>
           <a:ln>
             <a:noFill/>
@@ -5781,88 +5772,20 @@
       </p:sp>
       <p:sp>
         <p:nvSpPr>
-          <p:cNvPr id="3" name="TextBox 2"/>
-          <p:cNvSpPr txBox="1"/>
-          <p:nvPr/>
-        </p:nvSpPr>
-        <p:spPr>
-          <a:xfrm>
-            <a:off x="411480" y="109728"/>
-            <a:ext cx="11338560" cy="731520"/>
-          </a:xfrm>
-          <a:prstGeom prst="rect">
-            <a:avLst/>
-          </a:prstGeom>
-          <a:noFill/>
-        </p:spPr>
-        <p:txBody>
-          <a:bodyPr wrap="none">
-            <a:spAutoFit/>
-          </a:bodyPr>
-          <a:lstStyle/>
-          <a:p>
-            <a:r>
-              <a:rPr sz="3000" b="1">
-                <a:solidFill>
-                  <a:srgbClr val="065F46"/>
-                </a:solidFill>
-                <a:latin typeface="Calibri"/>
-              </a:rPr>
-              <a:t>Build Orchestrator — Product Factory</a:t>
-            </a:r>
-          </a:p>
-        </p:txBody>
-      </p:sp>
-      <p:sp>
-        <p:nvSpPr>
-          <p:cNvPr id="4" name="TextBox 3"/>
-          <p:cNvSpPr txBox="1"/>
-          <p:nvPr/>
-        </p:nvSpPr>
-        <p:spPr>
-          <a:xfrm>
-            <a:off x="411480" y="804672"/>
-            <a:ext cx="11338560" cy="438912"/>
-          </a:xfrm>
-          <a:prstGeom prst="rect">
-            <a:avLst/>
-          </a:prstGeom>
-          <a:noFill/>
-        </p:spPr>
-        <p:txBody>
-          <a:bodyPr wrap="none">
-            <a:spAutoFit/>
-          </a:bodyPr>
-          <a:lstStyle/>
-          <a:p>
-            <a:r>
-              <a:rPr sz="1600" b="0">
-                <a:solidFill>
-                  <a:srgbClr val="4B5563"/>
-                </a:solidFill>
-                <a:latin typeface="Calibri"/>
-              </a:rPr>
-              <a:t>Describe a product in plain English → get a working codebase</a:t>
-            </a:r>
-          </a:p>
-        </p:txBody>
-      </p:sp>
-      <p:sp>
-        <p:nvSpPr>
-          <p:cNvPr id="5" name="Rectangle 4"/>
+          <p:cNvPr id="3" name="Rectangle 2"/>
           <p:cNvSpPr/>
           <p:nvPr/>
         </p:nvSpPr>
         <p:spPr>
           <a:xfrm>
-            <a:off x="457200" y="1508760"/>
-            <a:ext cx="3627120" cy="3200400"/>
+            <a:off x="0" y="3108960"/>
+            <a:ext cx="12188952" cy="54864"/>
           </a:xfrm>
           <a:prstGeom prst="rect">
             <a:avLst/>
           </a:prstGeom>
           <a:solidFill>
-            <a:srgbClr val="ECFDF5"/>
+            <a:srgbClr val="047857"/>
           </a:solidFill>
           <a:ln>
             <a:noFill/>
@@ -5892,48 +5815,14 @@
       </p:sp>
       <p:sp>
         <p:nvSpPr>
-          <p:cNvPr id="6" name="TextBox 5"/>
+          <p:cNvPr id="4" name="TextBox 3"/>
           <p:cNvSpPr txBox="1"/>
           <p:nvPr/>
         </p:nvSpPr>
         <p:spPr>
           <a:xfrm>
-            <a:off x="548640" y="1600200"/>
-            <a:ext cx="3444240" cy="274320"/>
-          </a:xfrm>
-          <a:prstGeom prst="rect">
-            <a:avLst/>
-          </a:prstGeom>
-          <a:noFill/>
-        </p:spPr>
-        <p:txBody>
-          <a:bodyPr wrap="none">
-            <a:spAutoFit/>
-          </a:bodyPr>
-          <a:lstStyle/>
-          <a:p>
-            <a:r>
-              <a:rPr sz="1500" b="1">
-                <a:solidFill>
-                  <a:srgbClr val="059669"/>
-                </a:solidFill>
-                <a:latin typeface="Calibri"/>
-              </a:rPr>
-              <a:t>10x Faster</a:t>
-            </a:r>
-          </a:p>
-        </p:txBody>
-      </p:sp>
-      <p:sp>
-        <p:nvSpPr>
-          <p:cNvPr id="7" name="TextBox 6"/>
-          <p:cNvSpPr txBox="1"/>
-          <p:nvPr/>
-        </p:nvSpPr>
-        <p:spPr>
-          <a:xfrm>
-            <a:off x="548640" y="1828800"/>
-            <a:ext cx="3444240" cy="2834640"/>
+            <a:off x="731520" y="1645920"/>
+            <a:ext cx="10515600" cy="1645920"/>
           </a:xfrm>
           <a:prstGeom prst="rect">
             <a:avLst/>
@@ -5946,34 +5835,130 @@
           </a:bodyPr>
           <a:lstStyle/>
           <a:p>
-            <a:r>
-              <a:rPr sz="1300" b="0">
-                <a:solidFill>
-                  <a:srgbClr val="374151"/>
-                </a:solidFill>
-                <a:latin typeface="Calibri"/>
+            <a:pPr algn="ctr"/>
+            <a:r>
+              <a:rPr sz="3000" b="1" i="0">
+                <a:solidFill>
+                  <a:srgbClr val="FFFFFF"/>
+                </a:solidFill>
               </a:rPr>
-              <a:t>Parallel agent execution with dependency-aware wave scheduling</a:t>
-            </a:r>
-          </a:p>
-        </p:txBody>
-      </p:sp>
-      <p:sp>
-        <p:nvSpPr>
-          <p:cNvPr id="8" name="Rectangle 7"/>
+              <a:t>SAGE[ai] is not a replacement for your engineers
+—
+it's their most productive teammate.</a:t>
+            </a:r>
+          </a:p>
+        </p:txBody>
+      </p:sp>
+      <p:sp>
+        <p:nvSpPr>
+          <p:cNvPr id="5" name="TextBox 4"/>
+          <p:cNvSpPr txBox="1"/>
+          <p:nvPr/>
+        </p:nvSpPr>
+        <p:spPr>
+          <a:xfrm>
+            <a:off x="731520" y="3383280"/>
+            <a:ext cx="10515600" cy="594360"/>
+          </a:xfrm>
+          <a:prstGeom prst="rect">
+            <a:avLst/>
+          </a:prstGeom>
+          <a:noFill/>
+        </p:spPr>
+        <p:txBody>
+          <a:bodyPr wrap="square">
+            <a:spAutoFit/>
+          </a:bodyPr>
+          <a:lstStyle/>
+          <a:p>
+            <a:pPr algn="ctr"/>
+            <a:r>
+              <a:rPr sz="2200" b="0" i="0">
+                <a:solidFill>
+                  <a:srgbClr val="047857"/>
+                </a:solidFill>
+              </a:rPr>
+              <a:t>Open source. Self-hosted. Start today at github.com/Sumanharapanahalli/sage</a:t>
+            </a:r>
+          </a:p>
+        </p:txBody>
+      </p:sp>
+      <p:sp>
+        <p:nvSpPr>
+          <p:cNvPr id="6" name="TextBox 5"/>
+          <p:cNvSpPr txBox="1"/>
+          <p:nvPr/>
+        </p:nvSpPr>
+        <p:spPr>
+          <a:xfrm>
+            <a:off x="1371600" y="5486400"/>
+            <a:ext cx="9144000" cy="457200"/>
+          </a:xfrm>
+          <a:prstGeom prst="rect">
+            <a:avLst/>
+          </a:prstGeom>
+          <a:noFill/>
+        </p:spPr>
+        <p:txBody>
+          <a:bodyPr wrap="square">
+            <a:spAutoFit/>
+          </a:bodyPr>
+          <a:lstStyle/>
+          <a:p>
+            <a:pPr algn="ctr"/>
+            <a:r>
+              <a:rPr sz="1000" b="0" i="1">
+                <a:solidFill>
+                  <a:srgbClr val="4B5563"/>
+                </a:solidFill>
+              </a:rPr>
+              <a:t>* All financial estimates are assumption-based. Validate with actual data before business decisions.</a:t>
+            </a:r>
+          </a:p>
+        </p:txBody>
+      </p:sp>
+    </p:spTree>
+  </p:cSld>
+  <p:clrMapOvr>
+    <a:masterClrMapping/>
+  </p:clrMapOvr>
+</p:sld>
+</file>
+
+<file path=ppt/slides/slide2.xml><?xml version="1.0" encoding="utf-8"?>
+<p:sld xmlns:a="http://schemas.openxmlformats.org/drawingml/2006/main" xmlns:p="http://schemas.openxmlformats.org/presentationml/2006/main" xmlns:r="http://schemas.openxmlformats.org/officeDocument/2006/relationships">
+  <p:cSld>
+    <p:bg>
+      <p:bgPr>
+        <a:solidFill>
+          <a:srgbClr val="FAFAFA"/>
+        </a:solidFill>
+        <a:effectLst/>
+      </p:bgPr>
+    </p:bg>
+    <p:spTree>
+      <p:nvGrpSpPr>
+        <p:cNvPr id="1" name=""/>
+        <p:cNvGrpSpPr/>
+        <p:nvPr/>
+      </p:nvGrpSpPr>
+      <p:grpSpPr/>
+      <p:sp>
+        <p:nvSpPr>
+          <p:cNvPr id="2" name="Rectangle 1"/>
           <p:cNvSpPr/>
           <p:nvPr/>
         </p:nvSpPr>
         <p:spPr>
           <a:xfrm>
-            <a:off x="4267200" y="1508760"/>
-            <a:ext cx="3627120" cy="3200400"/>
+            <a:off x="0" y="0"/>
+            <a:ext cx="12188952" cy="1325880"/>
           </a:xfrm>
           <a:prstGeom prst="rect">
             <a:avLst/>
           </a:prstGeom>
           <a:solidFill>
-            <a:srgbClr val="ECFDF5"/>
+            <a:srgbClr val="1F2A37"/>
           </a:solidFill>
           <a:ln>
             <a:noFill/>
@@ -6003,48 +5988,14 @@
       </p:sp>
       <p:sp>
         <p:nvSpPr>
-          <p:cNvPr id="9" name="TextBox 8"/>
+          <p:cNvPr id="3" name="TextBox 2"/>
           <p:cNvSpPr txBox="1"/>
           <p:nvPr/>
         </p:nvSpPr>
         <p:spPr>
           <a:xfrm>
-            <a:off x="4358640" y="1600200"/>
-            <a:ext cx="3444240" cy="274320"/>
-          </a:xfrm>
-          <a:prstGeom prst="rect">
-            <a:avLst/>
-          </a:prstGeom>
-          <a:noFill/>
-        </p:spPr>
-        <p:txBody>
-          <a:bodyPr wrap="none">
-            <a:spAutoFit/>
-          </a:bodyPr>
-          <a:lstStyle/>
-          <a:p>
-            <a:r>
-              <a:rPr sz="1500" b="1">
-                <a:solidFill>
-                  <a:srgbClr val="059669"/>
-                </a:solidFill>
-                <a:latin typeface="Calibri"/>
-              </a:rPr>
-              <a:t>Quality Built In</a:t>
-            </a:r>
-          </a:p>
-        </p:txBody>
-      </p:sp>
-      <p:sp>
-        <p:nvSpPr>
-          <p:cNvPr id="10" name="TextBox 9"/>
-          <p:cNvSpPr txBox="1"/>
-          <p:nvPr/>
-        </p:nvSpPr>
-        <p:spPr>
-          <a:xfrm>
-            <a:off x="4358640" y="1828800"/>
-            <a:ext cx="3444240" cy="2834640"/>
+            <a:off x="411480" y="109728"/>
+            <a:ext cx="11338560" cy="731520"/>
           </a:xfrm>
           <a:prstGeom prst="rect">
             <a:avLst/>
@@ -6057,34 +6008,306 @@
           </a:bodyPr>
           <a:lstStyle/>
           <a:p>
-            <a:r>
-              <a:rPr sz="1300" b="0">
-                <a:solidFill>
-                  <a:srgbClr val="374151"/>
-                </a:solidFill>
-                <a:latin typeface="Calibri"/>
+            <a:pPr algn="l"/>
+            <a:r>
+              <a:rPr sz="3000" b="1" i="0">
+                <a:solidFill>
+                  <a:srgbClr val="FFFFFF"/>
+                </a:solidFill>
               </a:rPr>
-              <a:t>Critic agent reviews every artifact before human sees it (actor-critic pattern)</a:t>
-            </a:r>
-          </a:p>
-        </p:txBody>
-      </p:sp>
-      <p:sp>
-        <p:nvSpPr>
-          <p:cNvPr id="11" name="Rectangle 10"/>
+              <a:t>Current State: Manual Bottlenecks at Scale</a:t>
+            </a:r>
+          </a:p>
+        </p:txBody>
+      </p:sp>
+      <p:sp>
+        <p:nvSpPr>
+          <p:cNvPr id="4" name="TextBox 3"/>
+          <p:cNvSpPr txBox="1"/>
+          <p:nvPr/>
+        </p:nvSpPr>
+        <p:spPr>
+          <a:xfrm>
+            <a:off x="411480" y="804672"/>
+            <a:ext cx="11338560" cy="438912"/>
+          </a:xfrm>
+          <a:prstGeom prst="rect">
+            <a:avLst/>
+          </a:prstGeom>
+          <a:noFill/>
+        </p:spPr>
+        <p:txBody>
+          <a:bodyPr wrap="square">
+            <a:spAutoFit/>
+          </a:bodyPr>
+          <a:lstStyle/>
+          <a:p>
+            <a:pPr algn="l"/>
+            <a:r>
+              <a:rPr sz="1600" b="0" i="0">
+                <a:solidFill>
+                  <a:srgbClr val="047857"/>
+                </a:solidFill>
+              </a:rPr>
+              <a:t>The hidden cost of running without agentic AI</a:t>
+            </a:r>
+          </a:p>
+        </p:txBody>
+      </p:sp>
+      <p:sp>
+        <p:nvSpPr>
+          <p:cNvPr id="5" name="TextBox 4"/>
+          <p:cNvSpPr txBox="1"/>
+          <p:nvPr/>
+        </p:nvSpPr>
+        <p:spPr>
+          <a:xfrm>
+            <a:off x="502920" y="1463040"/>
+            <a:ext cx="11155680" cy="384048"/>
+          </a:xfrm>
+          <a:prstGeom prst="rect">
+            <a:avLst/>
+          </a:prstGeom>
+          <a:noFill/>
+        </p:spPr>
+        <p:txBody>
+          <a:bodyPr wrap="square">
+            <a:spAutoFit/>
+          </a:bodyPr>
+          <a:lstStyle/>
+          <a:p>
+            <a:pPr algn="l"/>
+            <a:r>
+              <a:rPr sz="1500" b="0" i="0">
+                <a:solidFill>
+                  <a:srgbClr val="1F2A37"/>
+                </a:solidFill>
+              </a:rPr>
+              <a:t>45-60 min per error log analysis — manual triage every time</a:t>
+            </a:r>
+          </a:p>
+        </p:txBody>
+      </p:sp>
+      <p:sp>
+        <p:nvSpPr>
+          <p:cNvPr id="6" name="TextBox 5"/>
+          <p:cNvSpPr txBox="1"/>
+          <p:nvPr/>
+        </p:nvSpPr>
+        <p:spPr>
+          <a:xfrm>
+            <a:off x="502920" y="1920240"/>
+            <a:ext cx="11155680" cy="384048"/>
+          </a:xfrm>
+          <a:prstGeom prst="rect">
+            <a:avLst/>
+          </a:prstGeom>
+          <a:noFill/>
+        </p:spPr>
+        <p:txBody>
+          <a:bodyPr wrap="square">
+            <a:spAutoFit/>
+          </a:bodyPr>
+          <a:lstStyle/>
+          <a:p>
+            <a:pPr algn="l"/>
+            <a:r>
+              <a:rPr sz="1500" b="0" i="0">
+                <a:solidFill>
+                  <a:srgbClr val="1F2A37"/>
+                </a:solidFill>
+              </a:rPr>
+              <a:t>3-5 day MR review backlog — engineers blocked waiting for feedback</a:t>
+            </a:r>
+          </a:p>
+        </p:txBody>
+      </p:sp>
+      <p:sp>
+        <p:nvSpPr>
+          <p:cNvPr id="7" name="TextBox 6"/>
+          <p:cNvSpPr txBox="1"/>
+          <p:nvPr/>
+        </p:nvSpPr>
+        <p:spPr>
+          <a:xfrm>
+            <a:off x="502920" y="2377440"/>
+            <a:ext cx="11155680" cy="384048"/>
+          </a:xfrm>
+          <a:prstGeom prst="rect">
+            <a:avLst/>
+          </a:prstGeom>
+          <a:noFill/>
+        </p:spPr>
+        <p:txBody>
+          <a:bodyPr wrap="square">
+            <a:spAutoFit/>
+          </a:bodyPr>
+          <a:lstStyle/>
+          <a:p>
+            <a:pPr algn="l"/>
+            <a:r>
+              <a:rPr sz="1500" b="0" i="0">
+                <a:solidFill>
+                  <a:srgbClr val="1F2A37"/>
+                </a:solidFill>
+              </a:rPr>
+              <a:t>8+ hours/week compliance reporting — pure administrative overhead</a:t>
+            </a:r>
+          </a:p>
+        </p:txBody>
+      </p:sp>
+      <p:sp>
+        <p:nvSpPr>
+          <p:cNvPr id="8" name="TextBox 7"/>
+          <p:cNvSpPr txBox="1"/>
+          <p:nvPr/>
+        </p:nvSpPr>
+        <p:spPr>
+          <a:xfrm>
+            <a:off x="502920" y="2834640"/>
+            <a:ext cx="11155680" cy="384048"/>
+          </a:xfrm>
+          <a:prstGeom prst="rect">
+            <a:avLst/>
+          </a:prstGeom>
+          <a:noFill/>
+        </p:spPr>
+        <p:txBody>
+          <a:bodyPr wrap="square">
+            <a:spAutoFit/>
+          </a:bodyPr>
+          <a:lstStyle/>
+          <a:p>
+            <a:pPr algn="l"/>
+            <a:r>
+              <a:rPr sz="1500" b="0" i="0">
+                <a:solidFill>
+                  <a:srgbClr val="1F2A37"/>
+                </a:solidFill>
+              </a:rPr>
+              <a:t>Expert knowledge lost permanently when engineers leave the team</a:t>
+            </a:r>
+          </a:p>
+        </p:txBody>
+      </p:sp>
+      <p:sp>
+        <p:nvSpPr>
+          <p:cNvPr id="9" name="TextBox 8"/>
+          <p:cNvSpPr txBox="1"/>
+          <p:nvPr/>
+        </p:nvSpPr>
+        <p:spPr>
+          <a:xfrm>
+            <a:off x="502920" y="3291840"/>
+            <a:ext cx="11155680" cy="384048"/>
+          </a:xfrm>
+          <a:prstGeom prst="rect">
+            <a:avLst/>
+          </a:prstGeom>
+          <a:noFill/>
+        </p:spPr>
+        <p:txBody>
+          <a:bodyPr wrap="square">
+            <a:spAutoFit/>
+          </a:bodyPr>
+          <a:lstStyle/>
+          <a:p>
+            <a:pPr algn="l"/>
+            <a:r>
+              <a:rPr sz="1500" b="0" i="0">
+                <a:solidFill>
+                  <a:srgbClr val="1F2A37"/>
+                </a:solidFill>
+              </a:rPr>
+              <a:t>Error detection relies on human vigilance 24/7 — unsustainable at scale</a:t>
+            </a:r>
+          </a:p>
+        </p:txBody>
+      </p:sp>
+      <p:sp>
+        <p:nvSpPr>
+          <p:cNvPr id="10" name="TextBox 9"/>
+          <p:cNvSpPr txBox="1"/>
+          <p:nvPr/>
+        </p:nvSpPr>
+        <p:spPr>
+          <a:xfrm>
+            <a:off x="502920" y="3749040"/>
+            <a:ext cx="11155680" cy="384048"/>
+          </a:xfrm>
+          <a:prstGeom prst="rect">
+            <a:avLst/>
+          </a:prstGeom>
+          <a:noFill/>
+        </p:spPr>
+        <p:txBody>
+          <a:bodyPr wrap="square">
+            <a:spAutoFit/>
+          </a:bodyPr>
+          <a:lstStyle/>
+          <a:p>
+            <a:pPr algn="l"/>
+            <a:r>
+              <a:rPr sz="1500" b="0" i="0">
+                <a:solidFill>
+                  <a:srgbClr val="1F2A37"/>
+                </a:solidFill>
+              </a:rPr>
+              <a:t/>
+            </a:r>
+          </a:p>
+        </p:txBody>
+      </p:sp>
+      <p:sp>
+        <p:nvSpPr>
+          <p:cNvPr id="11" name="TextBox 10"/>
+          <p:cNvSpPr txBox="1"/>
+          <p:nvPr/>
+        </p:nvSpPr>
+        <p:spPr>
+          <a:xfrm>
+            <a:off x="502920" y="4206240"/>
+            <a:ext cx="11155680" cy="384048"/>
+          </a:xfrm>
+          <a:prstGeom prst="rect">
+            <a:avLst/>
+          </a:prstGeom>
+          <a:noFill/>
+        </p:spPr>
+        <p:txBody>
+          <a:bodyPr wrap="square">
+            <a:spAutoFit/>
+          </a:bodyPr>
+          <a:lstStyle/>
+          <a:p>
+            <a:pPr algn="l"/>
+            <a:r>
+              <a:rPr sz="1500" b="0" i="0">
+                <a:solidFill>
+                  <a:srgbClr val="1F2A37"/>
+                </a:solidFill>
+              </a:rPr>
+              <a:t>Result: ~68 hrs/week of preventable manual work — every single week</a:t>
+            </a:r>
+          </a:p>
+        </p:txBody>
+      </p:sp>
+      <p:sp>
+        <p:nvSpPr>
+          <p:cNvPr id="12" name="Rectangle 11"/>
           <p:cNvSpPr/>
           <p:nvPr/>
         </p:nvSpPr>
         <p:spPr>
           <a:xfrm>
-            <a:off x="8077200" y="1508760"/>
-            <a:ext cx="3627120" cy="3200400"/>
+            <a:off x="0" y="6492240"/>
+            <a:ext cx="12188952" cy="365760"/>
           </a:xfrm>
           <a:prstGeom prst="rect">
             <a:avLst/>
           </a:prstGeom>
           <a:solidFill>
-            <a:srgbClr val="ECFDF5"/>
+            <a:srgbClr val="1F2A37"/>
           </a:solidFill>
           <a:ln>
             <a:noFill/>
@@ -6114,48 +6337,14 @@
       </p:sp>
       <p:sp>
         <p:nvSpPr>
-          <p:cNvPr id="12" name="TextBox 11"/>
-          <p:cNvSpPr txBox="1"/>
-          <p:nvPr/>
-        </p:nvSpPr>
-        <p:spPr>
-          <a:xfrm>
-            <a:off x="8168640" y="1600200"/>
-            <a:ext cx="3444240" cy="274320"/>
-          </a:xfrm>
-          <a:prstGeom prst="rect">
-            <a:avLst/>
-          </a:prstGeom>
-          <a:noFill/>
-        </p:spPr>
-        <p:txBody>
-          <a:bodyPr wrap="none">
-            <a:spAutoFit/>
-          </a:bodyPr>
-          <a:lstStyle/>
-          <a:p>
-            <a:r>
-              <a:rPr sz="1500" b="1">
-                <a:solidFill>
-                  <a:srgbClr val="059669"/>
-                </a:solidFill>
-                <a:latin typeface="Calibri"/>
-              </a:rPr>
-              <a:t>Human Always in Control</a:t>
-            </a:r>
-          </a:p>
-        </p:txBody>
-      </p:sp>
-      <p:sp>
-        <p:nvSpPr>
           <p:cNvPr id="13" name="TextBox 12"/>
           <p:cNvSpPr txBox="1"/>
           <p:nvPr/>
         </p:nvSpPr>
         <p:spPr>
           <a:xfrm>
-            <a:off x="8168640" y="1828800"/>
-            <a:ext cx="3444240" cy="2834640"/>
+            <a:off x="274320" y="6510528"/>
+            <a:ext cx="8229600" cy="274320"/>
           </a:xfrm>
           <a:prstGeom prst="rect">
             <a:avLst/>
@@ -6168,68 +6357,60 @@
           </a:bodyPr>
           <a:lstStyle/>
           <a:p>
-            <a:r>
-              <a:rPr sz="1300" b="0">
-                <a:solidFill>
-                  <a:srgbClr val="374151"/>
-                </a:solidFill>
-                <a:latin typeface="Calibri"/>
+            <a:pPr algn="l"/>
+            <a:r>
+              <a:rPr sz="900" b="0" i="0">
+                <a:solidFill>
+                  <a:srgbClr val="4B5563"/>
+                </a:solidFill>
               </a:rPr>
-              <a:t>3 configurable HITL levels: minimal, standard, strict — compliance guaranteed</a:t>
-            </a:r>
-          </a:p>
-        </p:txBody>
-      </p:sp>
-      <p:sp>
-        <p:nvSpPr>
-          <p:cNvPr id="14" name="TextBox 13"/>
-          <p:cNvSpPr txBox="1"/>
-          <p:nvPr/>
-        </p:nvSpPr>
-        <p:spPr>
-          <a:xfrm>
-            <a:off x="457200" y="4937760"/>
-            <a:ext cx="11247120" cy="274320"/>
-          </a:xfrm>
-          <a:prstGeom prst="rect">
-            <a:avLst/>
-          </a:prstGeom>
-          <a:noFill/>
-        </p:spPr>
-        <p:txBody>
-          <a:bodyPr wrap="square">
-            <a:spAutoFit/>
-          </a:bodyPr>
-          <a:lstStyle/>
-          <a:p>
-            <a:r>
-              <a:rPr sz="1100" b="0">
-                <a:solidFill>
-                  <a:srgbClr val="6B7280"/>
-                </a:solidFill>
-                <a:latin typeface="Calibri"/>
-              </a:rPr>
-              <a:t>Supports 10 agentic AI patterns (Google Cloud reference) · 9 task types · 3-tier degradation</a:t>
-            </a:r>
-          </a:p>
-        </p:txBody>
-      </p:sp>
-      <p:sp>
-        <p:nvSpPr>
-          <p:cNvPr id="15" name="Rectangle 14"/>
+              <a:t>SAGE[ai] — Open Source (MIT) | github.com/Sumanharapanahalli/sage | March 2026</a:t>
+            </a:r>
+          </a:p>
+        </p:txBody>
+      </p:sp>
+    </p:spTree>
+  </p:cSld>
+  <p:clrMapOvr>
+    <a:masterClrMapping/>
+  </p:clrMapOvr>
+</p:sld>
+</file>
+
+<file path=ppt/slides/slide3.xml><?xml version="1.0" encoding="utf-8"?>
+<p:sld xmlns:a="http://schemas.openxmlformats.org/drawingml/2006/main" xmlns:p="http://schemas.openxmlformats.org/presentationml/2006/main" xmlns:r="http://schemas.openxmlformats.org/officeDocument/2006/relationships">
+  <p:cSld>
+    <p:bg>
+      <p:bgPr>
+        <a:solidFill>
+          <a:srgbClr val="FAFAFA"/>
+        </a:solidFill>
+        <a:effectLst/>
+      </p:bgPr>
+    </p:bg>
+    <p:spTree>
+      <p:nvGrpSpPr>
+        <p:cNvPr id="1" name=""/>
+        <p:cNvGrpSpPr/>
+        <p:nvPr/>
+      </p:nvGrpSpPr>
+      <p:grpSpPr/>
+      <p:sp>
+        <p:nvSpPr>
+          <p:cNvPr id="2" name="Rectangle 1"/>
           <p:cNvSpPr/>
           <p:nvPr/>
         </p:nvSpPr>
         <p:spPr>
           <a:xfrm>
-            <a:off x="0" y="6492240"/>
-            <a:ext cx="12188952" cy="365760"/>
+            <a:off x="0" y="0"/>
+            <a:ext cx="12188952" cy="1325880"/>
           </a:xfrm>
           <a:prstGeom prst="rect">
             <a:avLst/>
           </a:prstGeom>
           <a:solidFill>
-            <a:srgbClr val="ECFDF5"/>
+            <a:srgbClr val="1F2A37"/>
           </a:solidFill>
           <a:ln>
             <a:noFill/>
@@ -6259,14 +6440,14 @@
       </p:sp>
       <p:sp>
         <p:nvSpPr>
-          <p:cNvPr id="16" name="TextBox 15"/>
+          <p:cNvPr id="3" name="TextBox 2"/>
           <p:cNvSpPr txBox="1"/>
           <p:nvPr/>
         </p:nvSpPr>
         <p:spPr>
           <a:xfrm>
-            <a:off x="274320" y="6510528"/>
-            <a:ext cx="8229600" cy="274320"/>
+            <a:off x="411480" y="109728"/>
+            <a:ext cx="11338560" cy="731520"/>
           </a:xfrm>
           <a:prstGeom prst="rect">
             <a:avLst/>
@@ -6274,57 +6455,311 @@
           <a:noFill/>
         </p:spPr>
         <p:txBody>
-          <a:bodyPr wrap="none">
+          <a:bodyPr wrap="square">
             <a:spAutoFit/>
           </a:bodyPr>
           <a:lstStyle/>
           <a:p>
-            <a:r>
-              <a:rPr sz="900" b="0">
-                <a:solidFill>
-                  <a:srgbClr val="6B7280"/>
-                </a:solidFill>
-                <a:latin typeface="Calibri"/>
+            <a:pPr algn="l"/>
+            <a:r>
+              <a:rPr sz="3000" b="1" i="0">
+                <a:solidFill>
+                  <a:srgbClr val="FFFFFF"/>
+                </a:solidFill>
               </a:rPr>
-              <a:t>SAGE[ai] — Open Source (Apache 2.0) | github.com/Sumanharapanahalli/sage | March 2026</a:t>
-            </a:r>
-          </a:p>
-        </p:txBody>
-      </p:sp>
-    </p:spTree>
-  </p:cSld>
-  <p:clrMapOvr>
-    <a:masterClrMapping/>
-  </p:clrMapOvr>
-</p:sld>
-</file>
-
-<file path=ppt/slides/slide14.xml><?xml version="1.0" encoding="utf-8"?>
-<p:sld xmlns:a="http://schemas.openxmlformats.org/drawingml/2006/main" xmlns:p="http://schemas.openxmlformats.org/presentationml/2006/main" xmlns:r="http://schemas.openxmlformats.org/officeDocument/2006/relationships">
-  <p:cSld>
-    <p:spTree>
-      <p:nvGrpSpPr>
-        <p:cNvPr id="1" name=""/>
-        <p:cNvGrpSpPr/>
-        <p:nvPr/>
-      </p:nvGrpSpPr>
-      <p:grpSpPr/>
-      <p:sp>
-        <p:nvSpPr>
-          <p:cNvPr id="2" name="Rectangle 1"/>
+              <a:t>SAGE[ai]: Always-On AI Engineering Partner</a:t>
+            </a:r>
+          </a:p>
+        </p:txBody>
+      </p:sp>
+      <p:sp>
+        <p:nvSpPr>
+          <p:cNvPr id="4" name="TextBox 3"/>
+          <p:cNvSpPr txBox="1"/>
+          <p:nvPr/>
+        </p:nvSpPr>
+        <p:spPr>
+          <a:xfrm>
+            <a:off x="411480" y="804672"/>
+            <a:ext cx="11338560" cy="438912"/>
+          </a:xfrm>
+          <a:prstGeom prst="rect">
+            <a:avLst/>
+          </a:prstGeom>
+          <a:noFill/>
+        </p:spPr>
+        <p:txBody>
+          <a:bodyPr wrap="square">
+            <a:spAutoFit/>
+          </a:bodyPr>
+          <a:lstStyle/>
+          <a:p>
+            <a:pPr algn="l"/>
+            <a:r>
+              <a:rPr sz="1600" b="0" i="0">
+                <a:solidFill>
+                  <a:srgbClr val="047857"/>
+                </a:solidFill>
+              </a:rPr>
+              <a:t>Replace manual toil with autonomous, auditable intelligence</a:t>
+            </a:r>
+          </a:p>
+        </p:txBody>
+      </p:sp>
+      <p:sp>
+        <p:nvSpPr>
+          <p:cNvPr id="5" name="TextBox 4"/>
+          <p:cNvSpPr txBox="1"/>
+          <p:nvPr/>
+        </p:nvSpPr>
+        <p:spPr>
+          <a:xfrm>
+            <a:off x="502920" y="1463040"/>
+            <a:ext cx="11155680" cy="384048"/>
+          </a:xfrm>
+          <a:prstGeom prst="rect">
+            <a:avLst/>
+          </a:prstGeom>
+          <a:noFill/>
+        </p:spPr>
+        <p:txBody>
+          <a:bodyPr wrap="square">
+            <a:spAutoFit/>
+          </a:bodyPr>
+          <a:lstStyle/>
+          <a:p>
+            <a:pPr algn="l"/>
+            <a:r>
+              <a:rPr sz="1500" b="0" i="0">
+                <a:solidFill>
+                  <a:srgbClr val="1F2A37"/>
+                </a:solidFill>
+              </a:rPr>
+              <a:t>Analyzes error logs in under 60 seconds  (vs 45-60 min manual)</a:t>
+            </a:r>
+          </a:p>
+        </p:txBody>
+      </p:sp>
+      <p:sp>
+        <p:nvSpPr>
+          <p:cNvPr id="6" name="TextBox 5"/>
+          <p:cNvSpPr txBox="1"/>
+          <p:nvPr/>
+        </p:nvSpPr>
+        <p:spPr>
+          <a:xfrm>
+            <a:off x="502920" y="1920240"/>
+            <a:ext cx="11155680" cy="384048"/>
+          </a:xfrm>
+          <a:prstGeom prst="rect">
+            <a:avLst/>
+          </a:prstGeom>
+          <a:noFill/>
+        </p:spPr>
+        <p:txBody>
+          <a:bodyPr wrap="square">
+            <a:spAutoFit/>
+          </a:bodyPr>
+          <a:lstStyle/>
+          <a:p>
+            <a:pPr algn="l"/>
+            <a:r>
+              <a:rPr sz="1500" b="0" i="0">
+                <a:solidFill>
+                  <a:srgbClr val="1F2A37"/>
+                </a:solidFill>
+              </a:rPr>
+              <a:t>AI code reviews with multi-step ReAct reasoning loop</a:t>
+            </a:r>
+          </a:p>
+        </p:txBody>
+      </p:sp>
+      <p:sp>
+        <p:nvSpPr>
+          <p:cNvPr id="7" name="TextBox 6"/>
+          <p:cNvSpPr txBox="1"/>
+          <p:nvPr/>
+        </p:nvSpPr>
+        <p:spPr>
+          <a:xfrm>
+            <a:off x="502920" y="2377440"/>
+            <a:ext cx="11155680" cy="384048"/>
+          </a:xfrm>
+          <a:prstGeom prst="rect">
+            <a:avLst/>
+          </a:prstGeom>
+          <a:noFill/>
+        </p:spPr>
+        <p:txBody>
+          <a:bodyPr wrap="square">
+            <a:spAutoFit/>
+          </a:bodyPr>
+          <a:lstStyle/>
+          <a:p>
+            <a:pPr algn="l"/>
+            <a:r>
+              <a:rPr sz="1500" b="0" i="0">
+                <a:solidFill>
+                  <a:srgbClr val="1F2A37"/>
+                </a:solidFill>
+              </a:rPr>
+              <a:t>Monitors Teams, Metabase, GitLab — real-time event detection</a:t>
+            </a:r>
+          </a:p>
+        </p:txBody>
+      </p:sp>
+      <p:sp>
+        <p:nvSpPr>
+          <p:cNvPr id="8" name="TextBox 7"/>
+          <p:cNvSpPr txBox="1"/>
+          <p:nvPr/>
+        </p:nvSpPr>
+        <p:spPr>
+          <a:xfrm>
+            <a:off x="502920" y="2834640"/>
+            <a:ext cx="11155680" cy="384048"/>
+          </a:xfrm>
+          <a:prstGeom prst="rect">
+            <a:avLst/>
+          </a:prstGeom>
+          <a:noFill/>
+        </p:spPr>
+        <p:txBody>
+          <a:bodyPr wrap="square">
+            <a:spAutoFit/>
+          </a:bodyPr>
+          <a:lstStyle/>
+          <a:p>
+            <a:pPr algn="l"/>
+            <a:r>
+              <a:rPr sz="1500" b="0" i="0">
+                <a:solidFill>
+                  <a:srgbClr val="1F2A37"/>
+                </a:solidFill>
+              </a:rPr>
+              <a:t>Every decision logged to immutable ISO 13485 audit trail</a:t>
+            </a:r>
+          </a:p>
+        </p:txBody>
+      </p:sp>
+      <p:sp>
+        <p:nvSpPr>
+          <p:cNvPr id="9" name="TextBox 8"/>
+          <p:cNvSpPr txBox="1"/>
+          <p:nvPr/>
+        </p:nvSpPr>
+        <p:spPr>
+          <a:xfrm>
+            <a:off x="502920" y="3291840"/>
+            <a:ext cx="11155680" cy="384048"/>
+          </a:xfrm>
+          <a:prstGeom prst="rect">
+            <a:avLst/>
+          </a:prstGeom>
+          <a:noFill/>
+        </p:spPr>
+        <p:txBody>
+          <a:bodyPr wrap="square">
+            <a:spAutoFit/>
+          </a:bodyPr>
+          <a:lstStyle/>
+          <a:p>
+            <a:pPr algn="l"/>
+            <a:r>
+              <a:rPr sz="1500" b="0" i="0">
+                <a:solidFill>
+                  <a:srgbClr val="1F2A37"/>
+                </a:solidFill>
+              </a:rPr>
+              <a:t>Human-in-the-loop: AI advises, humans decide — always</a:t>
+            </a:r>
+          </a:p>
+        </p:txBody>
+      </p:sp>
+      <p:sp>
+        <p:nvSpPr>
+          <p:cNvPr id="10" name="TextBox 9"/>
+          <p:cNvSpPr txBox="1"/>
+          <p:nvPr/>
+        </p:nvSpPr>
+        <p:spPr>
+          <a:xfrm>
+            <a:off x="502920" y="3749040"/>
+            <a:ext cx="11155680" cy="384048"/>
+          </a:xfrm>
+          <a:prstGeom prst="rect">
+            <a:avLst/>
+          </a:prstGeom>
+          <a:noFill/>
+        </p:spPr>
+        <p:txBody>
+          <a:bodyPr wrap="square">
+            <a:spAutoFit/>
+          </a:bodyPr>
+          <a:lstStyle/>
+          <a:p>
+            <a:pPr algn="l"/>
+            <a:r>
+              <a:rPr sz="1500" b="0" i="0">
+                <a:solidFill>
+                  <a:srgbClr val="1F2A37"/>
+                </a:solidFill>
+              </a:rPr>
+              <a:t>Learns from every correction via vector memory (RAG)</a:t>
+            </a:r>
+          </a:p>
+        </p:txBody>
+      </p:sp>
+      <p:sp>
+        <p:nvSpPr>
+          <p:cNvPr id="11" name="TextBox 10"/>
+          <p:cNvSpPr txBox="1"/>
+          <p:nvPr/>
+        </p:nvSpPr>
+        <p:spPr>
+          <a:xfrm>
+            <a:off x="502920" y="4206240"/>
+            <a:ext cx="11155680" cy="384048"/>
+          </a:xfrm>
+          <a:prstGeom prst="rect">
+            <a:avLst/>
+          </a:prstGeom>
+          <a:noFill/>
+        </p:spPr>
+        <p:txBody>
+          <a:bodyPr wrap="square">
+            <a:spAutoFit/>
+          </a:bodyPr>
+          <a:lstStyle/>
+          <a:p>
+            <a:pPr algn="l"/>
+            <a:r>
+              <a:rPr sz="1500" b="0" i="0">
+                <a:solidFill>
+                  <a:srgbClr val="1F2A37"/>
+                </a:solidFill>
+              </a:rPr>
+              <a:t>Web dashboard for all stakeholders — zero CLI required</a:t>
+            </a:r>
+          </a:p>
+        </p:txBody>
+      </p:sp>
+      <p:sp>
+        <p:nvSpPr>
+          <p:cNvPr id="12" name="Rectangle 11"/>
           <p:cNvSpPr/>
           <p:nvPr/>
         </p:nvSpPr>
         <p:spPr>
           <a:xfrm>
-            <a:off x="0" y="0"/>
-            <a:ext cx="12188952" cy="6858000"/>
+            <a:off x="0" y="6492240"/>
+            <a:ext cx="12188952" cy="365760"/>
           </a:xfrm>
           <a:prstGeom prst="rect">
             <a:avLst/>
           </a:prstGeom>
           <a:solidFill>
-            <a:srgbClr val="0D1B2A"/>
+            <a:srgbClr val="1F2A37"/>
           </a:solidFill>
           <a:ln>
             <a:noFill/>
@@ -6354,20 +6789,80 @@
       </p:sp>
       <p:sp>
         <p:nvSpPr>
-          <p:cNvPr id="3" name="Rectangle 2"/>
+          <p:cNvPr id="13" name="TextBox 12"/>
+          <p:cNvSpPr txBox="1"/>
+          <p:nvPr/>
+        </p:nvSpPr>
+        <p:spPr>
+          <a:xfrm>
+            <a:off x="274320" y="6510528"/>
+            <a:ext cx="8229600" cy="274320"/>
+          </a:xfrm>
+          <a:prstGeom prst="rect">
+            <a:avLst/>
+          </a:prstGeom>
+          <a:noFill/>
+        </p:spPr>
+        <p:txBody>
+          <a:bodyPr wrap="square">
+            <a:spAutoFit/>
+          </a:bodyPr>
+          <a:lstStyle/>
+          <a:p>
+            <a:pPr algn="l"/>
+            <a:r>
+              <a:rPr sz="900" b="0" i="0">
+                <a:solidFill>
+                  <a:srgbClr val="4B5563"/>
+                </a:solidFill>
+              </a:rPr>
+              <a:t>SAGE[ai] — Open Source (MIT) | github.com/Sumanharapanahalli/sage | March 2026</a:t>
+            </a:r>
+          </a:p>
+        </p:txBody>
+      </p:sp>
+    </p:spTree>
+  </p:cSld>
+  <p:clrMapOvr>
+    <a:masterClrMapping/>
+  </p:clrMapOvr>
+</p:sld>
+</file>
+
+<file path=ppt/slides/slide4.xml><?xml version="1.0" encoding="utf-8"?>
+<p:sld xmlns:a="http://schemas.openxmlformats.org/drawingml/2006/main" xmlns:p="http://schemas.openxmlformats.org/presentationml/2006/main" xmlns:r="http://schemas.openxmlformats.org/officeDocument/2006/relationships">
+  <p:cSld>
+    <p:bg>
+      <p:bgPr>
+        <a:solidFill>
+          <a:srgbClr val="FAFAFA"/>
+        </a:solidFill>
+        <a:effectLst/>
+      </p:bgPr>
+    </p:bg>
+    <p:spTree>
+      <p:nvGrpSpPr>
+        <p:cNvPr id="1" name=""/>
+        <p:cNvGrpSpPr/>
+        <p:nvPr/>
+      </p:nvGrpSpPr>
+      <p:grpSpPr/>
+      <p:sp>
+        <p:nvSpPr>
+          <p:cNvPr id="2" name="Rectangle 1"/>
           <p:cNvSpPr/>
           <p:nvPr/>
         </p:nvSpPr>
         <p:spPr>
           <a:xfrm>
-            <a:off x="0" y="3108960"/>
-            <a:ext cx="12188952" cy="54864"/>
+            <a:off x="0" y="0"/>
+            <a:ext cx="12188952" cy="1325880"/>
           </a:xfrm>
           <a:prstGeom prst="rect">
             <a:avLst/>
           </a:prstGeom>
           <a:solidFill>
-            <a:srgbClr val="00B4D8"/>
+            <a:srgbClr val="1F2A37"/>
           </a:solidFill>
           <a:ln>
             <a:noFill/>
@@ -6397,14 +6892,14 @@
       </p:sp>
       <p:sp>
         <p:nvSpPr>
-          <p:cNvPr id="4" name="TextBox 3"/>
+          <p:cNvPr id="3" name="TextBox 2"/>
           <p:cNvSpPr txBox="1"/>
           <p:nvPr/>
         </p:nvSpPr>
         <p:spPr>
           <a:xfrm>
-            <a:off x="731520" y="1645920"/>
-            <a:ext cx="10515600" cy="1645920"/>
+            <a:off x="411480" y="109728"/>
+            <a:ext cx="11338560" cy="731520"/>
           </a:xfrm>
           <a:prstGeom prst="rect">
             <a:avLst/>
@@ -6417,30 +6912,28 @@
           </a:bodyPr>
           <a:lstStyle/>
           <a:p>
-            <a:pPr algn="ctr"/>
+            <a:pPr algn="l"/>
             <a:r>
               <a:rPr sz="3000" b="1" i="0">
                 <a:solidFill>
                   <a:srgbClr val="FFFFFF"/>
                 </a:solidFill>
               </a:rPr>
-              <a:t>SAGE[ai] is not a replacement for your engineers
-—
-it's their most productive teammate.</a:t>
-            </a:r>
-          </a:p>
-        </p:txBody>
-      </p:sp>
-      <p:sp>
-        <p:nvSpPr>
-          <p:cNvPr id="5" name="TextBox 4"/>
+              <a:t>Companies Already Winning with Agentic AI</a:t>
+            </a:r>
+          </a:p>
+        </p:txBody>
+      </p:sp>
+      <p:sp>
+        <p:nvSpPr>
+          <p:cNvPr id="4" name="TextBox 3"/>
           <p:cNvSpPr txBox="1"/>
           <p:nvPr/>
         </p:nvSpPr>
         <p:spPr>
           <a:xfrm>
-            <a:off x="731520" y="3383280"/>
-            <a:ext cx="10515600" cy="594360"/>
+            <a:off x="411480" y="804672"/>
+            <a:ext cx="11338560" cy="438912"/>
           </a:xfrm>
           <a:prstGeom prst="rect">
             <a:avLst/>
@@ -6453,1086 +6946,11 @@
           </a:bodyPr>
           <a:lstStyle/>
           <a:p>
-            <a:pPr algn="ctr"/>
-            <a:r>
-              <a:rPr sz="2200" b="0" i="0">
-                <a:solidFill>
-                  <a:srgbClr val="00B4D8"/>
-                </a:solidFill>
-              </a:rPr>
-              <a:t>Open source. Self-hosted. Start today at github.com/Sumanharapanahalli/sage</a:t>
-            </a:r>
-          </a:p>
-        </p:txBody>
-      </p:sp>
-      <p:sp>
-        <p:nvSpPr>
-          <p:cNvPr id="6" name="TextBox 5"/>
-          <p:cNvSpPr txBox="1"/>
-          <p:nvPr/>
-        </p:nvSpPr>
-        <p:spPr>
-          <a:xfrm>
-            <a:off x="1371600" y="5486400"/>
-            <a:ext cx="9144000" cy="457200"/>
-          </a:xfrm>
-          <a:prstGeom prst="rect">
-            <a:avLst/>
-          </a:prstGeom>
-          <a:noFill/>
-        </p:spPr>
-        <p:txBody>
-          <a:bodyPr wrap="square">
-            <a:spAutoFit/>
-          </a:bodyPr>
-          <a:lstStyle/>
-          <a:p>
-            <a:pPr algn="ctr"/>
-            <a:r>
-              <a:rPr sz="1000" b="0" i="1">
-                <a:solidFill>
-                  <a:srgbClr val="647487"/>
-                </a:solidFill>
-              </a:rPr>
-              <a:t>* All financial estimates are assumption-based. Validate with actual data before business decisions.</a:t>
-            </a:r>
-          </a:p>
-        </p:txBody>
-      </p:sp>
-    </p:spTree>
-  </p:cSld>
-  <p:clrMapOvr>
-    <a:masterClrMapping/>
-  </p:clrMapOvr>
-</p:sld>
-</file>
-
-<file path=ppt/slides/slide2.xml><?xml version="1.0" encoding="utf-8"?>
-<p:sld xmlns:a="http://schemas.openxmlformats.org/drawingml/2006/main" xmlns:p="http://schemas.openxmlformats.org/presentationml/2006/main" xmlns:r="http://schemas.openxmlformats.org/officeDocument/2006/relationships">
-  <p:cSld>
-    <p:bg>
-      <p:bgPr>
-        <a:solidFill>
-          <a:srgbClr val="F0F4F8"/>
-        </a:solidFill>
-        <a:effectLst/>
-      </p:bgPr>
-    </p:bg>
-    <p:spTree>
-      <p:nvGrpSpPr>
-        <p:cNvPr id="1" name=""/>
-        <p:cNvGrpSpPr/>
-        <p:nvPr/>
-      </p:nvGrpSpPr>
-      <p:grpSpPr/>
-      <p:sp>
-        <p:nvSpPr>
-          <p:cNvPr id="2" name="Rectangle 1"/>
-          <p:cNvSpPr/>
-          <p:nvPr/>
-        </p:nvSpPr>
-        <p:spPr>
-          <a:xfrm>
-            <a:off x="0" y="0"/>
-            <a:ext cx="12188952" cy="1325880"/>
-          </a:xfrm>
-          <a:prstGeom prst="rect">
-            <a:avLst/>
-          </a:prstGeom>
-          <a:solidFill>
-            <a:srgbClr val="0D1B2A"/>
-          </a:solidFill>
-          <a:ln>
-            <a:noFill/>
-          </a:ln>
-        </p:spPr>
-        <p:style>
-          <a:lnRef idx="1">
-            <a:schemeClr val="accent1"/>
-          </a:lnRef>
-          <a:fillRef idx="3">
-            <a:schemeClr val="accent1"/>
-          </a:fillRef>
-          <a:effectRef idx="2">
-            <a:schemeClr val="accent1"/>
-          </a:effectRef>
-          <a:fontRef idx="minor">
-            <a:schemeClr val="lt1"/>
-          </a:fontRef>
-        </p:style>
-        <p:txBody>
-          <a:bodyPr rtlCol="0" anchor="ctr"/>
-          <a:lstStyle/>
-          <a:p>
-            <a:pPr algn="ctr"/>
-          </a:p>
-        </p:txBody>
-      </p:sp>
-      <p:sp>
-        <p:nvSpPr>
-          <p:cNvPr id="3" name="TextBox 2"/>
-          <p:cNvSpPr txBox="1"/>
-          <p:nvPr/>
-        </p:nvSpPr>
-        <p:spPr>
-          <a:xfrm>
-            <a:off x="411480" y="109728"/>
-            <a:ext cx="11338560" cy="731520"/>
-          </a:xfrm>
-          <a:prstGeom prst="rect">
-            <a:avLst/>
-          </a:prstGeom>
-          <a:noFill/>
-        </p:spPr>
-        <p:txBody>
-          <a:bodyPr wrap="square">
-            <a:spAutoFit/>
-          </a:bodyPr>
-          <a:lstStyle/>
-          <a:p>
             <a:pPr algn="l"/>
             <a:r>
-              <a:rPr sz="3000" b="1" i="0">
-                <a:solidFill>
-                  <a:srgbClr val="FFFFFF"/>
-                </a:solidFill>
-              </a:rPr>
-              <a:t>Current State: Manual Bottlenecks at Scale</a:t>
-            </a:r>
-          </a:p>
-        </p:txBody>
-      </p:sp>
-      <p:sp>
-        <p:nvSpPr>
-          <p:cNvPr id="4" name="TextBox 3"/>
-          <p:cNvSpPr txBox="1"/>
-          <p:nvPr/>
-        </p:nvSpPr>
-        <p:spPr>
-          <a:xfrm>
-            <a:off x="411480" y="804672"/>
-            <a:ext cx="11338560" cy="438912"/>
-          </a:xfrm>
-          <a:prstGeom prst="rect">
-            <a:avLst/>
-          </a:prstGeom>
-          <a:noFill/>
-        </p:spPr>
-        <p:txBody>
-          <a:bodyPr wrap="square">
-            <a:spAutoFit/>
-          </a:bodyPr>
-          <a:lstStyle/>
-          <a:p>
-            <a:pPr algn="l"/>
-            <a:r>
               <a:rPr sz="1600" b="0" i="0">
                 <a:solidFill>
-                  <a:srgbClr val="00B4D8"/>
-                </a:solidFill>
-              </a:rPr>
-              <a:t>The hidden cost of running without agentic AI</a:t>
-            </a:r>
-          </a:p>
-        </p:txBody>
-      </p:sp>
-      <p:sp>
-        <p:nvSpPr>
-          <p:cNvPr id="5" name="TextBox 4"/>
-          <p:cNvSpPr txBox="1"/>
-          <p:nvPr/>
-        </p:nvSpPr>
-        <p:spPr>
-          <a:xfrm>
-            <a:off x="502920" y="1463040"/>
-            <a:ext cx="11155680" cy="384048"/>
-          </a:xfrm>
-          <a:prstGeom prst="rect">
-            <a:avLst/>
-          </a:prstGeom>
-          <a:noFill/>
-        </p:spPr>
-        <p:txBody>
-          <a:bodyPr wrap="square">
-            <a:spAutoFit/>
-          </a:bodyPr>
-          <a:lstStyle/>
-          <a:p>
-            <a:pPr algn="l"/>
-            <a:r>
-              <a:rPr sz="1500" b="0" i="0">
-                <a:solidFill>
-                  <a:srgbClr val="0D1B2A"/>
-                </a:solidFill>
-              </a:rPr>
-              <a:t>45-60 min per error log analysis — manual triage every time</a:t>
-            </a:r>
-          </a:p>
-        </p:txBody>
-      </p:sp>
-      <p:sp>
-        <p:nvSpPr>
-          <p:cNvPr id="6" name="TextBox 5"/>
-          <p:cNvSpPr txBox="1"/>
-          <p:nvPr/>
-        </p:nvSpPr>
-        <p:spPr>
-          <a:xfrm>
-            <a:off x="502920" y="1920240"/>
-            <a:ext cx="11155680" cy="384048"/>
-          </a:xfrm>
-          <a:prstGeom prst="rect">
-            <a:avLst/>
-          </a:prstGeom>
-          <a:noFill/>
-        </p:spPr>
-        <p:txBody>
-          <a:bodyPr wrap="square">
-            <a:spAutoFit/>
-          </a:bodyPr>
-          <a:lstStyle/>
-          <a:p>
-            <a:pPr algn="l"/>
-            <a:r>
-              <a:rPr sz="1500" b="0" i="0">
-                <a:solidFill>
-                  <a:srgbClr val="0D1B2A"/>
-                </a:solidFill>
-              </a:rPr>
-              <a:t>3-5 day MR review backlog — engineers blocked waiting for feedback</a:t>
-            </a:r>
-          </a:p>
-        </p:txBody>
-      </p:sp>
-      <p:sp>
-        <p:nvSpPr>
-          <p:cNvPr id="7" name="TextBox 6"/>
-          <p:cNvSpPr txBox="1"/>
-          <p:nvPr/>
-        </p:nvSpPr>
-        <p:spPr>
-          <a:xfrm>
-            <a:off x="502920" y="2377440"/>
-            <a:ext cx="11155680" cy="384048"/>
-          </a:xfrm>
-          <a:prstGeom prst="rect">
-            <a:avLst/>
-          </a:prstGeom>
-          <a:noFill/>
-        </p:spPr>
-        <p:txBody>
-          <a:bodyPr wrap="square">
-            <a:spAutoFit/>
-          </a:bodyPr>
-          <a:lstStyle/>
-          <a:p>
-            <a:pPr algn="l"/>
-            <a:r>
-              <a:rPr sz="1500" b="0" i="0">
-                <a:solidFill>
-                  <a:srgbClr val="0D1B2A"/>
-                </a:solidFill>
-              </a:rPr>
-              <a:t>8+ hours/week compliance reporting — pure administrative overhead</a:t>
-            </a:r>
-          </a:p>
-        </p:txBody>
-      </p:sp>
-      <p:sp>
-        <p:nvSpPr>
-          <p:cNvPr id="8" name="TextBox 7"/>
-          <p:cNvSpPr txBox="1"/>
-          <p:nvPr/>
-        </p:nvSpPr>
-        <p:spPr>
-          <a:xfrm>
-            <a:off x="502920" y="2834640"/>
-            <a:ext cx="11155680" cy="384048"/>
-          </a:xfrm>
-          <a:prstGeom prst="rect">
-            <a:avLst/>
-          </a:prstGeom>
-          <a:noFill/>
-        </p:spPr>
-        <p:txBody>
-          <a:bodyPr wrap="square">
-            <a:spAutoFit/>
-          </a:bodyPr>
-          <a:lstStyle/>
-          <a:p>
-            <a:pPr algn="l"/>
-            <a:r>
-              <a:rPr sz="1500" b="0" i="0">
-                <a:solidFill>
-                  <a:srgbClr val="0D1B2A"/>
-                </a:solidFill>
-              </a:rPr>
-              <a:t>Expert knowledge lost permanently when engineers leave the team</a:t>
-            </a:r>
-          </a:p>
-        </p:txBody>
-      </p:sp>
-      <p:sp>
-        <p:nvSpPr>
-          <p:cNvPr id="9" name="TextBox 8"/>
-          <p:cNvSpPr txBox="1"/>
-          <p:nvPr/>
-        </p:nvSpPr>
-        <p:spPr>
-          <a:xfrm>
-            <a:off x="502920" y="3291840"/>
-            <a:ext cx="11155680" cy="384048"/>
-          </a:xfrm>
-          <a:prstGeom prst="rect">
-            <a:avLst/>
-          </a:prstGeom>
-          <a:noFill/>
-        </p:spPr>
-        <p:txBody>
-          <a:bodyPr wrap="square">
-            <a:spAutoFit/>
-          </a:bodyPr>
-          <a:lstStyle/>
-          <a:p>
-            <a:pPr algn="l"/>
-            <a:r>
-              <a:rPr sz="1500" b="0" i="0">
-                <a:solidFill>
-                  <a:srgbClr val="0D1B2A"/>
-                </a:solidFill>
-              </a:rPr>
-              <a:t>Error detection relies on human vigilance 24/7 — unsustainable at scale</a:t>
-            </a:r>
-          </a:p>
-        </p:txBody>
-      </p:sp>
-      <p:sp>
-        <p:nvSpPr>
-          <p:cNvPr id="10" name="TextBox 9"/>
-          <p:cNvSpPr txBox="1"/>
-          <p:nvPr/>
-        </p:nvSpPr>
-        <p:spPr>
-          <a:xfrm>
-            <a:off x="502920" y="3749040"/>
-            <a:ext cx="11155680" cy="384048"/>
-          </a:xfrm>
-          <a:prstGeom prst="rect">
-            <a:avLst/>
-          </a:prstGeom>
-          <a:noFill/>
-        </p:spPr>
-        <p:txBody>
-          <a:bodyPr wrap="square">
-            <a:spAutoFit/>
-          </a:bodyPr>
-          <a:lstStyle/>
-          <a:p>
-            <a:pPr algn="l"/>
-            <a:r>
-              <a:rPr sz="1500" b="0" i="0">
-                <a:solidFill>
-                  <a:srgbClr val="0D1B2A"/>
-                </a:solidFill>
-              </a:rPr>
-              <a:t/>
-            </a:r>
-          </a:p>
-        </p:txBody>
-      </p:sp>
-      <p:sp>
-        <p:nvSpPr>
-          <p:cNvPr id="11" name="TextBox 10"/>
-          <p:cNvSpPr txBox="1"/>
-          <p:nvPr/>
-        </p:nvSpPr>
-        <p:spPr>
-          <a:xfrm>
-            <a:off x="502920" y="4206240"/>
-            <a:ext cx="11155680" cy="384048"/>
-          </a:xfrm>
-          <a:prstGeom prst="rect">
-            <a:avLst/>
-          </a:prstGeom>
-          <a:noFill/>
-        </p:spPr>
-        <p:txBody>
-          <a:bodyPr wrap="square">
-            <a:spAutoFit/>
-          </a:bodyPr>
-          <a:lstStyle/>
-          <a:p>
-            <a:pPr algn="l"/>
-            <a:r>
-              <a:rPr sz="1500" b="0" i="0">
-                <a:solidFill>
-                  <a:srgbClr val="0D1B2A"/>
-                </a:solidFill>
-              </a:rPr>
-              <a:t>Result: ~68 hrs/week of preventable manual work — every single week</a:t>
-            </a:r>
-          </a:p>
-        </p:txBody>
-      </p:sp>
-      <p:sp>
-        <p:nvSpPr>
-          <p:cNvPr id="12" name="Rectangle 11"/>
-          <p:cNvSpPr/>
-          <p:nvPr/>
-        </p:nvSpPr>
-        <p:spPr>
-          <a:xfrm>
-            <a:off x="0" y="6492240"/>
-            <a:ext cx="12188952" cy="365760"/>
-          </a:xfrm>
-          <a:prstGeom prst="rect">
-            <a:avLst/>
-          </a:prstGeom>
-          <a:solidFill>
-            <a:srgbClr val="0D1B2A"/>
-          </a:solidFill>
-          <a:ln>
-            <a:noFill/>
-          </a:ln>
-        </p:spPr>
-        <p:style>
-          <a:lnRef idx="1">
-            <a:schemeClr val="accent1"/>
-          </a:lnRef>
-          <a:fillRef idx="3">
-            <a:schemeClr val="accent1"/>
-          </a:fillRef>
-          <a:effectRef idx="2">
-            <a:schemeClr val="accent1"/>
-          </a:effectRef>
-          <a:fontRef idx="minor">
-            <a:schemeClr val="lt1"/>
-          </a:fontRef>
-        </p:style>
-        <p:txBody>
-          <a:bodyPr rtlCol="0" anchor="ctr"/>
-          <a:lstStyle/>
-          <a:p>
-            <a:pPr algn="ctr"/>
-          </a:p>
-        </p:txBody>
-      </p:sp>
-      <p:sp>
-        <p:nvSpPr>
-          <p:cNvPr id="13" name="TextBox 12"/>
-          <p:cNvSpPr txBox="1"/>
-          <p:nvPr/>
-        </p:nvSpPr>
-        <p:spPr>
-          <a:xfrm>
-            <a:off x="274320" y="6510528"/>
-            <a:ext cx="8229600" cy="274320"/>
-          </a:xfrm>
-          <a:prstGeom prst="rect">
-            <a:avLst/>
-          </a:prstGeom>
-          <a:noFill/>
-        </p:spPr>
-        <p:txBody>
-          <a:bodyPr wrap="square">
-            <a:spAutoFit/>
-          </a:bodyPr>
-          <a:lstStyle/>
-          <a:p>
-            <a:pPr algn="l"/>
-            <a:r>
-              <a:rPr sz="900" b="0" i="0">
-                <a:solidFill>
-                  <a:srgbClr val="647487"/>
-                </a:solidFill>
-              </a:rPr>
-              <a:t>SAGE[ai] — Open Source (Apache 2.0) | github.com/Sumanharapanahalli/sage | March 2026</a:t>
-            </a:r>
-          </a:p>
-        </p:txBody>
-      </p:sp>
-    </p:spTree>
-  </p:cSld>
-  <p:clrMapOvr>
-    <a:masterClrMapping/>
-  </p:clrMapOvr>
-</p:sld>
-</file>
-
-<file path=ppt/slides/slide3.xml><?xml version="1.0" encoding="utf-8"?>
-<p:sld xmlns:a="http://schemas.openxmlformats.org/drawingml/2006/main" xmlns:p="http://schemas.openxmlformats.org/presentationml/2006/main" xmlns:r="http://schemas.openxmlformats.org/officeDocument/2006/relationships">
-  <p:cSld>
-    <p:bg>
-      <p:bgPr>
-        <a:solidFill>
-          <a:srgbClr val="F0F4F8"/>
-        </a:solidFill>
-        <a:effectLst/>
-      </p:bgPr>
-    </p:bg>
-    <p:spTree>
-      <p:nvGrpSpPr>
-        <p:cNvPr id="1" name=""/>
-        <p:cNvGrpSpPr/>
-        <p:nvPr/>
-      </p:nvGrpSpPr>
-      <p:grpSpPr/>
-      <p:sp>
-        <p:nvSpPr>
-          <p:cNvPr id="2" name="Rectangle 1"/>
-          <p:cNvSpPr/>
-          <p:nvPr/>
-        </p:nvSpPr>
-        <p:spPr>
-          <a:xfrm>
-            <a:off x="0" y="0"/>
-            <a:ext cx="12188952" cy="1325880"/>
-          </a:xfrm>
-          <a:prstGeom prst="rect">
-            <a:avLst/>
-          </a:prstGeom>
-          <a:solidFill>
-            <a:srgbClr val="0D1B2A"/>
-          </a:solidFill>
-          <a:ln>
-            <a:noFill/>
-          </a:ln>
-        </p:spPr>
-        <p:style>
-          <a:lnRef idx="1">
-            <a:schemeClr val="accent1"/>
-          </a:lnRef>
-          <a:fillRef idx="3">
-            <a:schemeClr val="accent1"/>
-          </a:fillRef>
-          <a:effectRef idx="2">
-            <a:schemeClr val="accent1"/>
-          </a:effectRef>
-          <a:fontRef idx="minor">
-            <a:schemeClr val="lt1"/>
-          </a:fontRef>
-        </p:style>
-        <p:txBody>
-          <a:bodyPr rtlCol="0" anchor="ctr"/>
-          <a:lstStyle/>
-          <a:p>
-            <a:pPr algn="ctr"/>
-          </a:p>
-        </p:txBody>
-      </p:sp>
-      <p:sp>
-        <p:nvSpPr>
-          <p:cNvPr id="3" name="TextBox 2"/>
-          <p:cNvSpPr txBox="1"/>
-          <p:nvPr/>
-        </p:nvSpPr>
-        <p:spPr>
-          <a:xfrm>
-            <a:off x="411480" y="109728"/>
-            <a:ext cx="11338560" cy="731520"/>
-          </a:xfrm>
-          <a:prstGeom prst="rect">
-            <a:avLst/>
-          </a:prstGeom>
-          <a:noFill/>
-        </p:spPr>
-        <p:txBody>
-          <a:bodyPr wrap="square">
-            <a:spAutoFit/>
-          </a:bodyPr>
-          <a:lstStyle/>
-          <a:p>
-            <a:pPr algn="l"/>
-            <a:r>
-              <a:rPr sz="3000" b="1" i="0">
-                <a:solidFill>
-                  <a:srgbClr val="FFFFFF"/>
-                </a:solidFill>
-              </a:rPr>
-              <a:t>SAGE[ai]: Always-On AI Engineering Partner</a:t>
-            </a:r>
-          </a:p>
-        </p:txBody>
-      </p:sp>
-      <p:sp>
-        <p:nvSpPr>
-          <p:cNvPr id="4" name="TextBox 3"/>
-          <p:cNvSpPr txBox="1"/>
-          <p:nvPr/>
-        </p:nvSpPr>
-        <p:spPr>
-          <a:xfrm>
-            <a:off x="411480" y="804672"/>
-            <a:ext cx="11338560" cy="438912"/>
-          </a:xfrm>
-          <a:prstGeom prst="rect">
-            <a:avLst/>
-          </a:prstGeom>
-          <a:noFill/>
-        </p:spPr>
-        <p:txBody>
-          <a:bodyPr wrap="square">
-            <a:spAutoFit/>
-          </a:bodyPr>
-          <a:lstStyle/>
-          <a:p>
-            <a:pPr algn="l"/>
-            <a:r>
-              <a:rPr sz="1600" b="0" i="0">
-                <a:solidFill>
-                  <a:srgbClr val="00B4D8"/>
-                </a:solidFill>
-              </a:rPr>
-              <a:t>Replace manual toil with autonomous, auditable intelligence</a:t>
-            </a:r>
-          </a:p>
-        </p:txBody>
-      </p:sp>
-      <p:sp>
-        <p:nvSpPr>
-          <p:cNvPr id="5" name="TextBox 4"/>
-          <p:cNvSpPr txBox="1"/>
-          <p:nvPr/>
-        </p:nvSpPr>
-        <p:spPr>
-          <a:xfrm>
-            <a:off x="502920" y="1463040"/>
-            <a:ext cx="11155680" cy="384048"/>
-          </a:xfrm>
-          <a:prstGeom prst="rect">
-            <a:avLst/>
-          </a:prstGeom>
-          <a:noFill/>
-        </p:spPr>
-        <p:txBody>
-          <a:bodyPr wrap="square">
-            <a:spAutoFit/>
-          </a:bodyPr>
-          <a:lstStyle/>
-          <a:p>
-            <a:pPr algn="l"/>
-            <a:r>
-              <a:rPr sz="1500" b="0" i="0">
-                <a:solidFill>
-                  <a:srgbClr val="0D1B2A"/>
-                </a:solidFill>
-              </a:rPr>
-              <a:t>Analyzes error logs in under 60 seconds  (vs 45-60 min manual)</a:t>
-            </a:r>
-          </a:p>
-        </p:txBody>
-      </p:sp>
-      <p:sp>
-        <p:nvSpPr>
-          <p:cNvPr id="6" name="TextBox 5"/>
-          <p:cNvSpPr txBox="1"/>
-          <p:nvPr/>
-        </p:nvSpPr>
-        <p:spPr>
-          <a:xfrm>
-            <a:off x="502920" y="1920240"/>
-            <a:ext cx="11155680" cy="384048"/>
-          </a:xfrm>
-          <a:prstGeom prst="rect">
-            <a:avLst/>
-          </a:prstGeom>
-          <a:noFill/>
-        </p:spPr>
-        <p:txBody>
-          <a:bodyPr wrap="square">
-            <a:spAutoFit/>
-          </a:bodyPr>
-          <a:lstStyle/>
-          <a:p>
-            <a:pPr algn="l"/>
-            <a:r>
-              <a:rPr sz="1500" b="0" i="0">
-                <a:solidFill>
-                  <a:srgbClr val="0D1B2A"/>
-                </a:solidFill>
-              </a:rPr>
-              <a:t>AI code reviews with multi-step ReAct reasoning loop</a:t>
-            </a:r>
-          </a:p>
-        </p:txBody>
-      </p:sp>
-      <p:sp>
-        <p:nvSpPr>
-          <p:cNvPr id="7" name="TextBox 6"/>
-          <p:cNvSpPr txBox="1"/>
-          <p:nvPr/>
-        </p:nvSpPr>
-        <p:spPr>
-          <a:xfrm>
-            <a:off x="502920" y="2377440"/>
-            <a:ext cx="11155680" cy="384048"/>
-          </a:xfrm>
-          <a:prstGeom prst="rect">
-            <a:avLst/>
-          </a:prstGeom>
-          <a:noFill/>
-        </p:spPr>
-        <p:txBody>
-          <a:bodyPr wrap="square">
-            <a:spAutoFit/>
-          </a:bodyPr>
-          <a:lstStyle/>
-          <a:p>
-            <a:pPr algn="l"/>
-            <a:r>
-              <a:rPr sz="1500" b="0" i="0">
-                <a:solidFill>
-                  <a:srgbClr val="0D1B2A"/>
-                </a:solidFill>
-              </a:rPr>
-              <a:t>Monitors Teams, Metabase, GitLab — real-time event detection</a:t>
-            </a:r>
-          </a:p>
-        </p:txBody>
-      </p:sp>
-      <p:sp>
-        <p:nvSpPr>
-          <p:cNvPr id="8" name="TextBox 7"/>
-          <p:cNvSpPr txBox="1"/>
-          <p:nvPr/>
-        </p:nvSpPr>
-        <p:spPr>
-          <a:xfrm>
-            <a:off x="502920" y="2834640"/>
-            <a:ext cx="11155680" cy="384048"/>
-          </a:xfrm>
-          <a:prstGeom prst="rect">
-            <a:avLst/>
-          </a:prstGeom>
-          <a:noFill/>
-        </p:spPr>
-        <p:txBody>
-          <a:bodyPr wrap="square">
-            <a:spAutoFit/>
-          </a:bodyPr>
-          <a:lstStyle/>
-          <a:p>
-            <a:pPr algn="l"/>
-            <a:r>
-              <a:rPr sz="1500" b="0" i="0">
-                <a:solidFill>
-                  <a:srgbClr val="0D1B2A"/>
-                </a:solidFill>
-              </a:rPr>
-              <a:t>Every decision logged to immutable ISO 13485 audit trail</a:t>
-            </a:r>
-          </a:p>
-        </p:txBody>
-      </p:sp>
-      <p:sp>
-        <p:nvSpPr>
-          <p:cNvPr id="9" name="TextBox 8"/>
-          <p:cNvSpPr txBox="1"/>
-          <p:nvPr/>
-        </p:nvSpPr>
-        <p:spPr>
-          <a:xfrm>
-            <a:off x="502920" y="3291840"/>
-            <a:ext cx="11155680" cy="384048"/>
-          </a:xfrm>
-          <a:prstGeom prst="rect">
-            <a:avLst/>
-          </a:prstGeom>
-          <a:noFill/>
-        </p:spPr>
-        <p:txBody>
-          <a:bodyPr wrap="square">
-            <a:spAutoFit/>
-          </a:bodyPr>
-          <a:lstStyle/>
-          <a:p>
-            <a:pPr algn="l"/>
-            <a:r>
-              <a:rPr sz="1500" b="0" i="0">
-                <a:solidFill>
-                  <a:srgbClr val="0D1B2A"/>
-                </a:solidFill>
-              </a:rPr>
-              <a:t>Human-in-the-loop: AI advises, humans decide — always</a:t>
-            </a:r>
-          </a:p>
-        </p:txBody>
-      </p:sp>
-      <p:sp>
-        <p:nvSpPr>
-          <p:cNvPr id="10" name="TextBox 9"/>
-          <p:cNvSpPr txBox="1"/>
-          <p:nvPr/>
-        </p:nvSpPr>
-        <p:spPr>
-          <a:xfrm>
-            <a:off x="502920" y="3749040"/>
-            <a:ext cx="11155680" cy="384048"/>
-          </a:xfrm>
-          <a:prstGeom prst="rect">
-            <a:avLst/>
-          </a:prstGeom>
-          <a:noFill/>
-        </p:spPr>
-        <p:txBody>
-          <a:bodyPr wrap="square">
-            <a:spAutoFit/>
-          </a:bodyPr>
-          <a:lstStyle/>
-          <a:p>
-            <a:pPr algn="l"/>
-            <a:r>
-              <a:rPr sz="1500" b="0" i="0">
-                <a:solidFill>
-                  <a:srgbClr val="0D1B2A"/>
-                </a:solidFill>
-              </a:rPr>
-              <a:t>Learns from every correction via vector memory (RAG)</a:t>
-            </a:r>
-          </a:p>
-        </p:txBody>
-      </p:sp>
-      <p:sp>
-        <p:nvSpPr>
-          <p:cNvPr id="11" name="TextBox 10"/>
-          <p:cNvSpPr txBox="1"/>
-          <p:nvPr/>
-        </p:nvSpPr>
-        <p:spPr>
-          <a:xfrm>
-            <a:off x="502920" y="4206240"/>
-            <a:ext cx="11155680" cy="384048"/>
-          </a:xfrm>
-          <a:prstGeom prst="rect">
-            <a:avLst/>
-          </a:prstGeom>
-          <a:noFill/>
-        </p:spPr>
-        <p:txBody>
-          <a:bodyPr wrap="square">
-            <a:spAutoFit/>
-          </a:bodyPr>
-          <a:lstStyle/>
-          <a:p>
-            <a:pPr algn="l"/>
-            <a:r>
-              <a:rPr sz="1500" b="0" i="0">
-                <a:solidFill>
-                  <a:srgbClr val="0D1B2A"/>
-                </a:solidFill>
-              </a:rPr>
-              <a:t>Web dashboard for all stakeholders — zero CLI required</a:t>
-            </a:r>
-          </a:p>
-        </p:txBody>
-      </p:sp>
-      <p:sp>
-        <p:nvSpPr>
-          <p:cNvPr id="12" name="Rectangle 11"/>
-          <p:cNvSpPr/>
-          <p:nvPr/>
-        </p:nvSpPr>
-        <p:spPr>
-          <a:xfrm>
-            <a:off x="0" y="6492240"/>
-            <a:ext cx="12188952" cy="365760"/>
-          </a:xfrm>
-          <a:prstGeom prst="rect">
-            <a:avLst/>
-          </a:prstGeom>
-          <a:solidFill>
-            <a:srgbClr val="0D1B2A"/>
-          </a:solidFill>
-          <a:ln>
-            <a:noFill/>
-          </a:ln>
-        </p:spPr>
-        <p:style>
-          <a:lnRef idx="1">
-            <a:schemeClr val="accent1"/>
-          </a:lnRef>
-          <a:fillRef idx="3">
-            <a:schemeClr val="accent1"/>
-          </a:fillRef>
-          <a:effectRef idx="2">
-            <a:schemeClr val="accent1"/>
-          </a:effectRef>
-          <a:fontRef idx="minor">
-            <a:schemeClr val="lt1"/>
-          </a:fontRef>
-        </p:style>
-        <p:txBody>
-          <a:bodyPr rtlCol="0" anchor="ctr"/>
-          <a:lstStyle/>
-          <a:p>
-            <a:pPr algn="ctr"/>
-          </a:p>
-        </p:txBody>
-      </p:sp>
-      <p:sp>
-        <p:nvSpPr>
-          <p:cNvPr id="13" name="TextBox 12"/>
-          <p:cNvSpPr txBox="1"/>
-          <p:nvPr/>
-        </p:nvSpPr>
-        <p:spPr>
-          <a:xfrm>
-            <a:off x="274320" y="6510528"/>
-            <a:ext cx="8229600" cy="274320"/>
-          </a:xfrm>
-          <a:prstGeom prst="rect">
-            <a:avLst/>
-          </a:prstGeom>
-          <a:noFill/>
-        </p:spPr>
-        <p:txBody>
-          <a:bodyPr wrap="square">
-            <a:spAutoFit/>
-          </a:bodyPr>
-          <a:lstStyle/>
-          <a:p>
-            <a:pPr algn="l"/>
-            <a:r>
-              <a:rPr sz="900" b="0" i="0">
-                <a:solidFill>
-                  <a:srgbClr val="647487"/>
-                </a:solidFill>
-              </a:rPr>
-              <a:t>SAGE[ai] — Open Source (Apache 2.0) | github.com/Sumanharapanahalli/sage | March 2026</a:t>
-            </a:r>
-          </a:p>
-        </p:txBody>
-      </p:sp>
-    </p:spTree>
-  </p:cSld>
-  <p:clrMapOvr>
-    <a:masterClrMapping/>
-  </p:clrMapOvr>
-</p:sld>
-</file>
-
-<file path=ppt/slides/slide4.xml><?xml version="1.0" encoding="utf-8"?>
-<p:sld xmlns:a="http://schemas.openxmlformats.org/drawingml/2006/main" xmlns:p="http://schemas.openxmlformats.org/presentationml/2006/main" xmlns:r="http://schemas.openxmlformats.org/officeDocument/2006/relationships">
-  <p:cSld>
-    <p:bg>
-      <p:bgPr>
-        <a:solidFill>
-          <a:srgbClr val="F0F4F8"/>
-        </a:solidFill>
-        <a:effectLst/>
-      </p:bgPr>
-    </p:bg>
-    <p:spTree>
-      <p:nvGrpSpPr>
-        <p:cNvPr id="1" name=""/>
-        <p:cNvGrpSpPr/>
-        <p:nvPr/>
-      </p:nvGrpSpPr>
-      <p:grpSpPr/>
-      <p:sp>
-        <p:nvSpPr>
-          <p:cNvPr id="2" name="Rectangle 1"/>
-          <p:cNvSpPr/>
-          <p:nvPr/>
-        </p:nvSpPr>
-        <p:spPr>
-          <a:xfrm>
-            <a:off x="0" y="0"/>
-            <a:ext cx="12188952" cy="1325880"/>
-          </a:xfrm>
-          <a:prstGeom prst="rect">
-            <a:avLst/>
-          </a:prstGeom>
-          <a:solidFill>
-            <a:srgbClr val="0D1B2A"/>
-          </a:solidFill>
-          <a:ln>
-            <a:noFill/>
-          </a:ln>
-        </p:spPr>
-        <p:style>
-          <a:lnRef idx="1">
-            <a:schemeClr val="accent1"/>
-          </a:lnRef>
-          <a:fillRef idx="3">
-            <a:schemeClr val="accent1"/>
-          </a:fillRef>
-          <a:effectRef idx="2">
-            <a:schemeClr val="accent1"/>
-          </a:effectRef>
-          <a:fontRef idx="minor">
-            <a:schemeClr val="lt1"/>
-          </a:fontRef>
-        </p:style>
-        <p:txBody>
-          <a:bodyPr rtlCol="0" anchor="ctr"/>
-          <a:lstStyle/>
-          <a:p>
-            <a:pPr algn="ctr"/>
-          </a:p>
-        </p:txBody>
-      </p:sp>
-      <p:sp>
-        <p:nvSpPr>
-          <p:cNvPr id="3" name="TextBox 2"/>
-          <p:cNvSpPr txBox="1"/>
-          <p:nvPr/>
-        </p:nvSpPr>
-        <p:spPr>
-          <a:xfrm>
-            <a:off x="411480" y="109728"/>
-            <a:ext cx="11338560" cy="731520"/>
-          </a:xfrm>
-          <a:prstGeom prst="rect">
-            <a:avLst/>
-          </a:prstGeom>
-          <a:noFill/>
-        </p:spPr>
-        <p:txBody>
-          <a:bodyPr wrap="square">
-            <a:spAutoFit/>
-          </a:bodyPr>
-          <a:lstStyle/>
-          <a:p>
-            <a:pPr algn="l"/>
-            <a:r>
-              <a:rPr sz="3000" b="1" i="0">
-                <a:solidFill>
-                  <a:srgbClr val="FFFFFF"/>
-                </a:solidFill>
-              </a:rPr>
-              <a:t>Companies Already Winning with Agentic AI</a:t>
-            </a:r>
-          </a:p>
-        </p:txBody>
-      </p:sp>
-      <p:sp>
-        <p:nvSpPr>
-          <p:cNvPr id="4" name="TextBox 3"/>
-          <p:cNvSpPr txBox="1"/>
-          <p:nvPr/>
-        </p:nvSpPr>
-        <p:spPr>
-          <a:xfrm>
-            <a:off x="411480" y="804672"/>
-            <a:ext cx="11338560" cy="438912"/>
-          </a:xfrm>
-          <a:prstGeom prst="rect">
-            <a:avLst/>
-          </a:prstGeom>
-          <a:noFill/>
-        </p:spPr>
-        <p:txBody>
-          <a:bodyPr wrap="square">
-            <a:spAutoFit/>
-          </a:bodyPr>
-          <a:lstStyle/>
-          <a:p>
-            <a:pPr algn="l"/>
-            <a:r>
-              <a:rPr sz="1600" b="0" i="0">
-                <a:solidFill>
-                  <a:srgbClr val="00B4D8"/>
+                  <a:srgbClr val="047857"/>
                 </a:solidFill>
               </a:rPr>
               <a:t>Validated industry outcomes — this is the direction of travel</a:t>
@@ -7582,7 +7000,7 @@
                   </a:txBody>
                   <a:tcPr>
                     <a:solidFill>
-                      <a:srgbClr val="0078D4"/>
+                      <a:srgbClr val="10B981"/>
                     </a:solidFill>
                   </a:tcPr>
                 </a:tc>
@@ -7604,7 +7022,7 @@
                   </a:txBody>
                   <a:tcPr>
                     <a:solidFill>
-                      <a:srgbClr val="0078D4"/>
+                      <a:srgbClr val="10B981"/>
                     </a:solidFill>
                   </a:tcPr>
                 </a:tc>
@@ -7626,7 +7044,7 @@
                   </a:txBody>
                   <a:tcPr>
                     <a:solidFill>
-                      <a:srgbClr val="0078D4"/>
+                      <a:srgbClr val="10B981"/>
                     </a:solidFill>
                   </a:tcPr>
                 </a:tc>
@@ -7641,7 +7059,7 @@
                       <a:r>
                         <a:rPr sz="1200">
                           <a:solidFill>
-                            <a:srgbClr val="0D1B2A"/>
+                            <a:srgbClr val="1F2A37"/>
                           </a:solidFill>
                         </a:rPr>
                         <a:t>Siemens</a:t>
@@ -7650,7 +7068,7 @@
                   </a:txBody>
                   <a:tcPr>
                     <a:solidFill>
-                      <a:srgbClr val="F0F4F8"/>
+                      <a:srgbClr val="FAFAFA"/>
                     </a:solidFill>
                   </a:tcPr>
                 </a:tc>
@@ -7663,7 +7081,7 @@
                       <a:r>
                         <a:rPr sz="1200">
                           <a:solidFill>
-                            <a:srgbClr val="0D1B2A"/>
+                            <a:srgbClr val="1F2A37"/>
                           </a:solidFill>
                         </a:rPr>
                         <a:t>AI predictive maintenance agents</a:t>
@@ -7672,7 +7090,7 @@
                   </a:txBody>
                   <a:tcPr>
                     <a:solidFill>
-                      <a:srgbClr val="F0F4F8"/>
+                      <a:srgbClr val="FAFAFA"/>
                     </a:solidFill>
                   </a:tcPr>
                 </a:tc>
@@ -7685,7 +7103,7 @@
                       <a:r>
                         <a:rPr sz="1200">
                           <a:solidFill>
-                            <a:srgbClr val="0D1B2A"/>
+                            <a:srgbClr val="1F2A37"/>
                           </a:solidFill>
                         </a:rPr>
                         <a:t>30% less unplanned downtime, €1.5B saved/yr</a:t>
@@ -7694,7 +7112,7 @@
                   </a:txBody>
                   <a:tcPr>
                     <a:solidFill>
-                      <a:srgbClr val="F0F4F8"/>
+                      <a:srgbClr val="FAFAFA"/>
                     </a:solidFill>
                   </a:tcPr>
                 </a:tc>
@@ -7709,7 +7127,7 @@
                       <a:r>
                         <a:rPr sz="1200">
                           <a:solidFill>
-                            <a:srgbClr val="0D1B2A"/>
+                            <a:srgbClr val="1F2A37"/>
                           </a:solidFill>
                         </a:rPr>
                         <a:t>BMW</a:t>
@@ -7731,7 +7149,7 @@
                       <a:r>
                         <a:rPr sz="1200">
                           <a:solidFill>
-                            <a:srgbClr val="0D1B2A"/>
+                            <a:srgbClr val="1F2A37"/>
                           </a:solidFill>
                         </a:rPr>
                         <a:t>AI quality inspection</a:t>
@@ -7753,7 +7171,7 @@
                       <a:r>
                         <a:rPr sz="1200">
                           <a:solidFill>
-                            <a:srgbClr val="0D1B2A"/>
+                            <a:srgbClr val="1F2A37"/>
                           </a:solidFill>
                         </a:rPr>
                         <a:t>99.5% defect detection, 30% QC cost reduction</a:t>
@@ -7777,7 +7195,7 @@
                       <a:r>
                         <a:rPr sz="1200">
                           <a:solidFill>
-                            <a:srgbClr val="0D1B2A"/>
+                            <a:srgbClr val="1F2A37"/>
                           </a:solidFill>
                         </a:rPr>
                         <a:t>Bosch</a:t>
@@ -7786,7 +7204,7 @@
                   </a:txBody>
                   <a:tcPr>
                     <a:solidFill>
-                      <a:srgbClr val="F0F4F8"/>
+                      <a:srgbClr val="FAFAFA"/>
                     </a:solidFill>
                   </a:tcPr>
                 </a:tc>
@@ -7799,7 +7217,7 @@
                       <a:r>
                         <a:rPr sz="1200">
                           <a:solidFill>
-                            <a:srgbClr val="0D1B2A"/>
+                            <a:srgbClr val="1F2A37"/>
                           </a:solidFill>
                         </a:rPr>
                         <a:t>AI-assisted code review</a:t>
@@ -7808,7 +7226,7 @@
                   </a:txBody>
                   <a:tcPr>
                     <a:solidFill>
-                      <a:srgbClr val="F0F4F8"/>
+                      <a:srgbClr val="FAFAFA"/>
                     </a:solidFill>
                   </a:tcPr>
                 </a:tc>
@@ -7821,7 +7239,7 @@
                       <a:r>
                         <a:rPr sz="1200">
                           <a:solidFill>
-                            <a:srgbClr val="0D1B2A"/>
+                            <a:srgbClr val="1F2A37"/>
                           </a:solidFill>
                         </a:rPr>
                         <a:t>40% faster releases, 60% fewer defect escapes</a:t>
@@ -7830,7 +7248,7 @@
                   </a:txBody>
                   <a:tcPr>
                     <a:solidFill>
-                      <a:srgbClr val="F0F4F8"/>
+                      <a:srgbClr val="FAFAFA"/>
                     </a:solidFill>
                   </a:tcPr>
                 </a:tc>
@@ -7845,7 +7263,7 @@
                       <a:r>
                         <a:rPr sz="1200">
                           <a:solidFill>
-                            <a:srgbClr val="0D1B2A"/>
+                            <a:srgbClr val="1F2A37"/>
                           </a:solidFill>
                         </a:rPr>
                         <a:t>Amazon</a:t>
@@ -7867,7 +7285,7 @@
                       <a:r>
                         <a:rPr sz="1200">
                           <a:solidFill>
-                            <a:srgbClr val="0D1B2A"/>
+                            <a:srgbClr val="1F2A37"/>
                           </a:solidFill>
                         </a:rPr>
                         <a:t>CodeGuru automated review</a:t>
@@ -7889,7 +7307,7 @@
                       <a:r>
                         <a:rPr sz="1200">
                           <a:solidFill>
-                            <a:srgbClr val="0D1B2A"/>
+                            <a:srgbClr val="1F2A37"/>
                           </a:solidFill>
                         </a:rPr>
                         <a:t>50% reduction in production incidents</a:t>
@@ -7913,7 +7331,7 @@
                       <a:r>
                         <a:rPr sz="1200">
                           <a:solidFill>
-                            <a:srgbClr val="0D1B2A"/>
+                            <a:srgbClr val="1F2A37"/>
                           </a:solidFill>
                         </a:rPr>
                         <a:t>Microsoft</a:t>
@@ -7922,7 +7340,7 @@
                   </a:txBody>
                   <a:tcPr>
                     <a:solidFill>
-                      <a:srgbClr val="F0F4F8"/>
+                      <a:srgbClr val="FAFAFA"/>
                     </a:solidFill>
                   </a:tcPr>
                 </a:tc>
@@ -7935,7 +7353,7 @@
                       <a:r>
                         <a:rPr sz="1200">
                           <a:solidFill>
-                            <a:srgbClr val="0D1B2A"/>
+                            <a:srgbClr val="1F2A37"/>
                           </a:solidFill>
                         </a:rPr>
                         <a:t>GitHub Copilot</a:t>
@@ -7944,7 +7362,7 @@
                   </a:txBody>
                   <a:tcPr>
                     <a:solidFill>
-                      <a:srgbClr val="F0F4F8"/>
+                      <a:srgbClr val="FAFAFA"/>
                     </a:solidFill>
                   </a:tcPr>
                 </a:tc>
@@ -7957,7 +7375,7 @@
                       <a:r>
                         <a:rPr sz="1200">
                           <a:solidFill>
-                            <a:srgbClr val="0D1B2A"/>
+                            <a:srgbClr val="1F2A37"/>
                           </a:solidFill>
                         </a:rPr>
                         <a:t>55% faster code completion, 46% more PRs merged/day</a:t>
@@ -7966,7 +7384,7 @@
                   </a:txBody>
                   <a:tcPr>
                     <a:solidFill>
-                      <a:srgbClr val="F0F4F8"/>
+                      <a:srgbClr val="FAFAFA"/>
                     </a:solidFill>
                   </a:tcPr>
                 </a:tc>
@@ -7981,7 +7399,7 @@
                       <a:r>
                         <a:rPr sz="1200">
                           <a:solidFill>
-                            <a:srgbClr val="0D1B2A"/>
+                            <a:srgbClr val="1F2A37"/>
                           </a:solidFill>
                         </a:rPr>
                         <a:t>Medtronic</a:t>
@@ -8003,7 +7421,7 @@
                       <a:r>
                         <a:rPr sz="1200">
                           <a:solidFill>
-                            <a:srgbClr val="0D1B2A"/>
+                            <a:srgbClr val="1F2A37"/>
                           </a:solidFill>
                         </a:rPr>
                         <a:t>AI in quality management</a:t>
@@ -8025,7 +7443,7 @@
                       <a:r>
                         <a:rPr sz="1200">
                           <a:solidFill>
-                            <a:srgbClr val="0D1B2A"/>
+                            <a:srgbClr val="1F2A37"/>
                           </a:solidFill>
                         </a:rPr>
                         <a:t>35% shorter CAPA cycle, faster FDA submissions</a:t>
@@ -8049,7 +7467,7 @@
                       <a:r>
                         <a:rPr sz="1200">
                           <a:solidFill>
-                            <a:srgbClr val="0D1B2A"/>
+                            <a:srgbClr val="1F2A37"/>
                           </a:solidFill>
                         </a:rPr>
                         <a:t>Stryker</a:t>
@@ -8058,7 +7476,7 @@
                   </a:txBody>
                   <a:tcPr>
                     <a:solidFill>
-                      <a:srgbClr val="F0F4F8"/>
+                      <a:srgbClr val="FAFAFA"/>
                     </a:solidFill>
                   </a:tcPr>
                 </a:tc>
@@ -8071,7 +7489,7 @@
                       <a:r>
                         <a:rPr sz="1200">
                           <a:solidFill>
-                            <a:srgbClr val="0D1B2A"/>
+                            <a:srgbClr val="1F2A37"/>
                           </a:solidFill>
                         </a:rPr>
                         <a:t>AI regulatory documentation</a:t>
@@ -8080,7 +7498,7 @@
                   </a:txBody>
                   <a:tcPr>
                     <a:solidFill>
-                      <a:srgbClr val="F0F4F8"/>
+                      <a:srgbClr val="FAFAFA"/>
                     </a:solidFill>
                   </a:tcPr>
                 </a:tc>
@@ -8093,7 +7511,7 @@
                       <a:r>
                         <a:rPr sz="1200">
                           <a:solidFill>
-                            <a:srgbClr val="0D1B2A"/>
+                            <a:srgbClr val="1F2A37"/>
                           </a:solidFill>
                         </a:rPr>
                         <a:t>40% reduction in submission preparation time</a:t>
@@ -8102,7 +7520,7 @@
                   </a:txBody>
                   <a:tcPr>
                     <a:solidFill>
-                      <a:srgbClr val="F0F4F8"/>
+                      <a:srgbClr val="FAFAFA"/>
                     </a:solidFill>
                   </a:tcPr>
                 </a:tc>
@@ -8117,7 +7535,7 @@
                       <a:r>
                         <a:rPr sz="1200">
                           <a:solidFill>
-                            <a:srgbClr val="0D1B2A"/>
+                            <a:srgbClr val="1F2A37"/>
                           </a:solidFill>
                         </a:rPr>
                         <a:t>J&amp;J</a:t>
@@ -8139,7 +7557,7 @@
                       <a:r>
                         <a:rPr sz="1200">
                           <a:solidFill>
-                            <a:srgbClr val="0D1B2A"/>
+                            <a:srgbClr val="1F2A37"/>
                           </a:solidFill>
                         </a:rPr>
                         <a:t>AI manufacturing analytics</a:t>
@@ -8161,7 +7579,7 @@
                       <a:r>
                         <a:rPr sz="1200">
                           <a:solidFill>
-                            <a:srgbClr val="0D1B2A"/>
+                            <a:srgbClr val="1F2A37"/>
                           </a:solidFill>
                         </a:rPr>
                         <a:t>20% yield improvement, significant waste reduction</a:t>
@@ -8205,7 +7623,7 @@
             <a:r>
               <a:rPr sz="1100" b="0" i="1">
                 <a:solidFill>
-                  <a:srgbClr val="647487"/>
+                  <a:srgbClr val="4B5563"/>
                 </a:solidFill>
               </a:rPr>
               <a:t>Sources: company annual reports, press releases, and published case studies (2023–2025).</a:t>
@@ -8228,7 +7646,7 @@
             <a:avLst/>
           </a:prstGeom>
           <a:solidFill>
-            <a:srgbClr val="0D1B2A"/>
+            <a:srgbClr val="1F2A37"/>
           </a:solidFill>
           <a:ln>
             <a:noFill/>
@@ -8282,10 +7700,10 @@
             <a:r>
               <a:rPr sz="900" b="0" i="0">
                 <a:solidFill>
-                  <a:srgbClr val="647487"/>
+                  <a:srgbClr val="4B5563"/>
                 </a:solidFill>
               </a:rPr>
-              <a:t>SAGE[ai] — Open Source (Apache 2.0) | github.com/Sumanharapanahalli/sage | March 2026</a:t>
+              <a:t>SAGE[ai] — Open Source (MIT) | github.com/Sumanharapanahalli/sage | March 2026</a:t>
             </a:r>
           </a:p>
         </p:txBody>
@@ -8304,7 +7722,7 @@
     <p:bg>
       <p:bgPr>
         <a:solidFill>
-          <a:srgbClr val="F0F4F8"/>
+          <a:srgbClr val="FAFAFA"/>
         </a:solidFill>
         <a:effectLst/>
       </p:bgPr>
@@ -8331,7 +7749,7 @@
             <a:avLst/>
           </a:prstGeom>
           <a:solidFill>
-            <a:srgbClr val="0D1B2A"/>
+            <a:srgbClr val="1F2A37"/>
           </a:solidFill>
           <a:ln>
             <a:noFill/>
@@ -8419,7 +7837,7 @@
             <a:r>
               <a:rPr sz="1600" b="0" i="0">
                 <a:solidFill>
-                  <a:srgbClr val="00B4D8"/>
+                  <a:srgbClr val="047857"/>
                 </a:solidFill>
               </a:rPr>
               <a:t>Lean development + agentic AI — the natural pairing</a:t>
@@ -8468,7 +7886,7 @@
                   </a:txBody>
                   <a:tcPr>
                     <a:solidFill>
-                      <a:srgbClr val="0078D4"/>
+                      <a:srgbClr val="10B981"/>
                     </a:solidFill>
                   </a:tcPr>
                 </a:tc>
@@ -8490,7 +7908,7 @@
                   </a:txBody>
                   <a:tcPr>
                     <a:solidFill>
-                      <a:srgbClr val="0078D4"/>
+                      <a:srgbClr val="10B981"/>
                     </a:solidFill>
                   </a:tcPr>
                 </a:tc>
@@ -8505,7 +7923,7 @@
                       <a:r>
                         <a:rPr sz="1200">
                           <a:solidFill>
-                            <a:srgbClr val="0D1B2A"/>
+                            <a:srgbClr val="1F2A37"/>
                           </a:solidFill>
                         </a:rPr>
                         <a:t>Eliminate Waste (Muda)</a:t>
@@ -8514,7 +7932,7 @@
                   </a:txBody>
                   <a:tcPr>
                     <a:solidFill>
-                      <a:srgbClr val="F0F4F8"/>
+                      <a:srgbClr val="FAFAFA"/>
                     </a:solidFill>
                   </a:tcPr>
                 </a:tc>
@@ -8527,7 +7945,7 @@
                       <a:r>
                         <a:rPr sz="1200">
                           <a:solidFill>
-                            <a:srgbClr val="0D1B2A"/>
+                            <a:srgbClr val="1F2A37"/>
                           </a:solidFill>
                         </a:rPr>
                         <a:t>Removes 60+ hrs/week of repetitive analysis</a:t>
@@ -8536,7 +7954,7 @@
                   </a:txBody>
                   <a:tcPr>
                     <a:solidFill>
-                      <a:srgbClr val="F0F4F8"/>
+                      <a:srgbClr val="FAFAFA"/>
                     </a:solidFill>
                   </a:tcPr>
                 </a:tc>
@@ -8551,7 +7969,7 @@
                       <a:r>
                         <a:rPr sz="1200">
                           <a:solidFill>
-                            <a:srgbClr val="0D1B2A"/>
+                            <a:srgbClr val="1F2A37"/>
                           </a:solidFill>
                         </a:rPr>
                         <a:t>Continuous Improvement (Kaizen)</a:t>
@@ -8573,7 +7991,7 @@
                       <a:r>
                         <a:rPr sz="1200">
                           <a:solidFill>
-                            <a:srgbClr val="0D1B2A"/>
+                            <a:srgbClr val="1F2A37"/>
                           </a:solidFill>
                         </a:rPr>
                         <a:t>Learns from every rejection via RAG memory</a:t>
@@ -8597,7 +8015,7 @@
                       <a:r>
                         <a:rPr sz="1200">
                           <a:solidFill>
-                            <a:srgbClr val="0D1B2A"/>
+                            <a:srgbClr val="1F2A37"/>
                           </a:solidFill>
                         </a:rPr>
                         <a:t>Error-Proofing (Poka-yoke)</a:t>
@@ -8606,7 +8024,7 @@
                   </a:txBody>
                   <a:tcPr>
                     <a:solidFill>
-                      <a:srgbClr val="F0F4F8"/>
+                      <a:srgbClr val="FAFAFA"/>
                     </a:solidFill>
                   </a:tcPr>
                 </a:tc>
@@ -8619,7 +8037,7 @@
                       <a:r>
                         <a:rPr sz="1200">
                           <a:solidFill>
-                            <a:srgbClr val="0D1B2A"/>
+                            <a:srgbClr val="1F2A37"/>
                           </a:solidFill>
                         </a:rPr>
                         <a:t>Human-in-the-loop prevents AI errors reaching production</a:t>
@@ -8628,7 +8046,7 @@
                   </a:txBody>
                   <a:tcPr>
                     <a:solidFill>
-                      <a:srgbClr val="F0F4F8"/>
+                      <a:srgbClr val="FAFAFA"/>
                     </a:solidFill>
                   </a:tcPr>
                 </a:tc>
@@ -8643,7 +8061,7 @@
                       <a:r>
                         <a:rPr sz="1200">
                           <a:solidFill>
-                            <a:srgbClr val="0D1B2A"/>
+                            <a:srgbClr val="1F2A37"/>
                           </a:solidFill>
                         </a:rPr>
                         <a:t>Visual Management</a:t>
@@ -8665,7 +8083,7 @@
                       <a:r>
                         <a:rPr sz="1200">
                           <a:solidFill>
-                            <a:srgbClr val="0D1B2A"/>
+                            <a:srgbClr val="1F2A37"/>
                           </a:solidFill>
                         </a:rPr>
                         <a:t>Real-time dashboard for all stakeholders</a:t>
@@ -8689,7 +8107,7 @@
                       <a:r>
                         <a:rPr sz="1200">
                           <a:solidFill>
-                            <a:srgbClr val="0D1B2A"/>
+                            <a:srgbClr val="1F2A37"/>
                           </a:solidFill>
                         </a:rPr>
                         <a:t>Single Piece Flow</a:t>
@@ -8698,7 +8116,7 @@
                   </a:txBody>
                   <a:tcPr>
                     <a:solidFill>
-                      <a:srgbClr val="F0F4F8"/>
+                      <a:srgbClr val="FAFAFA"/>
                     </a:solidFill>
                   </a:tcPr>
                 </a:tc>
@@ -8711,7 +8129,7 @@
                       <a:r>
                         <a:rPr sz="1200">
                           <a:solidFill>
-                            <a:srgbClr val="0D1B2A"/>
+                            <a:srgbClr val="1F2A37"/>
                           </a:solidFill>
                         </a:rPr>
                         <a:t>Single-lane task queue: deterministic, auditable</a:t>
@@ -8720,7 +8138,7 @@
                   </a:txBody>
                   <a:tcPr>
                     <a:solidFill>
-                      <a:srgbClr val="F0F4F8"/>
+                      <a:srgbClr val="FAFAFA"/>
                     </a:solidFill>
                   </a:tcPr>
                 </a:tc>
@@ -8735,7 +8153,7 @@
                       <a:r>
                         <a:rPr sz="1200">
                           <a:solidFill>
-                            <a:srgbClr val="0D1B2A"/>
+                            <a:srgbClr val="1F2A37"/>
                           </a:solidFill>
                         </a:rPr>
                         <a:t>Respect for People</a:t>
@@ -8757,7 +8175,7 @@
                       <a:r>
                         <a:rPr sz="1200">
                           <a:solidFill>
-                            <a:srgbClr val="0D1B2A"/>
+                            <a:srgbClr val="1F2A37"/>
                           </a:solidFill>
                         </a:rPr>
                         <a:t>Amplifies engineers; never replaces human judgment</a:t>
@@ -8790,7 +8208,7 @@
             <a:avLst/>
           </a:prstGeom>
           <a:solidFill>
-            <a:srgbClr val="0D1B2A"/>
+            <a:srgbClr val="1F2A37"/>
           </a:solidFill>
           <a:ln>
             <a:noFill/>
@@ -8844,10 +8262,10 @@
             <a:r>
               <a:rPr sz="900" b="0" i="0">
                 <a:solidFill>
-                  <a:srgbClr val="647487"/>
+                  <a:srgbClr val="4B5563"/>
                 </a:solidFill>
               </a:rPr>
-              <a:t>SAGE[ai] — Open Source (Apache 2.0) | github.com/Sumanharapanahalli/sage | March 2026</a:t>
+              <a:t>SAGE[ai] — Open Source (MIT) | github.com/Sumanharapanahalli/sage | March 2026</a:t>
             </a:r>
           </a:p>
         </p:txBody>
@@ -8866,7 +8284,7 @@
     <p:bg>
       <p:bgPr>
         <a:solidFill>
-          <a:srgbClr val="F0F4F8"/>
+          <a:srgbClr val="FAFAFA"/>
         </a:solidFill>
         <a:effectLst/>
       </p:bgPr>
@@ -8893,7 +8311,7 @@
             <a:avLst/>
           </a:prstGeom>
           <a:solidFill>
-            <a:srgbClr val="0D1B2A"/>
+            <a:srgbClr val="1F2A37"/>
           </a:solidFill>
           <a:ln>
             <a:noFill/>
@@ -8981,7 +8399,7 @@
             <a:r>
               <a:rPr sz="1600" b="0" i="0">
                 <a:solidFill>
-                  <a:srgbClr val="00B4D8"/>
+                  <a:srgbClr val="047857"/>
                 </a:solidFill>
               </a:rPr>
               <a:t>Conservative baseline — replace with your actual measured numbers</a:t>
@@ -9032,7 +8450,7 @@
                   </a:txBody>
                   <a:tcPr>
                     <a:solidFill>
-                      <a:srgbClr val="0078D4"/>
+                      <a:srgbClr val="10B981"/>
                     </a:solidFill>
                   </a:tcPr>
                 </a:tc>
@@ -9054,7 +8472,7 @@
                   </a:txBody>
                   <a:tcPr>
                     <a:solidFill>
-                      <a:srgbClr val="0078D4"/>
+                      <a:srgbClr val="10B981"/>
                     </a:solidFill>
                   </a:tcPr>
                 </a:tc>
@@ -9076,7 +8494,7 @@
                   </a:txBody>
                   <a:tcPr>
                     <a:solidFill>
-                      <a:srgbClr val="0078D4"/>
+                      <a:srgbClr val="10B981"/>
                     </a:solidFill>
                   </a:tcPr>
                 </a:tc>
@@ -9098,7 +8516,7 @@
                   </a:txBody>
                   <a:tcPr>
                     <a:solidFill>
-                      <a:srgbClr val="0078D4"/>
+                      <a:srgbClr val="10B981"/>
                     </a:solidFill>
                   </a:tcPr>
                 </a:tc>
@@ -9113,7 +8531,7 @@
                       <a:r>
                         <a:rPr sz="1200">
                           <a:solidFill>
-                            <a:srgbClr val="0D1B2A"/>
+                            <a:srgbClr val="1F2A37"/>
                           </a:solidFill>
                         </a:rPr>
                         <a:t>Error log analysis</a:t>
@@ -9122,7 +8540,7 @@
                   </a:txBody>
                   <a:tcPr>
                     <a:solidFill>
-                      <a:srgbClr val="F0F4F8"/>
+                      <a:srgbClr val="FAFAFA"/>
                     </a:solidFill>
                   </a:tcPr>
                 </a:tc>
@@ -9135,7 +8553,7 @@
                       <a:r>
                         <a:rPr sz="1200">
                           <a:solidFill>
-                            <a:srgbClr val="0D1B2A"/>
+                            <a:srgbClr val="1F2A37"/>
                           </a:solidFill>
                         </a:rPr>
                         <a:t>45 min × 10/day × 2 eng = 15 hrs/day</a:t>
@@ -9144,7 +8562,7 @@
                   </a:txBody>
                   <a:tcPr>
                     <a:solidFill>
-                      <a:srgbClr val="F0F4F8"/>
+                      <a:srgbClr val="FAFAFA"/>
                     </a:solidFill>
                   </a:tcPr>
                 </a:tc>
@@ -9157,7 +8575,7 @@
                       <a:r>
                         <a:rPr sz="1200">
                           <a:solidFill>
-                            <a:srgbClr val="0D1B2A"/>
+                            <a:srgbClr val="1F2A37"/>
                           </a:solidFill>
                         </a:rPr>
                         <a:t>&lt; 5 min total</a:t>
@@ -9166,7 +8584,7 @@
                   </a:txBody>
                   <a:tcPr>
                     <a:solidFill>
-                      <a:srgbClr val="F0F4F8"/>
+                      <a:srgbClr val="FAFAFA"/>
                     </a:solidFill>
                   </a:tcPr>
                 </a:tc>
@@ -9179,7 +8597,7 @@
                       <a:r>
                         <a:rPr sz="1200">
                           <a:solidFill>
-                            <a:srgbClr val="0D1B2A"/>
+                            <a:srgbClr val="1F2A37"/>
                           </a:solidFill>
                         </a:rPr>
                         <a:t>~93% reduction</a:t>
@@ -9188,7 +8606,7 @@
                   </a:txBody>
                   <a:tcPr>
                     <a:solidFill>
-                      <a:srgbClr val="F0F4F8"/>
+                      <a:srgbClr val="FAFAFA"/>
                     </a:solidFill>
                   </a:tcPr>
                 </a:tc>
@@ -9203,7 +8621,7 @@
                       <a:r>
                         <a:rPr sz="1200">
                           <a:solidFill>
-                            <a:srgbClr val="0D1B2A"/>
+                            <a:srgbClr val="1F2A37"/>
                           </a:solidFill>
                         </a:rPr>
                         <a:t>MR code review</a:t>
@@ -9225,7 +8643,7 @@
                       <a:r>
                         <a:rPr sz="1200">
                           <a:solidFill>
-                            <a:srgbClr val="0D1B2A"/>
+                            <a:srgbClr val="1F2A37"/>
                           </a:solidFill>
                         </a:rPr>
                         <a:t>3 hrs × 15 MRs/week = 45 hrs/week</a:t>
@@ -9247,7 +8665,7 @@
                       <a:r>
                         <a:rPr sz="1200">
                           <a:solidFill>
-                            <a:srgbClr val="0D1B2A"/>
+                            <a:srgbClr val="1F2A37"/>
                           </a:solidFill>
                         </a:rPr>
                         <a:t>~4 hrs/week</a:t>
@@ -9269,7 +8687,7 @@
                       <a:r>
                         <a:rPr sz="1200">
                           <a:solidFill>
-                            <a:srgbClr val="0D1B2A"/>
+                            <a:srgbClr val="1F2A37"/>
                           </a:solidFill>
                         </a:rPr>
                         <a:t>~91% reduction</a:t>
@@ -9293,7 +8711,7 @@
                       <a:r>
                         <a:rPr sz="1200">
                           <a:solidFill>
-                            <a:srgbClr val="0D1B2A"/>
+                            <a:srgbClr val="1F2A37"/>
                           </a:solidFill>
                         </a:rPr>
                         <a:t>Compliance reporting</a:t>
@@ -9302,7 +8720,7 @@
                   </a:txBody>
                   <a:tcPr>
                     <a:solidFill>
-                      <a:srgbClr val="F0F4F8"/>
+                      <a:srgbClr val="FAFAFA"/>
                     </a:solidFill>
                   </a:tcPr>
                 </a:tc>
@@ -9315,7 +8733,7 @@
                       <a:r>
                         <a:rPr sz="1200">
                           <a:solidFill>
-                            <a:srgbClr val="0D1B2A"/>
+                            <a:srgbClr val="1F2A37"/>
                           </a:solidFill>
                         </a:rPr>
                         <a:t>8 hrs/week manual</a:t>
@@ -9324,7 +8742,7 @@
                   </a:txBody>
                   <a:tcPr>
                     <a:solidFill>
-                      <a:srgbClr val="F0F4F8"/>
+                      <a:srgbClr val="FAFAFA"/>
                     </a:solidFill>
                   </a:tcPr>
                 </a:tc>
@@ -9337,7 +8755,7 @@
                       <a:r>
                         <a:rPr sz="1200">
                           <a:solidFill>
-                            <a:srgbClr val="0D1B2A"/>
+                            <a:srgbClr val="1F2A37"/>
                           </a:solidFill>
                         </a:rPr>
                         <a:t>0 hrs (auto-gen)</a:t>
@@ -9346,7 +8764,7 @@
                   </a:txBody>
                   <a:tcPr>
                     <a:solidFill>
-                      <a:srgbClr val="F0F4F8"/>
+                      <a:srgbClr val="FAFAFA"/>
                     </a:solidFill>
                   </a:tcPr>
                 </a:tc>
@@ -9359,7 +8777,7 @@
                       <a:r>
                         <a:rPr sz="1200">
                           <a:solidFill>
-                            <a:srgbClr val="0D1B2A"/>
+                            <a:srgbClr val="1F2A37"/>
                           </a:solidFill>
                         </a:rPr>
                         <a:t>~100% reduction</a:t>
@@ -9368,7 +8786,7 @@
                   </a:txBody>
                   <a:tcPr>
                     <a:solidFill>
-                      <a:srgbClr val="F0F4F8"/>
+                      <a:srgbClr val="FAFAFA"/>
                     </a:solidFill>
                   </a:tcPr>
                 </a:tc>
@@ -9383,7 +8801,7 @@
                       <a:r>
                         <a:rPr sz="1200">
                           <a:solidFill>
-                            <a:srgbClr val="0D1B2A"/>
+                            <a:srgbClr val="1F2A37"/>
                           </a:solidFill>
                         </a:rPr>
                         <a:t>Knowledge capture</a:t>
@@ -9405,7 +8823,7 @@
                       <a:r>
                         <a:rPr sz="1200">
                           <a:solidFill>
-                            <a:srgbClr val="0D1B2A"/>
+                            <a:srgbClr val="1F2A37"/>
                           </a:solidFill>
                         </a:rPr>
                         <a:t>Lost on attrition</a:t>
@@ -9427,7 +8845,7 @@
                       <a:r>
                         <a:rPr sz="1200">
                           <a:solidFill>
-                            <a:srgbClr val="0D1B2A"/>
+                            <a:srgbClr val="1F2A37"/>
                           </a:solidFill>
                         </a:rPr>
                         <a:t>Stored in vector mem</a:t>
@@ -9449,7 +8867,7 @@
                       <a:r>
                         <a:rPr sz="1200">
                           <a:solidFill>
-                            <a:srgbClr val="0D1B2A"/>
+                            <a:srgbClr val="1F2A37"/>
                           </a:solidFill>
                         </a:rPr>
                         <a:t>Permanent</a:t>
@@ -9473,7 +8891,7 @@
                       <a:r>
                         <a:rPr sz="1200">
                           <a:solidFill>
-                            <a:srgbClr val="0D1B2A"/>
+                            <a:srgbClr val="1F2A37"/>
                           </a:solidFill>
                         </a:rPr>
                         <a:t>TOTAL SAVINGS</a:t>
@@ -9482,7 +8900,7 @@
                   </a:txBody>
                   <a:tcPr>
                     <a:solidFill>
-                      <a:srgbClr val="F0F4F8"/>
+                      <a:srgbClr val="FAFAFA"/>
                     </a:solidFill>
                   </a:tcPr>
                 </a:tc>
@@ -9495,7 +8913,7 @@
                       <a:r>
                         <a:rPr sz="1200">
                           <a:solidFill>
-                            <a:srgbClr val="0D1B2A"/>
+                            <a:srgbClr val="1F2A37"/>
                           </a:solidFill>
                         </a:rPr>
                         <a:t>68 hrs/week ≈ 1.7 FTE</a:t>
@@ -9504,7 +8922,7 @@
                   </a:txBody>
                   <a:tcPr>
                     <a:solidFill>
-                      <a:srgbClr val="F0F4F8"/>
+                      <a:srgbClr val="FAFAFA"/>
                     </a:solidFill>
                   </a:tcPr>
                 </a:tc>
@@ -9517,7 +8935,7 @@
                       <a:r>
                         <a:rPr sz="1200">
                           <a:solidFill>
-                            <a:srgbClr val="0D1B2A"/>
+                            <a:srgbClr val="1F2A37"/>
                           </a:solidFill>
                         </a:rPr>
                         <a:t>—</a:t>
@@ -9526,7 +8944,7 @@
                   </a:txBody>
                   <a:tcPr>
                     <a:solidFill>
-                      <a:srgbClr val="F0F4F8"/>
+                      <a:srgbClr val="FAFAFA"/>
                     </a:solidFill>
                   </a:tcPr>
                 </a:tc>
@@ -9539,7 +8957,7 @@
                       <a:r>
                         <a:rPr sz="1200">
                           <a:solidFill>
-                            <a:srgbClr val="0D1B2A"/>
+                            <a:srgbClr val="1F2A37"/>
                           </a:solidFill>
                         </a:rPr>
                         <a:t>~€120K/yr*</a:t>
@@ -9548,7 +8966,7 @@
                   </a:txBody>
                   <a:tcPr>
                     <a:solidFill>
-                      <a:srgbClr val="F0F4F8"/>
+                      <a:srgbClr val="FAFAFA"/>
                     </a:solidFill>
                   </a:tcPr>
                 </a:tc>
@@ -9583,7 +9001,7 @@
             <a:r>
               <a:rPr sz="1100" b="0" i="1">
                 <a:solidFill>
-                  <a:srgbClr val="647487"/>
+                  <a:srgbClr val="4B5563"/>
                 </a:solidFill>
               </a:rPr>
               <a:t>* All figures are ASSUMPTION-BASED estimates. Replace with actual team data before presenting externally.</a:t>
@@ -9606,7 +9024,7 @@
             <a:avLst/>
           </a:prstGeom>
           <a:solidFill>
-            <a:srgbClr val="0D1B2A"/>
+            <a:srgbClr val="1F2A37"/>
           </a:solidFill>
           <a:ln>
             <a:noFill/>
@@ -9660,10 +9078,10 @@
             <a:r>
               <a:rPr sz="900" b="0" i="0">
                 <a:solidFill>
-                  <a:srgbClr val="647487"/>
+                  <a:srgbClr val="4B5563"/>
                 </a:solidFill>
               </a:rPr>
-              <a:t>SAGE[ai] — Open Source (Apache 2.0) | github.com/Sumanharapanahalli/sage | March 2026</a:t>
+              <a:t>SAGE[ai] — Open Source (MIT) | github.com/Sumanharapanahalli/sage | March 2026</a:t>
             </a:r>
           </a:p>
         </p:txBody>
@@ -9759,7 +9177,7 @@
     <p:bg>
       <p:bgPr>
         <a:solidFill>
-          <a:srgbClr val="F0F4F8"/>
+          <a:srgbClr val="FAFAFA"/>
         </a:solidFill>
         <a:effectLst/>
       </p:bgPr>
@@ -9786,7 +9204,7 @@
             <a:avLst/>
           </a:prstGeom>
           <a:solidFill>
-            <a:srgbClr val="0D1B2A"/>
+            <a:srgbClr val="1F2A37"/>
           </a:solidFill>
           <a:ln>
             <a:noFill/>
@@ -9874,7 +9292,7 @@
             <a:r>
               <a:rPr sz="1600" b="0" i="0">
                 <a:solidFill>
-                  <a:srgbClr val="00B4D8"/>
+                  <a:srgbClr val="047857"/>
                 </a:solidFill>
               </a:rPr>
               <a:t>End-to-end data flow — one direction, fully logged</a:t>
@@ -9897,7 +9315,7 @@
             <a:avLst/>
           </a:prstGeom>
           <a:solidFill>
-            <a:srgbClr val="0D1B2A"/>
+            <a:srgbClr val="1F2A37"/>
           </a:solidFill>
           <a:ln>
             <a:noFill/>
@@ -9986,7 +9404,7 @@
             <a:r>
               <a:rPr sz="2200" b="1" i="0">
                 <a:solidFill>
-                  <a:srgbClr val="0D1B2A"/>
+                  <a:srgbClr val="1F2A37"/>
                 </a:solidFill>
               </a:rPr>
               <a:t>→</a:t>
@@ -10009,7 +9427,7 @@
             <a:avLst/>
           </a:prstGeom>
           <a:solidFill>
-            <a:srgbClr val="0078D4"/>
+            <a:srgbClr val="10B981"/>
           </a:solidFill>
           <a:ln>
             <a:noFill/>
@@ -10098,7 +9516,7 @@
             <a:r>
               <a:rPr sz="2200" b="1" i="0">
                 <a:solidFill>
-                  <a:srgbClr val="0D1B2A"/>
+                  <a:srgbClr val="1F2A37"/>
                 </a:solidFill>
               </a:rPr>
               <a:t>→</a:t>
@@ -10121,7 +9539,7 @@
             <a:avLst/>
           </a:prstGeom>
           <a:solidFill>
-            <a:srgbClr val="0078D4"/>
+            <a:srgbClr val="10B981"/>
           </a:solidFill>
           <a:ln>
             <a:noFill/>
@@ -10210,7 +9628,7 @@
             <a:r>
               <a:rPr sz="2200" b="1" i="0">
                 <a:solidFill>
-                  <a:srgbClr val="0D1B2A"/>
+                  <a:srgbClr val="1F2A37"/>
                 </a:solidFill>
               </a:rPr>
               <a:t>→</a:t>
@@ -10233,7 +9651,7 @@
             <a:avLst/>
           </a:prstGeom>
           <a:solidFill>
-            <a:srgbClr val="0078D4"/>
+            <a:srgbClr val="10B981"/>
           </a:solidFill>
           <a:ln>
             <a:noFill/>
@@ -10322,7 +9740,7 @@
             <a:r>
               <a:rPr sz="2200" b="1" i="0">
                 <a:solidFill>
-                  <a:srgbClr val="0D1B2A"/>
+                  <a:srgbClr val="1F2A37"/>
                 </a:solidFill>
               </a:rPr>
               <a:t>→</a:t>
@@ -10345,7 +9763,7 @@
             <a:avLst/>
           </a:prstGeom>
           <a:solidFill>
-            <a:srgbClr val="FFB700"/>
+            <a:srgbClr val="F59E0B"/>
           </a:solidFill>
           <a:ln>
             <a:noFill/>
@@ -10434,7 +9852,7 @@
             <a:r>
               <a:rPr sz="2200" b="1" i="0">
                 <a:solidFill>
-                  <a:srgbClr val="0D1B2A"/>
+                  <a:srgbClr val="1F2A37"/>
                 </a:solidFill>
               </a:rPr>
               <a:t>→</a:t>
@@ -10457,7 +9875,7 @@
             <a:avLst/>
           </a:prstGeom>
           <a:solidFill>
-            <a:srgbClr val="21C55D"/>
+            <a:srgbClr val="10B981"/>
           </a:solidFill>
           <a:ln>
             <a:noFill/>
@@ -10546,7 +9964,7 @@
             <a:r>
               <a:rPr sz="1300" b="1" i="0">
                 <a:solidFill>
-                  <a:srgbClr val="0078D4"/>
+                  <a:srgbClr val="10B981"/>
                 </a:solidFill>
               </a:rPr>
               <a:t>Event Sources</a:t>
@@ -10580,7 +9998,7 @@
             <a:r>
               <a:rPr sz="1200" b="0" i="0">
                 <a:solidFill>
-                  <a:srgbClr val="0D1B2A"/>
+                  <a:srgbClr val="1F2A37"/>
                 </a:solidFill>
               </a:rPr>
               <a:t>Teams channels · Metabase dashboards · GitLab issues &amp; MRs · Error log uploads</a:t>
@@ -10614,7 +10032,7 @@
             <a:r>
               <a:rPr sz="1300" b="1" i="0">
                 <a:solidFill>
-                  <a:srgbClr val="0078D4"/>
+                  <a:srgbClr val="10B981"/>
                 </a:solidFill>
               </a:rPr>
               <a:t>AI Agents</a:t>
@@ -10648,7 +10066,7 @@
             <a:r>
               <a:rPr sz="1200" b="0" i="0">
                 <a:solidFill>
-                  <a:srgbClr val="0D1B2A"/>
+                  <a:srgbClr val="1F2A37"/>
                 </a:solidFill>
               </a:rPr>
               <a:t>AnalystAgent (log triage) · DeveloperAgent (code review + MR creation) · PlannerAgent (orchestration) · ReAct multi-step loop</a:t>
@@ -10682,7 +10100,7 @@
             <a:r>
               <a:rPr sz="1300" b="1" i="0">
                 <a:solidFill>
-                  <a:srgbClr val="0078D4"/>
+                  <a:srgbClr val="10B981"/>
                 </a:solidFill>
               </a:rPr>
               <a:t>Compliance Layer</a:t>
@@ -10716,7 +10134,7 @@
             <a:r>
               <a:rPr sz="1200" b="0" i="0">
                 <a:solidFill>
-                  <a:srgbClr val="0D1B2A"/>
+                  <a:srgbClr val="1F2A37"/>
                 </a:solidFill>
               </a:rPr>
               <a:t>Immutable SQLite audit log · ISO 13485 trace IDs · FDA 21 CFR Part 11 · Human approval on every proposal</a:t>
@@ -10739,7 +10157,7 @@
             <a:avLst/>
           </a:prstGeom>
           <a:solidFill>
-            <a:srgbClr val="0D1B2A"/>
+            <a:srgbClr val="1F2A37"/>
           </a:solidFill>
           <a:ln>
             <a:noFill/>
@@ -10793,10 +10211,10 @@
             <a:r>
               <a:rPr sz="900" b="0" i="0">
                 <a:solidFill>
-                  <a:srgbClr val="647487"/>
+                  <a:srgbClr val="4B5563"/>
                 </a:solidFill>
               </a:rPr>
-              <a:t>SAGE[ai] — Open Source (Apache 2.0) | github.com/Sumanharapanahalli/sage | March 2026</a:t>
+              <a:t>SAGE[ai] — Open Source (MIT) | github.com/Sumanharapanahalli/sage | March 2026</a:t>
             </a:r>
           </a:p>
         </p:txBody>
@@ -10815,7 +10233,7 @@
     <p:bg>
       <p:bgPr>
         <a:solidFill>
-          <a:srgbClr val="F0F4F8"/>
+          <a:srgbClr val="FAFAFA"/>
         </a:solidFill>
         <a:effectLst/>
       </p:bgPr>
@@ -10842,7 +10260,7 @@
             <a:avLst/>
           </a:prstGeom>
           <a:solidFill>
-            <a:srgbClr val="0D1B2A"/>
+            <a:srgbClr val="1F2A37"/>
           </a:solidFill>
           <a:ln>
             <a:noFill/>
@@ -10930,10 +10348,10 @@
             <a:r>
               <a:rPr sz="1600" b="0" i="0">
                 <a:solidFill>
-                  <a:srgbClr val="00B4D8"/>
+                  <a:srgbClr val="047857"/>
                 </a:solidFill>
               </a:rPr>
-              <a:t>136 API endpoints across 12 integration phases — all open source (Apache 2.0)</a:t>
+              <a:t>136 API endpoints across 12 integration phases — all open source (MIT)</a:t>
             </a:r>
           </a:p>
         </p:txBody>
@@ -10980,7 +10398,7 @@
                   </a:txBody>
                   <a:tcPr>
                     <a:solidFill>
-                      <a:srgbClr val="0078D4"/>
+                      <a:srgbClr val="10B981"/>
                     </a:solidFill>
                   </a:tcPr>
                 </a:tc>
@@ -11002,7 +10420,7 @@
                   </a:txBody>
                   <a:tcPr>
                     <a:solidFill>
-                      <a:srgbClr val="0078D4"/>
+                      <a:srgbClr val="10B981"/>
                     </a:solidFill>
                   </a:tcPr>
                 </a:tc>
@@ -11024,7 +10442,7 @@
                   </a:txBody>
                   <a:tcPr>
                     <a:solidFill>
-                      <a:srgbClr val="0078D4"/>
+                      <a:srgbClr val="10B981"/>
                     </a:solidFill>
                   </a:tcPr>
                 </a:tc>
@@ -11039,7 +10457,7 @@
                       <a:r>
                         <a:rPr sz="1200">
                           <a:solidFill>
-                            <a:srgbClr val="0D1B2A"/>
+                            <a:srgbClr val="1F2A37"/>
                           </a:solidFill>
                         </a:rPr>
                         <a:t>01</a:t>
@@ -11048,7 +10466,7 @@
                   </a:txBody>
                   <a:tcPr>
                     <a:solidFill>
-                      <a:srgbClr val="F0F4F8"/>
+                      <a:srgbClr val="FAFAFA"/>
                     </a:solidFill>
                   </a:tcPr>
                 </a:tc>
@@ -11061,7 +10479,7 @@
                       <a:r>
                         <a:rPr sz="1200">
                           <a:solidFill>
-                            <a:srgbClr val="0D1B2A"/>
+                            <a:srgbClr val="1F2A37"/>
                           </a:solidFill>
                         </a:rPr>
                         <a:t>Log Analysis</a:t>
@@ -11070,7 +10488,7 @@
                   </a:txBody>
                   <a:tcPr>
                     <a:solidFill>
-                      <a:srgbClr val="F0F4F8"/>
+                      <a:srgbClr val="FAFAFA"/>
                     </a:solidFill>
                   </a:tcPr>
                 </a:tc>
@@ -11083,7 +10501,7 @@
                       <a:r>
                         <a:rPr sz="1200">
                           <a:solidFill>
-                            <a:srgbClr val="0D1B2A"/>
+                            <a:srgbClr val="1F2A37"/>
                           </a:solidFill>
                         </a:rPr>
                         <a:t>AI triage in under 60 s — severity RED / AMBER / GREEN with root-cause reasoning</a:t>
@@ -11092,7 +10510,7 @@
                   </a:txBody>
                   <a:tcPr>
                     <a:solidFill>
-                      <a:srgbClr val="F0F4F8"/>
+                      <a:srgbClr val="FAFAFA"/>
                     </a:solidFill>
                   </a:tcPr>
                 </a:tc>
@@ -11107,7 +10525,7 @@
                       <a:r>
                         <a:rPr sz="1200">
                           <a:solidFill>
-                            <a:srgbClr val="0D1B2A"/>
+                            <a:srgbClr val="1F2A37"/>
                           </a:solidFill>
                         </a:rPr>
                         <a:t>02</a:t>
@@ -11129,7 +10547,7 @@
                       <a:r>
                         <a:rPr sz="1200">
                           <a:solidFill>
-                            <a:srgbClr val="0D1B2A"/>
+                            <a:srgbClr val="1F2A37"/>
                           </a:solidFill>
                         </a:rPr>
                         <a:t>Code Review</a:t>
@@ -11151,7 +10569,7 @@
                       <a:r>
                         <a:rPr sz="1200">
                           <a:solidFill>
-                            <a:srgbClr val="0D1B2A"/>
+                            <a:srgbClr val="1F2A37"/>
                           </a:solidFill>
                         </a:rPr>
                         <a:t>ReAct multi-step reasoning + CI pipeline status check</a:t>
@@ -11175,7 +10593,7 @@
                       <a:r>
                         <a:rPr sz="1200">
                           <a:solidFill>
-                            <a:srgbClr val="0D1B2A"/>
+                            <a:srgbClr val="1F2A37"/>
                           </a:solidFill>
                         </a:rPr>
                         <a:t>03</a:t>
@@ -11184,7 +10602,7 @@
                   </a:txBody>
                   <a:tcPr>
                     <a:solidFill>
-                      <a:srgbClr val="F0F4F8"/>
+                      <a:srgbClr val="FAFAFA"/>
                     </a:solidFill>
                   </a:tcPr>
                 </a:tc>
@@ -11197,7 +10615,7 @@
                       <a:r>
                         <a:rPr sz="1200">
                           <a:solidFill>
-                            <a:srgbClr val="0D1B2A"/>
+                            <a:srgbClr val="1F2A37"/>
                           </a:solidFill>
                         </a:rPr>
                         <a:t>MR Creation</a:t>
@@ -11206,7 +10624,7 @@
                   </a:txBody>
                   <a:tcPr>
                     <a:solidFill>
-                      <a:srgbClr val="F0F4F8"/>
+                      <a:srgbClr val="FAFAFA"/>
                     </a:solidFill>
                   </a:tcPr>
                 </a:tc>
@@ -11219,7 +10637,7 @@
                       <a:r>
                         <a:rPr sz="1200">
                           <a:solidFill>
-                            <a:srgbClr val="0D1B2A"/>
+                            <a:srgbClr val="1F2A37"/>
                           </a:solidFill>
                         </a:rPr>
                         <a:t>Auto-draft merge request from GitLab issue, branch naming, description</a:t>
@@ -11228,7 +10646,7 @@
                   </a:txBody>
                   <a:tcPr>
                     <a:solidFill>
-                      <a:srgbClr val="F0F4F8"/>
+                      <a:srgbClr val="FAFAFA"/>
                     </a:solidFill>
                   </a:tcPr>
                 </a:tc>
@@ -11243,7 +10661,7 @@
                       <a:r>
                         <a:rPr sz="1200">
                           <a:solidFill>
-                            <a:srgbClr val="0D1B2A"/>
+                            <a:srgbClr val="1F2A37"/>
                           </a:solidFill>
                         </a:rPr>
                         <a:t>04</a:t>
@@ -11265,7 +10683,7 @@
                       <a:r>
                         <a:rPr sz="1200">
                           <a:solidFill>
-                            <a:srgbClr val="0D1B2A"/>
+                            <a:srgbClr val="1F2A37"/>
                           </a:solidFill>
                         </a:rPr>
                         <a:t>24/7 Monitor</a:t>
@@ -11287,7 +10705,7 @@
                       <a:r>
                         <a:rPr sz="1200">
                           <a:solidFill>
-                            <a:srgbClr val="0D1B2A"/>
+                            <a:srgbClr val="1F2A37"/>
                           </a:solidFill>
                         </a:rPr>
                         <a:t>Teams, Metabase, GitLab event detection — zero polling lag</a:t>
@@ -11311,7 +10729,7 @@
                       <a:r>
                         <a:rPr sz="1200">
                           <a:solidFill>
-                            <a:srgbClr val="0D1B2A"/>
+                            <a:srgbClr val="1F2A37"/>
                           </a:solidFill>
                         </a:rPr>
                         <a:t>05</a:t>
@@ -11320,7 +10738,7 @@
                   </a:txBody>
                   <a:tcPr>
                     <a:solidFill>
-                      <a:srgbClr val="F0F4F8"/>
+                      <a:srgbClr val="FAFAFA"/>
                     </a:solidFill>
                   </a:tcPr>
                 </a:tc>
@@ -11333,7 +10751,7 @@
                       <a:r>
                         <a:rPr sz="1200">
                           <a:solidFill>
-                            <a:srgbClr val="0D1B2A"/>
+                            <a:srgbClr val="1F2A37"/>
                           </a:solidFill>
                         </a:rPr>
                         <a:t>SSE Streaming</a:t>
@@ -11342,7 +10760,7 @@
                   </a:txBody>
                   <a:tcPr>
                     <a:solidFill>
-                      <a:srgbClr val="F0F4F8"/>
+                      <a:srgbClr val="FAFAFA"/>
                     </a:solidFill>
                   </a:tcPr>
                 </a:tc>
@@ -11355,7 +10773,7 @@
                       <a:r>
                         <a:rPr sz="1200">
                           <a:solidFill>
-                            <a:srgbClr val="0D1B2A"/>
+                            <a:srgbClr val="1F2A37"/>
                           </a:solidFill>
                         </a:rPr>
                         <a:t>Real-time token-by-token output to dashboard — all providers supported</a:t>
@@ -11364,7 +10782,7 @@
                   </a:txBody>
                   <a:tcPr>
                     <a:solidFill>
-                      <a:srgbClr val="F0F4F8"/>
+                      <a:srgbClr val="FAFAFA"/>
                     </a:solidFill>
                   </a:tcPr>
                 </a:tc>
@@ -11379,7 +10797,7 @@
                       <a:r>
                         <a:rPr sz="1200">
                           <a:solidFill>
-                            <a:srgbClr val="0D1B2A"/>
+                            <a:srgbClr val="1F2A37"/>
                           </a:solidFill>
                         </a:rPr>
                         <a:t>06</a:t>
@@ -11401,7 +10819,7 @@
                       <a:r>
                         <a:rPr sz="1200">
                           <a:solidFill>
-                            <a:srgbClr val="0D1B2A"/>
+                            <a:srgbClr val="1F2A37"/>
                           </a:solidFill>
                         </a:rPr>
                         <a:t>Onboarding Wizard</a:t>
@@ -11423,7 +10841,7 @@
                       <a:r>
                         <a:rPr sz="1200">
                           <a:solidFill>
-                            <a:srgbClr val="0D1B2A"/>
+                            <a:srgbClr val="1F2A37"/>
                           </a:solidFill>
                         </a:rPr>
                         <a:t>Plain-language description to full YAML solution in under 60 seconds</a:t>
@@ -11447,7 +10865,7 @@
                       <a:r>
                         <a:rPr sz="1200">
                           <a:solidFill>
-                            <a:srgbClr val="0D1B2A"/>
+                            <a:srgbClr val="1F2A37"/>
                           </a:solidFill>
                         </a:rPr>
                         <a:t>07</a:t>
@@ -11456,7 +10874,7 @@
                   </a:txBody>
                   <a:tcPr>
                     <a:solidFill>
-                      <a:srgbClr val="F0F4F8"/>
+                      <a:srgbClr val="FAFAFA"/>
                     </a:solidFill>
                   </a:tcPr>
                 </a:tc>
@@ -11469,7 +10887,7 @@
                       <a:r>
                         <a:rPr sz="1200">
                           <a:solidFill>
-                            <a:srgbClr val="0D1B2A"/>
+                            <a:srgbClr val="1F2A37"/>
                           </a:solidFill>
                         </a:rPr>
                         <a:t>Knowledge Base CRUD</a:t>
@@ -11478,7 +10896,7 @@
                   </a:txBody>
                   <a:tcPr>
                     <a:solidFill>
-                      <a:srgbClr val="F0F4F8"/>
+                      <a:srgbClr val="FAFAFA"/>
                     </a:solidFill>
                   </a:tcPr>
                 </a:tc>
@@ -11491,7 +10909,7 @@
                       <a:r>
                         <a:rPr sz="1200">
                           <a:solidFill>
-                            <a:srgbClr val="0D1B2A"/>
+                            <a:srgbClr val="1F2A37"/>
                           </a:solidFill>
                         </a:rPr>
                         <a:t>List / add / delete / bulk-import / semantic search the RAG vector store</a:t>
@@ -11500,7 +10918,7 @@
                   </a:txBody>
                   <a:tcPr>
                     <a:solidFill>
-                      <a:srgbClr val="F0F4F8"/>
+                      <a:srgbClr val="FAFAFA"/>
                     </a:solidFill>
                   </a:tcPr>
                 </a:tc>
@@ -11515,7 +10933,7 @@
                       <a:r>
                         <a:rPr sz="1200">
                           <a:solidFill>
-                            <a:srgbClr val="0D1B2A"/>
+                            <a:srgbClr val="1F2A37"/>
                           </a:solidFill>
                         </a:rPr>
                         <a:t>08</a:t>
@@ -11537,7 +10955,7 @@
                       <a:r>
                         <a:rPr sz="1200">
                           <a:solidFill>
-                            <a:srgbClr val="0D1B2A"/>
+                            <a:srgbClr val="1F2A37"/>
                           </a:solidFill>
                         </a:rPr>
                         <a:t>Slack Approvals</a:t>
@@ -11559,7 +10977,7 @@
                       <a:r>
                         <a:rPr sz="1200">
                           <a:solidFill>
-                            <a:srgbClr val="0D1B2A"/>
+                            <a:srgbClr val="1F2A37"/>
                           </a:solidFill>
                         </a:rPr>
                         <a:t>Block Kit proposals with Approve/Reject buttons — HMAC-verified callbacks</a:t>
@@ -11583,7 +11001,7 @@
                       <a:r>
                         <a:rPr sz="1200">
                           <a:solidFill>
-                            <a:srgbClr val="0D1B2A"/>
+                            <a:srgbClr val="1F2A37"/>
                           </a:solidFill>
                         </a:rPr>
                         <a:t>09</a:t>
@@ -11592,7 +11010,7 @@
                   </a:txBody>
                   <a:tcPr>
                     <a:solidFill>
-                      <a:srgbClr val="F0F4F8"/>
+                      <a:srgbClr val="FAFAFA"/>
                     </a:solidFill>
                   </a:tcPr>
                 </a:tc>
@@ -11605,7 +11023,7 @@
                       <a:r>
                         <a:rPr sz="1200">
                           <a:solidFill>
-                            <a:srgbClr val="0D1B2A"/>
+                            <a:srgbClr val="1F2A37"/>
                           </a:solidFill>
                         </a:rPr>
                         <a:t>Eval &amp; Benchmarking</a:t>
@@ -11614,7 +11032,7 @@
                   </a:txBody>
                   <a:tcPr>
                     <a:solidFill>
-                      <a:srgbClr val="F0F4F8"/>
+                      <a:srgbClr val="FAFAFA"/>
                     </a:solidFill>
                   </a:tcPr>
                 </a:tc>
@@ -11627,7 +11045,7 @@
                       <a:r>
                         <a:rPr sz="1200">
                           <a:solidFill>
-                            <a:srgbClr val="0D1B2A"/>
+                            <a:srgbClr val="1F2A37"/>
                           </a:solidFill>
                         </a:rPr>
                         <a:t>YAML test cases, 0-100 scoring, SQLite history, regression tracking</a:t>
@@ -11636,7 +11054,7 @@
                   </a:txBody>
                   <a:tcPr>
                     <a:solidFill>
-                      <a:srgbClr val="F0F4F8"/>
+                      <a:srgbClr val="FAFAFA"/>
                     </a:solidFill>
                   </a:tcPr>
                 </a:tc>
@@ -11651,7 +11069,7 @@
                       <a:r>
                         <a:rPr sz="1200">
                           <a:solidFill>
-                            <a:srgbClr val="0D1B2A"/>
+                            <a:srgbClr val="1F2A37"/>
                           </a:solidFill>
                         </a:rPr>
                         <a:t>10</a:t>
@@ -11673,7 +11091,7 @@
                       <a:r>
                         <a:rPr sz="1200">
                           <a:solidFill>
-                            <a:srgbClr val="0D1B2A"/>
+                            <a:srgbClr val="1F2A37"/>
                           </a:solidFill>
                         </a:rPr>
                         <a:t>Multi-Tenant</a:t>
@@ -11695,7 +11113,7 @@
                       <a:r>
                         <a:rPr sz="1200">
                           <a:solidFill>
-                            <a:srgbClr val="0D1B2A"/>
+                            <a:srgbClr val="1F2A37"/>
                           </a:solidFill>
                         </a:rPr>
                         <a:t>X-SAGE-Tenant header — per-team knowledge collection isolation</a:t>
@@ -11719,7 +11137,7 @@
                       <a:r>
                         <a:rPr sz="1200">
                           <a:solidFill>
-                            <a:srgbClr val="0D1B2A"/>
+                            <a:srgbClr val="1F2A37"/>
                           </a:solidFill>
                         </a:rPr>
                         <a:t>11</a:t>
@@ -11728,7 +11146,7 @@
                   </a:txBody>
                   <a:tcPr>
                     <a:solidFill>
-                      <a:srgbClr val="F0F4F8"/>
+                      <a:srgbClr val="FAFAFA"/>
                     </a:solidFill>
                   </a:tcPr>
                 </a:tc>
@@ -11741,7 +11159,7 @@
                       <a:r>
                         <a:rPr sz="1200">
                           <a:solidFill>
-                            <a:srgbClr val="0D1B2A"/>
+                            <a:srgbClr val="1F2A37"/>
                           </a:solidFill>
                         </a:rPr>
                         <a:t>Durable Workflows</a:t>
@@ -11750,7 +11168,7 @@
                   </a:txBody>
                   <a:tcPr>
                     <a:solidFill>
-                      <a:srgbClr val="F0F4F8"/>
+                      <a:srgbClr val="FAFAFA"/>
                     </a:solidFill>
                   </a:tcPr>
                 </a:tc>
@@ -11763,7 +11181,7 @@
                       <a:r>
                         <a:rPr sz="1200">
                           <a:solidFill>
-                            <a:srgbClr val="0D1B2A"/>
+                            <a:srgbClr val="1F2A37"/>
                           </a:solidFill>
                         </a:rPr>
                         <a:t>LangGraph interrupt/resume + Temporal — workflows survive server restart</a:t>
@@ -11772,7 +11190,7 @@
                   </a:txBody>
                   <a:tcPr>
                     <a:solidFill>
-                      <a:srgbClr val="F0F4F8"/>
+                      <a:srgbClr val="FAFAFA"/>
                     </a:solidFill>
                   </a:tcPr>
                 </a:tc>
@@ -11787,7 +11205,7 @@
                       <a:r>
                         <a:rPr sz="1200">
                           <a:solidFill>
-                            <a:srgbClr val="0D1B2A"/>
+                            <a:srgbClr val="1F2A37"/>
                           </a:solidFill>
                         </a:rPr>
                         <a:t>12</a:t>
@@ -11809,7 +11227,7 @@
                       <a:r>
                         <a:rPr sz="1200">
                           <a:solidFill>
-                            <a:srgbClr val="0D1B2A"/>
+                            <a:srgbClr val="1F2A37"/>
                           </a:solidFill>
                         </a:rPr>
                         <a:t>Audit Trail</a:t>
@@ -11831,7 +11249,7 @@
                       <a:r>
                         <a:rPr sz="1200">
                           <a:solidFill>
-                            <a:srgbClr val="0D1B2A"/>
+                            <a:srgbClr val="1F2A37"/>
                           </a:solidFill>
                         </a:rPr>
                         <a:t>Every decision traceable, ISO 13485 compliant, UUID per event</a:t>
@@ -11855,7 +11273,7 @@
                       <a:r>
                         <a:rPr sz="1200">
                           <a:solidFill>
-                            <a:srgbClr val="0D1B2A"/>
+                            <a:srgbClr val="1F2A37"/>
                           </a:solidFill>
                         </a:rPr>
                         <a:t>13</a:t>
@@ -11864,7 +11282,7 @@
                   </a:txBody>
                   <a:tcPr>
                     <a:solidFill>
-                      <a:srgbClr val="F0F4F8"/>
+                      <a:srgbClr val="FAFAFA"/>
                     </a:solidFill>
                   </a:tcPr>
                 </a:tc>
@@ -11877,7 +11295,7 @@
                       <a:r>
                         <a:rPr sz="1200">
                           <a:solidFill>
-                            <a:srgbClr val="0D1B2A"/>
+                            <a:srgbClr val="1F2A37"/>
                           </a:solidFill>
                         </a:rPr>
                         <a:t>Web Dashboard</a:t>
@@ -11886,7 +11304,7 @@
                   </a:txBody>
                   <a:tcPr>
                     <a:solidFill>
-                      <a:srgbClr val="F0F4F8"/>
+                      <a:srgbClr val="FAFAFA"/>
                     </a:solidFill>
                   </a:tcPr>
                 </a:tc>
@@ -11899,7 +11317,7 @@
                       <a:r>
                         <a:rPr sz="1200">
                           <a:solidFill>
-                            <a:srgbClr val="0D1B2A"/>
+                            <a:srgbClr val="1F2A37"/>
                           </a:solidFill>
                         </a:rPr>
                         <a:t>Dashboard, Analyst, Developer, Audit, Monitor — no CLI needed</a:t>
@@ -11908,7 +11326,7 @@
                   </a:txBody>
                   <a:tcPr>
                     <a:solidFill>
-                      <a:srgbClr val="F0F4F8"/>
+                      <a:srgbClr val="FAFAFA"/>
                     </a:solidFill>
                   </a:tcPr>
                 </a:tc>
@@ -11932,7 +11350,7 @@
             <a:avLst/>
           </a:prstGeom>
           <a:solidFill>
-            <a:srgbClr val="0D1B2A"/>
+            <a:srgbClr val="1F2A37"/>
           </a:solidFill>
           <a:ln>
             <a:noFill/>
@@ -11986,10 +11404,10 @@
             <a:r>
               <a:rPr sz="900" b="0" i="0">
                 <a:solidFill>
-                  <a:srgbClr val="647487"/>
+                  <a:srgbClr val="4B5563"/>
                 </a:solidFill>
               </a:rPr>
-              <a:t>SAGE[ai] — Open Source (Apache 2.0) | github.com/Sumanharapanahalli/sage | March 2026</a:t>
+              <a:t>SAGE[ai] — Open Source (MIT) | github.com/Sumanharapanahalli/sage | March 2026</a:t>
             </a:r>
           </a:p>
         </p:txBody>
@@ -12008,7 +11426,7 @@
     <p:bg>
       <p:bgPr>
         <a:solidFill>
-          <a:srgbClr val="F0F4F8"/>
+          <a:srgbClr val="FAFAFA"/>
         </a:solidFill>
         <a:effectLst/>
       </p:bgPr>
@@ -12035,7 +11453,7 @@
             <a:avLst/>
           </a:prstGeom>
           <a:solidFill>
-            <a:srgbClr val="0D1B2A"/>
+            <a:srgbClr val="1F2A37"/>
           </a:solidFill>
           <a:ln>
             <a:noFill/>
@@ -12123,7 +11541,7 @@
             <a:r>
               <a:rPr sz="1600" b="0" i="0">
                 <a:solidFill>
-                  <a:srgbClr val="00B4D8"/>
+                  <a:srgbClr val="047857"/>
                 </a:solidFill>
               </a:rPr>
               <a:t>Standards compliance is built-in, not bolted-on</a:t>
@@ -12157,7 +11575,7 @@
             <a:r>
               <a:rPr sz="1500" b="0" i="0">
                 <a:solidFill>
-                  <a:srgbClr val="0D1B2A"/>
+                  <a:srgbClr val="1F2A37"/>
                 </a:solidFill>
               </a:rPr>
               <a:t>ISO 13485:2016  —  Quality Management System</a:t>
@@ -12191,7 +11609,7 @@
             <a:r>
               <a:rPr sz="1500" b="0" i="0">
                 <a:solidFill>
-                  <a:srgbClr val="0D1B2A"/>
+                  <a:srgbClr val="1F2A37"/>
                 </a:solidFill>
               </a:rPr>
               <a:t>ISO 14971:2019  —  Risk Management — 7 risks identified &amp; controlled</a:t>
@@ -12225,7 +11643,7 @@
             <a:r>
               <a:rPr sz="1500" b="0" i="0">
                 <a:solidFill>
-                  <a:srgbClr val="0D1B2A"/>
+                  <a:srgbClr val="1F2A37"/>
                 </a:solidFill>
               </a:rPr>
               <a:t>IEC 62304:2006  —  Medical Device Software Lifecycle</a:t>
@@ -12259,7 +11677,7 @@
             <a:r>
               <a:rPr sz="1500" b="0" i="0">
                 <a:solidFill>
-                  <a:srgbClr val="0D1B2A"/>
+                  <a:srgbClr val="1F2A37"/>
                 </a:solidFill>
               </a:rPr>
               <a:t>FDA 21 CFR Part 11  —  Electronic Records &amp; Signatures</a:t>
@@ -12293,7 +11711,7 @@
             <a:r>
               <a:rPr sz="1500" b="0" i="0">
                 <a:solidFill>
-                  <a:srgbClr val="0D1B2A"/>
+                  <a:srgbClr val="1F2A37"/>
                 </a:solidFill>
               </a:rPr>
               <a:t>FDA Cybersecurity Guidance 2023  —  Threat modelling, SBOM, update policy</a:t>
@@ -12327,7 +11745,7 @@
             <a:r>
               <a:rPr sz="1600" b="1" i="0">
                 <a:solidFill>
-                  <a:srgbClr val="0078D4"/>
+                  <a:srgbClr val="10B981"/>
                 </a:solidFill>
               </a:rPr>
               <a:t>How We Comply</a:t>
@@ -12361,7 +11779,7 @@
             <a:r>
               <a:rPr sz="1300" b="0" i="0">
                 <a:solidFill>
-                  <a:srgbClr val="0D1B2A"/>
+                  <a:srgbClr val="1F2A37"/>
                 </a:solidFill>
               </a:rPr>
               <a:t>  Immutable append-only audit log (no deletes, ever)</a:t>
@@ -12395,7 +11813,7 @@
             <a:r>
               <a:rPr sz="1300" b="0" i="0">
                 <a:solidFill>
-                  <a:srgbClr val="0D1B2A"/>
+                  <a:srgbClr val="1F2A37"/>
                 </a:solidFill>
               </a:rPr>
               <a:t>  UUID trace ID on every AI decision</a:t>
@@ -12429,7 +11847,7 @@
             <a:r>
               <a:rPr sz="1300" b="0" i="0">
                 <a:solidFill>
-                  <a:srgbClr val="0D1B2A"/>
+                  <a:srgbClr val="1F2A37"/>
                 </a:solidFill>
               </a:rPr>
               <a:t>  Human approval gate on every proposal — enforced in code</a:t>
@@ -12463,7 +11881,7 @@
             <a:r>
               <a:rPr sz="1300" b="0" i="0">
                 <a:solidFill>
-                  <a:srgbClr val="0D1B2A"/>
+                  <a:srgbClr val="1F2A37"/>
                 </a:solidFill>
               </a:rPr>
               <a:t>  Full DHF: SRS · RTM · V&amp;V Plan · SOUP Inventory</a:t>
@@ -12497,7 +11915,7 @@
             <a:r>
               <a:rPr sz="1300" b="0" i="0">
                 <a:solidFill>
-                  <a:srgbClr val="0D1B2A"/>
+                  <a:srgbClr val="1F2A37"/>
                 </a:solidFill>
               </a:rPr>
               <a:t>  Air-gapped LLM option — no cloud dependency required</a:t>
@@ -12520,7 +11938,7 @@
             <a:avLst/>
           </a:prstGeom>
           <a:solidFill>
-            <a:srgbClr val="0D1B2A"/>
+            <a:srgbClr val="1F2A37"/>
           </a:solidFill>
           <a:ln>
             <a:noFill/>
@@ -12574,10 +11992,10 @@
             <a:r>
               <a:rPr sz="900" b="0" i="0">
                 <a:solidFill>
-                  <a:srgbClr val="647487"/>
+                  <a:srgbClr val="4B5563"/>
                 </a:solidFill>
               </a:rPr>
-              <a:t>SAGE[ai] — Open Source (Apache 2.0) | github.com/Sumanharapanahalli/sage | March 2026</a:t>
+              <a:t>SAGE[ai] — Open Source (MIT) | github.com/Sumanharapanahalli/sage | March 2026</a:t>
             </a:r>
           </a:p>
         </p:txBody>
